--- a/ppt/Module3_Detecting_Labels_in_Your_Own_Video_Data.pptx
+++ b/ppt/Module3_Detecting_Labels_in_Your_Own_Video_Data.pptx
@@ -525,6 +525,10 @@
           </p:nvPr>
         </p:nvSpPr>
         <p:spPr/>
+        <p:txBody>
+          <a:bodyPr/>
+          <a:p/>
+        </p:txBody>
       </p:sp>
       <p:sp>
         <p:nvSpPr>
@@ -609,6 +613,10 @@
           </p:nvPr>
         </p:nvSpPr>
         <p:spPr/>
+        <p:txBody>
+          <a:bodyPr/>
+          <a:p/>
+        </p:txBody>
       </p:sp>
       <p:sp>
         <p:nvSpPr>
@@ -694,6 +702,10 @@
           </p:nvPr>
         </p:nvSpPr>
         <p:spPr/>
+        <p:txBody>
+          <a:bodyPr/>
+          <a:p/>
+        </p:txBody>
       </p:sp>
       <p:sp>
         <p:nvSpPr>
@@ -779,6 +791,10 @@
           </p:nvPr>
         </p:nvSpPr>
         <p:spPr/>
+        <p:txBody>
+          <a:bodyPr/>
+          <a:p/>
+        </p:txBody>
       </p:sp>
       <p:sp>
         <p:nvSpPr>
@@ -864,6 +880,10 @@
           </p:nvPr>
         </p:nvSpPr>
         <p:spPr/>
+        <p:txBody>
+          <a:bodyPr/>
+          <a:p/>
+        </p:txBody>
       </p:sp>
       <p:sp>
         <p:nvSpPr>
@@ -949,6 +969,10 @@
           </p:nvPr>
         </p:nvSpPr>
         <p:spPr/>
+        <p:txBody>
+          <a:bodyPr/>
+          <a:p/>
+        </p:txBody>
       </p:sp>
       <p:sp>
         <p:nvSpPr>
@@ -1034,6 +1058,10 @@
           </p:nvPr>
         </p:nvSpPr>
         <p:spPr/>
+        <p:txBody>
+          <a:bodyPr/>
+          <a:p/>
+        </p:txBody>
       </p:sp>
       <p:sp>
         <p:nvSpPr>
@@ -1129,8 +1157,8 @@
           <a:lstStyle>
             <a:lvl1pPr algn="ctr">
               <a:defRPr sz="6000">
-                <a:latin typeface="Times New Roman" panose="02020603050405020304" pitchFamily="18" charset="0"/>
-                <a:cs typeface="Times New Roman" panose="02020603050405020304" pitchFamily="18" charset="0"/>
+                <a:latin typeface="Liberation Serif" panose="02020603050405020304" pitchFamily="18" charset="0"/>
+                <a:cs typeface="Liberation Serif" panose="02020603050405020304" pitchFamily="18" charset="0"/>
               </a:defRPr>
             </a:lvl1pPr>
           </a:lstStyle>
@@ -1165,8 +1193,8 @@
             <a:lvl1pPr marL="0" indent="0" algn="ctr">
               <a:buNone/>
               <a:defRPr sz="2400">
-                <a:latin typeface="Times New Roman" panose="02020603050405020304" pitchFamily="18" charset="0"/>
-                <a:cs typeface="Times New Roman" panose="02020603050405020304" pitchFamily="18" charset="0"/>
+                <a:latin typeface="Liberation Serif" panose="02020603050405020304" pitchFamily="18" charset="0"/>
+                <a:cs typeface="Liberation Serif" panose="02020603050405020304" pitchFamily="18" charset="0"/>
               </a:defRPr>
             </a:lvl1pPr>
             <a:lvl2pPr marL="457200" indent="0" algn="ctr">
@@ -1227,8 +1255,8 @@
           <a:lstStyle>
             <a:lvl1pPr>
               <a:defRPr>
-                <a:latin typeface="Times New Roman" panose="02020603050405020304" pitchFamily="18" charset="0"/>
-                <a:cs typeface="Times New Roman" panose="02020603050405020304" pitchFamily="18" charset="0"/>
+                <a:latin typeface="Liberation Serif" panose="02020603050405020304" pitchFamily="18" charset="0"/>
+                <a:cs typeface="Liberation Serif" panose="02020603050405020304" pitchFamily="18" charset="0"/>
               </a:defRPr>
             </a:lvl1pPr>
           </a:lstStyle>
@@ -1261,8 +1289,8 @@
                 <a:solidFill>
                   <a:schemeClr val="tx1"/>
                 </a:solidFill>
-                <a:latin typeface="Times New Roman" panose="02020603050405020304" pitchFamily="18" charset="0"/>
-                <a:cs typeface="Times New Roman" panose="02020603050405020304" pitchFamily="18" charset="0"/>
+                <a:latin typeface="Liberation Serif" panose="02020603050405020304" pitchFamily="18" charset="0"/>
+                <a:cs typeface="Liberation Serif" panose="02020603050405020304" pitchFamily="18" charset="0"/>
               </a:defRPr>
             </a:lvl1pPr>
           </a:lstStyle>
@@ -1287,8 +1315,8 @@
           <a:lstStyle>
             <a:lvl1pPr>
               <a:defRPr>
-                <a:latin typeface="Times New Roman" panose="02020603050405020304" pitchFamily="18" charset="0"/>
-                <a:cs typeface="Times New Roman" panose="02020603050405020304" pitchFamily="18" charset="0"/>
+                <a:latin typeface="Liberation Serif" panose="02020603050405020304" pitchFamily="18" charset="0"/>
+                <a:cs typeface="Liberation Serif" panose="02020603050405020304" pitchFamily="18" charset="0"/>
               </a:defRPr>
             </a:lvl1pPr>
           </a:lstStyle>
@@ -1327,35 +1355,35 @@
             <a:pPr algn="ctr"/>
             <a:r>
               <a:rPr lang="da-DK" altLang="ko-KR" sz="1200" dirty="0" smtClean="0">
-                <a:latin typeface="Times New Roman" panose="02020603050405020304" pitchFamily="18" charset="0"/>
-                <a:cs typeface="Times New Roman" panose="02020603050405020304" pitchFamily="18" charset="0"/>
+                <a:latin typeface="Liberation Serif" panose="02020603050405020304" pitchFamily="18" charset="0"/>
+                <a:cs typeface="Liberation Serif" panose="02020603050405020304" pitchFamily="18" charset="0"/>
               </a:rPr>
               <a:t>Jongho</a:t>
             </a:r>
             <a:r>
               <a:rPr lang="da-DK" altLang="ko-KR" sz="1200" baseline="0" dirty="0" smtClean="0">
-                <a:latin typeface="Times New Roman" panose="02020603050405020304" pitchFamily="18" charset="0"/>
-                <a:cs typeface="Times New Roman" panose="02020603050405020304" pitchFamily="18" charset="0"/>
+                <a:latin typeface="Liberation Serif" panose="02020603050405020304" pitchFamily="18" charset="0"/>
+                <a:cs typeface="Liberation Serif" panose="02020603050405020304" pitchFamily="18" charset="0"/>
               </a:rPr>
               <a:t> Kim (</a:t>
             </a:r>
             <a:r>
               <a:rPr lang="da-DK" altLang="ko-KR" sz="1200" baseline="0" dirty="0" err="1" smtClean="0">
-                <a:latin typeface="Times New Roman" panose="02020603050405020304" pitchFamily="18" charset="0"/>
-                <a:cs typeface="Times New Roman" panose="02020603050405020304" pitchFamily="18" charset="0"/>
+                <a:latin typeface="Liberation Serif" panose="02020603050405020304" pitchFamily="18" charset="0"/>
+                <a:cs typeface="Liberation Serif" panose="02020603050405020304" pitchFamily="18" charset="0"/>
               </a:rPr>
               <a:t>quantic.jh@gmail.com</a:t>
             </a:r>
             <a:r>
               <a:rPr lang="da-DK" altLang="ko-KR" sz="1200" baseline="0" dirty="0" smtClean="0">
-                <a:latin typeface="Times New Roman" panose="02020603050405020304" pitchFamily="18" charset="0"/>
-                <a:cs typeface="Times New Roman" panose="02020603050405020304" pitchFamily="18" charset="0"/>
+                <a:latin typeface="Liberation Serif" panose="02020603050405020304" pitchFamily="18" charset="0"/>
+                <a:cs typeface="Liberation Serif" panose="02020603050405020304" pitchFamily="18" charset="0"/>
               </a:rPr>
               <a:t>)</a:t>
             </a:r>
             <a:endParaRPr lang="ko-KR" altLang="en-US" sz="1200" dirty="0">
-              <a:latin typeface="Times New Roman" panose="02020603050405020304" pitchFamily="18" charset="0"/>
-              <a:cs typeface="Times New Roman" panose="02020603050405020304" pitchFamily="18" charset="0"/>
+              <a:latin typeface="Liberation Serif" panose="02020603050405020304" pitchFamily="18" charset="0"/>
+              <a:cs typeface="Liberation Serif" panose="02020603050405020304" pitchFamily="18" charset="0"/>
             </a:endParaRPr>
           </a:p>
         </p:txBody>
@@ -1818,8 +1846,8 @@
           <a:lstStyle>
             <a:lvl1pPr>
               <a:defRPr>
-                <a:latin typeface="Times New Roman" panose="02020603050405020304" pitchFamily="18" charset="0"/>
-                <a:cs typeface="Times New Roman" panose="02020603050405020304" pitchFamily="18" charset="0"/>
+                <a:latin typeface="Liberation Serif" panose="02020603050405020304" pitchFamily="18" charset="0"/>
+                <a:cs typeface="Liberation Serif" panose="02020603050405020304" pitchFamily="18" charset="0"/>
               </a:defRPr>
             </a:lvl1pPr>
           </a:lstStyle>
@@ -1848,32 +1876,32 @@
           <a:lstStyle>
             <a:lvl1pPr>
               <a:defRPr>
-                <a:latin typeface="Times New Roman" panose="02020603050405020304" pitchFamily="18" charset="0"/>
-                <a:cs typeface="Times New Roman" panose="02020603050405020304" pitchFamily="18" charset="0"/>
+                <a:latin typeface="Liberation Serif" panose="02020603050405020304" pitchFamily="18" charset="0"/>
+                <a:cs typeface="Liberation Serif" panose="02020603050405020304" pitchFamily="18" charset="0"/>
               </a:defRPr>
             </a:lvl1pPr>
             <a:lvl2pPr>
               <a:defRPr>
-                <a:latin typeface="Times New Roman" panose="02020603050405020304" pitchFamily="18" charset="0"/>
-                <a:cs typeface="Times New Roman" panose="02020603050405020304" pitchFamily="18" charset="0"/>
+                <a:latin typeface="Liberation Serif" panose="02020603050405020304" pitchFamily="18" charset="0"/>
+                <a:cs typeface="Liberation Serif" panose="02020603050405020304" pitchFamily="18" charset="0"/>
               </a:defRPr>
             </a:lvl2pPr>
             <a:lvl3pPr>
               <a:defRPr>
-                <a:latin typeface="Times New Roman" panose="02020603050405020304" pitchFamily="18" charset="0"/>
-                <a:cs typeface="Times New Roman" panose="02020603050405020304" pitchFamily="18" charset="0"/>
+                <a:latin typeface="Liberation Serif" panose="02020603050405020304" pitchFamily="18" charset="0"/>
+                <a:cs typeface="Liberation Serif" panose="02020603050405020304" pitchFamily="18" charset="0"/>
               </a:defRPr>
             </a:lvl3pPr>
             <a:lvl4pPr>
               <a:defRPr>
-                <a:latin typeface="Times New Roman" panose="02020603050405020304" pitchFamily="18" charset="0"/>
-                <a:cs typeface="Times New Roman" panose="02020603050405020304" pitchFamily="18" charset="0"/>
+                <a:latin typeface="Liberation Serif" panose="02020603050405020304" pitchFamily="18" charset="0"/>
+                <a:cs typeface="Liberation Serif" panose="02020603050405020304" pitchFamily="18" charset="0"/>
               </a:defRPr>
             </a:lvl4pPr>
             <a:lvl5pPr>
               <a:defRPr>
-                <a:latin typeface="Times New Roman" panose="02020603050405020304" pitchFamily="18" charset="0"/>
-                <a:cs typeface="Times New Roman" panose="02020603050405020304" pitchFamily="18" charset="0"/>
+                <a:latin typeface="Liberation Serif" panose="02020603050405020304" pitchFamily="18" charset="0"/>
+                <a:cs typeface="Liberation Serif" panose="02020603050405020304" pitchFamily="18" charset="0"/>
               </a:defRPr>
             </a:lvl5pPr>
           </a:lstStyle>
@@ -1962,8 +1990,8 @@
           </a:lstStyle>
           <a:p>
             <a:endParaRPr lang="ko-KR" altLang="en-US" dirty="0" smtClean="0">
-              <a:latin typeface="Times New Roman" panose="02020603050405020304" pitchFamily="18" charset="0"/>
-              <a:cs typeface="Times New Roman" panose="02020603050405020304" pitchFamily="18" charset="0"/>
+              <a:latin typeface="Liberation Serif" panose="02020603050405020304" pitchFamily="18" charset="0"/>
+              <a:cs typeface="Liberation Serif" panose="02020603050405020304" pitchFamily="18" charset="0"/>
             </a:endParaRPr>
           </a:p>
         </p:txBody>
@@ -2109,8 +2137,8 @@
           </a:lstStyle>
           <a:p>
             <a:endParaRPr lang="ko-KR" altLang="en-US" dirty="0">
-              <a:latin typeface="Times New Roman" panose="02020603050405020304" pitchFamily="18" charset="0"/>
-              <a:cs typeface="Times New Roman" panose="02020603050405020304" pitchFamily="18" charset="0"/>
+              <a:latin typeface="Liberation Serif" panose="02020603050405020304" pitchFamily="18" charset="0"/>
+              <a:cs typeface="Liberation Serif" panose="02020603050405020304" pitchFamily="18" charset="0"/>
             </a:endParaRPr>
           </a:p>
         </p:txBody>
@@ -2140,35 +2168,35 @@
             <a:pPr algn="ctr"/>
             <a:r>
               <a:rPr lang="da-DK" altLang="ko-KR" sz="1200" dirty="0" smtClean="0">
-                <a:latin typeface="Times New Roman" panose="02020603050405020304" pitchFamily="18" charset="0"/>
-                <a:cs typeface="Times New Roman" panose="02020603050405020304" pitchFamily="18" charset="0"/>
+                <a:latin typeface="Liberation Serif" panose="02020603050405020304" pitchFamily="18" charset="0"/>
+                <a:cs typeface="Liberation Serif" panose="02020603050405020304" pitchFamily="18" charset="0"/>
               </a:rPr>
               <a:t>Jongho</a:t>
             </a:r>
             <a:r>
               <a:rPr lang="da-DK" altLang="ko-KR" sz="1200" baseline="0" dirty="0" smtClean="0">
-                <a:latin typeface="Times New Roman" panose="02020603050405020304" pitchFamily="18" charset="0"/>
-                <a:cs typeface="Times New Roman" panose="02020603050405020304" pitchFamily="18" charset="0"/>
+                <a:latin typeface="Liberation Serif" panose="02020603050405020304" pitchFamily="18" charset="0"/>
+                <a:cs typeface="Liberation Serif" panose="02020603050405020304" pitchFamily="18" charset="0"/>
               </a:rPr>
               <a:t> Kim (</a:t>
             </a:r>
             <a:r>
               <a:rPr lang="da-DK" altLang="ko-KR" sz="1200" baseline="0" dirty="0" err="1" smtClean="0">
-                <a:latin typeface="Times New Roman" panose="02020603050405020304" pitchFamily="18" charset="0"/>
-                <a:cs typeface="Times New Roman" panose="02020603050405020304" pitchFamily="18" charset="0"/>
+                <a:latin typeface="Liberation Serif" panose="02020603050405020304" pitchFamily="18" charset="0"/>
+                <a:cs typeface="Liberation Serif" panose="02020603050405020304" pitchFamily="18" charset="0"/>
               </a:rPr>
               <a:t>quantic.jh@gmail.com</a:t>
             </a:r>
             <a:r>
               <a:rPr lang="da-DK" altLang="ko-KR" sz="1200" baseline="0" dirty="0" smtClean="0">
-                <a:latin typeface="Times New Roman" panose="02020603050405020304" pitchFamily="18" charset="0"/>
-                <a:cs typeface="Times New Roman" panose="02020603050405020304" pitchFamily="18" charset="0"/>
+                <a:latin typeface="Liberation Serif" panose="02020603050405020304" pitchFamily="18" charset="0"/>
+                <a:cs typeface="Liberation Serif" panose="02020603050405020304" pitchFamily="18" charset="0"/>
               </a:rPr>
               <a:t>)</a:t>
             </a:r>
             <a:endParaRPr lang="ko-KR" altLang="en-US" sz="1200" dirty="0">
-              <a:latin typeface="Times New Roman" panose="02020603050405020304" pitchFamily="18" charset="0"/>
-              <a:cs typeface="Times New Roman" panose="02020603050405020304" pitchFamily="18" charset="0"/>
+              <a:latin typeface="Liberation Serif" panose="02020603050405020304" pitchFamily="18" charset="0"/>
+              <a:cs typeface="Liberation Serif" panose="02020603050405020304" pitchFamily="18" charset="0"/>
             </a:endParaRPr>
           </a:p>
         </p:txBody>
@@ -2272,8 +2300,8 @@
           <a:lstStyle>
             <a:lvl1pPr>
               <a:defRPr sz="6000">
-                <a:latin typeface="Times New Roman" panose="02020603050405020304" pitchFamily="18" charset="0"/>
-                <a:cs typeface="Times New Roman" panose="02020603050405020304" pitchFamily="18" charset="0"/>
+                <a:latin typeface="Liberation Serif" panose="02020603050405020304" pitchFamily="18" charset="0"/>
+                <a:cs typeface="Liberation Serif" panose="02020603050405020304" pitchFamily="18" charset="0"/>
               </a:defRPr>
             </a:lvl1pPr>
           </a:lstStyle>
@@ -2311,8 +2339,8 @@
                 <a:solidFill>
                   <a:schemeClr val="tx1"/>
                 </a:solidFill>
-                <a:latin typeface="Times New Roman" panose="02020603050405020304" pitchFamily="18" charset="0"/>
-                <a:cs typeface="Times New Roman" panose="02020603050405020304" pitchFamily="18" charset="0"/>
+                <a:latin typeface="Liberation Serif" panose="02020603050405020304" pitchFamily="18" charset="0"/>
+                <a:cs typeface="Liberation Serif" panose="02020603050405020304" pitchFamily="18" charset="0"/>
               </a:defRPr>
             </a:lvl1pPr>
             <a:lvl2pPr marL="457200" indent="0">
@@ -2421,8 +2449,8 @@
           <a:lstStyle>
             <a:lvl1pPr>
               <a:defRPr>
-                <a:latin typeface="Times New Roman" panose="02020603050405020304" pitchFamily="18" charset="0"/>
-                <a:cs typeface="Times New Roman" panose="02020603050405020304" pitchFamily="18" charset="0"/>
+                <a:latin typeface="Liberation Serif" panose="02020603050405020304" pitchFamily="18" charset="0"/>
+                <a:cs typeface="Liberation Serif" panose="02020603050405020304" pitchFamily="18" charset="0"/>
               </a:defRPr>
             </a:lvl1pPr>
           </a:lstStyle>
@@ -2452,8 +2480,8 @@
           <a:lstStyle>
             <a:lvl1pPr>
               <a:defRPr>
-                <a:latin typeface="Times New Roman" panose="02020603050405020304" pitchFamily="18" charset="0"/>
-                <a:cs typeface="Times New Roman" panose="02020603050405020304" pitchFamily="18" charset="0"/>
+                <a:latin typeface="Liberation Serif" panose="02020603050405020304" pitchFamily="18" charset="0"/>
+                <a:cs typeface="Liberation Serif" panose="02020603050405020304" pitchFamily="18" charset="0"/>
               </a:defRPr>
             </a:lvl1pPr>
           </a:lstStyle>
@@ -2478,8 +2506,8 @@
           <a:lstStyle>
             <a:lvl1pPr>
               <a:defRPr>
-                <a:latin typeface="Times New Roman" panose="02020603050405020304" pitchFamily="18" charset="0"/>
-                <a:cs typeface="Times New Roman" panose="02020603050405020304" pitchFamily="18" charset="0"/>
+                <a:latin typeface="Liberation Serif" panose="02020603050405020304" pitchFamily="18" charset="0"/>
+                <a:cs typeface="Liberation Serif" panose="02020603050405020304" pitchFamily="18" charset="0"/>
               </a:defRPr>
             </a:lvl1pPr>
           </a:lstStyle>
@@ -3284,8 +3312,8 @@
           <a:lstStyle>
             <a:lvl1pPr>
               <a:defRPr>
-                <a:latin typeface="Times New Roman" panose="02020603050405020304" pitchFamily="18" charset="0"/>
-                <a:cs typeface="Times New Roman" panose="02020603050405020304" pitchFamily="18" charset="0"/>
+                <a:latin typeface="Liberation Serif" panose="02020603050405020304" pitchFamily="18" charset="0"/>
+                <a:cs typeface="Liberation Serif" panose="02020603050405020304" pitchFamily="18" charset="0"/>
               </a:defRPr>
             </a:lvl1pPr>
           </a:lstStyle>
@@ -3315,8 +3343,8 @@
           <a:lstStyle>
             <a:lvl1pPr>
               <a:defRPr>
-                <a:latin typeface="Times New Roman" panose="02020603050405020304" pitchFamily="18" charset="0"/>
-                <a:cs typeface="Times New Roman" panose="02020603050405020304" pitchFamily="18" charset="0"/>
+                <a:latin typeface="Liberation Serif" panose="02020603050405020304" pitchFamily="18" charset="0"/>
+                <a:cs typeface="Liberation Serif" panose="02020603050405020304" pitchFamily="18" charset="0"/>
               </a:defRPr>
             </a:lvl1pPr>
           </a:lstStyle>
@@ -3341,8 +3369,8 @@
           <a:lstStyle>
             <a:lvl1pPr>
               <a:defRPr>
-                <a:latin typeface="Times New Roman" panose="02020603050405020304" pitchFamily="18" charset="0"/>
-                <a:cs typeface="Times New Roman" panose="02020603050405020304" pitchFamily="18" charset="0"/>
+                <a:latin typeface="Liberation Serif" panose="02020603050405020304" pitchFamily="18" charset="0"/>
+                <a:cs typeface="Liberation Serif" panose="02020603050405020304" pitchFamily="18" charset="0"/>
               </a:defRPr>
             </a:lvl1pPr>
           </a:lstStyle>
@@ -4217,7 +4245,7 @@
         <a:spcBef>
           <a:spcPts val="1000"/>
         </a:spcBef>
-        <a:buFont typeface="Arial" panose="020B0604020202020204" pitchFamily="34" charset="0"/>
+        <a:buFont typeface="Liberation Sans" panose="020B0604020202020204" pitchFamily="34" charset="0"/>
         <a:buChar char="•"/>
         <a:defRPr sz="2800" kern="1200">
           <a:solidFill>
@@ -4235,7 +4263,7 @@
         <a:spcBef>
           <a:spcPts val="500"/>
         </a:spcBef>
-        <a:buFont typeface="Arial" panose="020B0604020202020204" pitchFamily="34" charset="0"/>
+        <a:buFont typeface="Liberation Sans" panose="020B0604020202020204" pitchFamily="34" charset="0"/>
         <a:buChar char="•"/>
         <a:defRPr sz="2400" kern="1200">
           <a:solidFill>
@@ -4253,7 +4281,7 @@
         <a:spcBef>
           <a:spcPts val="500"/>
         </a:spcBef>
-        <a:buFont typeface="Arial" panose="020B0604020202020204" pitchFamily="34" charset="0"/>
+        <a:buFont typeface="Liberation Sans" panose="020B0604020202020204" pitchFamily="34" charset="0"/>
         <a:buChar char="•"/>
         <a:defRPr sz="2000" kern="1200">
           <a:solidFill>
@@ -4271,7 +4299,7 @@
         <a:spcBef>
           <a:spcPts val="500"/>
         </a:spcBef>
-        <a:buFont typeface="Arial" panose="020B0604020202020204" pitchFamily="34" charset="0"/>
+        <a:buFont typeface="Liberation Sans" panose="020B0604020202020204" pitchFamily="34" charset="0"/>
         <a:buChar char="•"/>
         <a:defRPr sz="1800" kern="1200">
           <a:solidFill>
@@ -4289,7 +4317,7 @@
         <a:spcBef>
           <a:spcPts val="500"/>
         </a:spcBef>
-        <a:buFont typeface="Arial" panose="020B0604020202020204" pitchFamily="34" charset="0"/>
+        <a:buFont typeface="Liberation Sans" panose="020B0604020202020204" pitchFamily="34" charset="0"/>
         <a:buChar char="•"/>
         <a:defRPr sz="1800" kern="1200">
           <a:solidFill>
@@ -4307,7 +4335,7 @@
         <a:spcBef>
           <a:spcPts val="500"/>
         </a:spcBef>
-        <a:buFont typeface="Arial" panose="020B0604020202020204" pitchFamily="34" charset="0"/>
+        <a:buFont typeface="Liberation Sans" panose="020B0604020202020204" pitchFamily="34" charset="0"/>
         <a:buChar char="•"/>
         <a:defRPr sz="1800" kern="1200">
           <a:solidFill>
@@ -4325,7 +4353,7 @@
         <a:spcBef>
           <a:spcPts val="500"/>
         </a:spcBef>
-        <a:buFont typeface="Arial" panose="020B0604020202020204" pitchFamily="34" charset="0"/>
+        <a:buFont typeface="Liberation Sans" panose="020B0604020202020204" pitchFamily="34" charset="0"/>
         <a:buChar char="•"/>
         <a:defRPr sz="1800" kern="1200">
           <a:solidFill>
@@ -4343,7 +4371,7 @@
         <a:spcBef>
           <a:spcPts val="500"/>
         </a:spcBef>
-        <a:buFont typeface="Arial" panose="020B0604020202020204" pitchFamily="34" charset="0"/>
+        <a:buFont typeface="Liberation Sans" panose="020B0604020202020204" pitchFamily="34" charset="0"/>
         <a:buChar char="•"/>
         <a:defRPr sz="1800" kern="1200">
           <a:solidFill>
@@ -4361,7 +4389,7 @@
         <a:spcBef>
           <a:spcPts val="500"/>
         </a:spcBef>
-        <a:buFont typeface="Arial" panose="020B0604020202020204" pitchFamily="34" charset="0"/>
+        <a:buFont typeface="Liberation Sans" panose="020B0604020202020204" pitchFamily="34" charset="0"/>
         <a:buChar char="•"/>
         <a:defRPr sz="1800" kern="1200">
           <a:solidFill>
@@ -4595,9 +4623,9 @@
               <a:solidFill>
                 <a:schemeClr val="bg1"/>
               </a:solidFill>
-              <a:latin typeface="Times New Roman" charset="0"/>
-              <a:ea typeface="Times New Roman" charset="0"/>
-              <a:cs typeface="Times New Roman" charset="0"/>
+              <a:latin typeface="Liberation Serif" charset="0"/>
+              <a:ea typeface="Liberation Serif" charset="0"/>
+              <a:cs typeface="Liberation Serif" charset="0"/>
             </a:endParaRPr>
           </a:p>
           <a:p>
@@ -4607,9 +4635,9 @@
                 <a:solidFill>
                   <a:schemeClr val="bg1"/>
                 </a:solidFill>
-                <a:latin typeface="Times New Roman" charset="0"/>
-                <a:ea typeface="Times New Roman" charset="0"/>
-                <a:cs typeface="Times New Roman" charset="0"/>
+                <a:latin typeface="Liberation Serif" charset="0"/>
+                <a:ea typeface="Liberation Serif" charset="0"/>
+                <a:cs typeface="Liberation Serif" charset="0"/>
               </a:rPr>
               <a:t>Jongho Kim</a:t>
             </a:r>
@@ -4617,9 +4645,9 @@
               <a:solidFill>
                 <a:schemeClr val="bg1"/>
               </a:solidFill>
-              <a:latin typeface="Times New Roman" charset="0"/>
-              <a:ea typeface="Times New Roman" charset="0"/>
-              <a:cs typeface="Times New Roman" charset="0"/>
+              <a:latin typeface="Liberation Serif" charset="0"/>
+              <a:ea typeface="Liberation Serif" charset="0"/>
+              <a:cs typeface="Liberation Serif" charset="0"/>
             </a:endParaRPr>
           </a:p>
           <a:p>
@@ -4629,9 +4657,9 @@
                 <a:solidFill>
                   <a:schemeClr val="bg1"/>
                 </a:solidFill>
-                <a:latin typeface="Times New Roman" charset="0"/>
-                <a:ea typeface="Times New Roman" charset="0"/>
-                <a:cs typeface="Times New Roman" charset="0"/>
+                <a:latin typeface="Liberation Serif" charset="0"/>
+                <a:ea typeface="Liberation Serif" charset="0"/>
+                <a:cs typeface="Liberation Serif" charset="0"/>
               </a:rPr>
               <a:t>December &amp; </a:t>
             </a:r>
@@ -4640,9 +4668,9 @@
                 <a:solidFill>
                   <a:schemeClr val="bg1"/>
                 </a:solidFill>
-                <a:latin typeface="Times New Roman" charset="0"/>
-                <a:ea typeface="Times New Roman" charset="0"/>
-                <a:cs typeface="Times New Roman" charset="0"/>
+                <a:latin typeface="Liberation Serif" charset="0"/>
+                <a:ea typeface="Liberation Serif" charset="0"/>
+                <a:cs typeface="Liberation Serif" charset="0"/>
               </a:rPr>
               <a:t>Company Inc.</a:t>
             </a:r>
@@ -4654,9 +4682,9 @@
                 <a:solidFill>
                   <a:schemeClr val="bg1"/>
                 </a:solidFill>
-                <a:latin typeface="Times New Roman" charset="0"/>
-                <a:ea typeface="Times New Roman" charset="0"/>
-                <a:cs typeface="Times New Roman" charset="0"/>
+                <a:latin typeface="Liberation Serif" charset="0"/>
+                <a:ea typeface="Liberation Serif" charset="0"/>
+                <a:cs typeface="Liberation Serif" charset="0"/>
               </a:rPr>
               <a:t>Spring, 2019</a:t>
             </a:r>
@@ -4698,9 +4726,9 @@
                 <a:solidFill>
                   <a:schemeClr val="bg1"/>
                 </a:solidFill>
-                <a:latin typeface="Times New Roman" charset="0"/>
-                <a:ea typeface="Times New Roman" charset="0"/>
-                <a:cs typeface="Times New Roman" charset="0"/>
+                <a:latin typeface="Liberation Serif" charset="0"/>
+                <a:ea typeface="Liberation Serif" charset="0"/>
+                <a:cs typeface="Liberation Serif" charset="0"/>
               </a:rPr>
               <a:t>Business </a:t>
             </a:r>
@@ -4709,9 +4737,9 @@
                 <a:solidFill>
                   <a:schemeClr val="bg1"/>
                 </a:solidFill>
-                <a:latin typeface="Times New Roman" charset="0"/>
-                <a:ea typeface="Times New Roman" charset="0"/>
-                <a:cs typeface="Times New Roman" charset="0"/>
+                <a:latin typeface="Liberation Serif" charset="0"/>
+                <a:ea typeface="Liberation Serif" charset="0"/>
+                <a:cs typeface="Liberation Serif" charset="0"/>
               </a:rPr>
               <a:t>Analytics</a:t>
             </a:r>
@@ -4720,9 +4748,9 @@
                 <a:solidFill>
                   <a:schemeClr val="bg1"/>
                 </a:solidFill>
-                <a:latin typeface="Times New Roman" charset="0"/>
-                <a:ea typeface="Times New Roman" charset="0"/>
-                <a:cs typeface="Times New Roman" charset="0"/>
+                <a:latin typeface="Liberation Serif" charset="0"/>
+                <a:ea typeface="Liberation Serif" charset="0"/>
+                <a:cs typeface="Liberation Serif" charset="0"/>
               </a:rPr>
               <a:t> </a:t>
             </a:r>
@@ -4731,9 +4759,9 @@
                 <a:solidFill>
                   <a:schemeClr val="bg1"/>
                 </a:solidFill>
-                <a:latin typeface="Times New Roman" charset="0"/>
-                <a:ea typeface="Times New Roman" charset="0"/>
-                <a:cs typeface="Times New Roman" charset="0"/>
+                <a:latin typeface="Liberation Serif" charset="0"/>
+                <a:ea typeface="Liberation Serif" charset="0"/>
+                <a:cs typeface="Liberation Serif" charset="0"/>
               </a:rPr>
               <a:t>(</a:t>
             </a:r>
@@ -4742,9 +4770,9 @@
                 <a:solidFill>
                   <a:schemeClr val="bg1"/>
                 </a:solidFill>
-                <a:latin typeface="Times New Roman" charset="0"/>
-                <a:ea typeface="Times New Roman" charset="0"/>
-                <a:cs typeface="Times New Roman" charset="0"/>
+                <a:latin typeface="Liberation Serif" charset="0"/>
+                <a:ea typeface="Liberation Serif" charset="0"/>
+                <a:cs typeface="Liberation Serif" charset="0"/>
               </a:rPr>
               <a:t>IM561)</a:t>
             </a:r>
@@ -4759,9 +4787,9 @@
               <a:solidFill>
                 <a:schemeClr val="bg1"/>
               </a:solidFill>
-              <a:latin typeface="Times New Roman" charset="0"/>
-              <a:ea typeface="Times New Roman" charset="0"/>
-              <a:cs typeface="Times New Roman" charset="0"/>
+              <a:latin typeface="Liberation Serif" charset="0"/>
+              <a:ea typeface="Liberation Serif" charset="0"/>
+              <a:cs typeface="Liberation Serif" charset="0"/>
             </a:endParaRPr>
           </a:p>
           <a:p>
@@ -4774,9 +4802,9 @@
               <a:solidFill>
                 <a:schemeClr val="bg1"/>
               </a:solidFill>
-              <a:latin typeface="Times New Roman" charset="0"/>
-              <a:ea typeface="Times New Roman" charset="0"/>
-              <a:cs typeface="Times New Roman" charset="0"/>
+              <a:latin typeface="Liberation Serif" charset="0"/>
+              <a:ea typeface="Liberation Serif" charset="0"/>
+              <a:cs typeface="Liberation Serif" charset="0"/>
             </a:endParaRPr>
           </a:p>
           <a:p>
@@ -4789,9 +4817,9 @@
               <a:solidFill>
                 <a:schemeClr val="bg1"/>
               </a:solidFill>
-              <a:latin typeface="Times New Roman" charset="0"/>
-              <a:ea typeface="Times New Roman" charset="0"/>
-              <a:cs typeface="Times New Roman" charset="0"/>
+              <a:latin typeface="Liberation Serif" charset="0"/>
+              <a:ea typeface="Liberation Serif" charset="0"/>
+              <a:cs typeface="Liberation Serif" charset="0"/>
             </a:endParaRPr>
           </a:p>
           <a:p>
@@ -4804,9 +4832,9 @@
               <a:solidFill>
                 <a:schemeClr val="bg1"/>
               </a:solidFill>
-              <a:latin typeface="Times New Roman" charset="0"/>
-              <a:ea typeface="Times New Roman" charset="0"/>
-              <a:cs typeface="Times New Roman" charset="0"/>
+              <a:latin typeface="Liberation Serif" charset="0"/>
+              <a:ea typeface="Liberation Serif" charset="0"/>
+              <a:cs typeface="Liberation Serif" charset="0"/>
             </a:endParaRPr>
           </a:p>
           <a:p>
@@ -4820,9 +4848,9 @@
                 <a:solidFill>
                   <a:schemeClr val="bg1"/>
                 </a:solidFill>
-                <a:latin typeface="Times New Roman" charset="0"/>
-                <a:ea typeface="Times New Roman" charset="0"/>
-                <a:cs typeface="Times New Roman" charset="0"/>
+                <a:latin typeface="Liberation Serif" charset="0"/>
+                <a:ea typeface="Liberation Serif" charset="0"/>
+                <a:cs typeface="Liberation Serif" charset="0"/>
               </a:rPr>
               <a:t>Module3. Detecting Labels in Your Own Video Data</a:t>
             </a:r>
@@ -4837,9 +4865,9 @@
               <a:solidFill>
                 <a:schemeClr val="bg1"/>
               </a:solidFill>
-              <a:latin typeface="Times New Roman" charset="0"/>
-              <a:ea typeface="Times New Roman" charset="0"/>
-              <a:cs typeface="Times New Roman" charset="0"/>
+              <a:latin typeface="Liberation Serif" charset="0"/>
+              <a:ea typeface="Liberation Serif" charset="0"/>
+              <a:cs typeface="Liberation Serif" charset="0"/>
             </a:endParaRPr>
           </a:p>
           <a:p>
@@ -4849,9 +4877,9 @@
                 <a:solidFill>
                   <a:schemeClr val="bg1"/>
                 </a:solidFill>
-                <a:latin typeface="Times New Roman" charset="0"/>
-                <a:ea typeface="Times New Roman" charset="0"/>
-                <a:cs typeface="Times New Roman" charset="0"/>
+                <a:latin typeface="Liberation Serif" charset="0"/>
+                <a:ea typeface="Liberation Serif" charset="0"/>
+                <a:cs typeface="Liberation Serif" charset="0"/>
               </a:rPr>
               <a:t>Intelligent Video Analytics </a:t>
             </a:r>
@@ -4863,9 +4891,9 @@
                 <a:solidFill>
                   <a:schemeClr val="bg1"/>
                 </a:solidFill>
-                <a:latin typeface="Times New Roman" charset="0"/>
-                <a:ea typeface="Times New Roman" charset="0"/>
-                <a:cs typeface="Times New Roman" charset="0"/>
+                <a:latin typeface="Liberation Serif" charset="0"/>
+                <a:ea typeface="Liberation Serif" charset="0"/>
+                <a:cs typeface="Liberation Serif" charset="0"/>
               </a:rPr>
               <a:t>with Deep Learning</a:t>
             </a:r>
@@ -5015,44 +5043,44 @@
           <a:p>
             <a:r>
               <a:rPr lang="en-US" sz="2400" dirty="0" err="1" smtClean="0">
-                <a:latin typeface="Consolas" panose="020B0609020204030204" pitchFamily="49" charset="0"/>
-                <a:cs typeface="Consolas" panose="020B0609020204030204" pitchFamily="49" charset="0"/>
+                <a:latin typeface="Liberation Mono" panose="020B0609020204030204" pitchFamily="49" charset="0"/>
+                <a:cs typeface="Liberation Mono" panose="020B0609020204030204" pitchFamily="49" charset="0"/>
               </a:rPr>
               <a:t>abc</a:t>
             </a:r>
             <a:r>
               <a:rPr lang="en-US" sz="2400" dirty="0" smtClean="0">
-                <a:latin typeface="Consolas" panose="020B0609020204030204" pitchFamily="49" charset="0"/>
-                <a:cs typeface="Consolas" panose="020B0609020204030204" pitchFamily="49" charset="0"/>
+                <a:latin typeface="Liberation Mono" panose="020B0609020204030204" pitchFamily="49" charset="0"/>
+                <a:cs typeface="Liberation Mono" panose="020B0609020204030204" pitchFamily="49" charset="0"/>
               </a:rPr>
               <a:t> = [‘a’, ‘b’, ’c’]</a:t>
             </a:r>
           </a:p>
           <a:p>
             <a:endParaRPr lang="en-US" sz="2400" dirty="0" smtClean="0">
-              <a:latin typeface="Consolas" panose="020B0609020204030204" pitchFamily="49" charset="0"/>
-              <a:cs typeface="Consolas" panose="020B0609020204030204" pitchFamily="49" charset="0"/>
+              <a:latin typeface="Liberation Mono" panose="020B0609020204030204" pitchFamily="49" charset="0"/>
+              <a:cs typeface="Liberation Mono" panose="020B0609020204030204" pitchFamily="49" charset="0"/>
             </a:endParaRPr>
           </a:p>
           <a:p>
             <a:r>
               <a:rPr lang="en-US" sz="2400" dirty="0" smtClean="0">
-                <a:latin typeface="Consolas" panose="020B0609020204030204" pitchFamily="49" charset="0"/>
-                <a:cs typeface="Consolas" panose="020B0609020204030204" pitchFamily="49" charset="0"/>
+                <a:latin typeface="Liberation Mono" panose="020B0609020204030204" pitchFamily="49" charset="0"/>
+                <a:cs typeface="Liberation Mono" panose="020B0609020204030204" pitchFamily="49" charset="0"/>
               </a:rPr>
               <a:t>‘ ‘.join(</a:t>
             </a:r>
             <a:r>
               <a:rPr lang="en-US" sz="2400" dirty="0" err="1" smtClean="0">
-                <a:latin typeface="Consolas" panose="020B0609020204030204" pitchFamily="49" charset="0"/>
-                <a:cs typeface="Consolas" panose="020B0609020204030204" pitchFamily="49" charset="0"/>
+                <a:latin typeface="Liberation Mono" panose="020B0609020204030204" pitchFamily="49" charset="0"/>
+                <a:cs typeface="Liberation Mono" panose="020B0609020204030204" pitchFamily="49" charset="0"/>
               </a:rPr>
               <a:t>abc</a:t>
             </a:r>
             <a:r>
               <a:rPr lang="en-US" sz="2400" dirty="0">
-                <a:latin typeface="Consolas" panose="020B0609020204030204" pitchFamily="49" charset="0"/>
-                <a:cs typeface="Consolas" panose="020B0609020204030204" pitchFamily="49" charset="0"/>
+                <a:latin typeface="Liberation Mono" panose="020B0609020204030204" pitchFamily="49" charset="0"/>
+                <a:cs typeface="Liberation Mono" panose="020B0609020204030204" pitchFamily="49" charset="0"/>
               </a:rPr>
               <a:t>)</a:t>
             </a:r>
@@ -5206,28 +5234,28 @@
           <a:p>
             <a:r>
               <a:rPr lang="en-US" sz="2400" dirty="0" smtClean="0">
-                <a:latin typeface="Consolas" panose="020B0609020204030204" pitchFamily="49" charset="0"/>
-                <a:cs typeface="Consolas" panose="020B0609020204030204" pitchFamily="49" charset="0"/>
+                <a:latin typeface="Liberation Mono" panose="020B0609020204030204" pitchFamily="49" charset="0"/>
+                <a:cs typeface="Liberation Mono" panose="020B0609020204030204" pitchFamily="49" charset="0"/>
               </a:rPr>
               <a:t>‘</a:t>
             </a:r>
             <a:r>
               <a:rPr lang="en-US" sz="2400" dirty="0" err="1" smtClean="0">
-                <a:latin typeface="Consolas" panose="020B0609020204030204" pitchFamily="49" charset="0"/>
-                <a:cs typeface="Consolas" panose="020B0609020204030204" pitchFamily="49" charset="0"/>
+                <a:latin typeface="Liberation Mono" panose="020B0609020204030204" pitchFamily="49" charset="0"/>
+                <a:cs typeface="Liberation Mono" panose="020B0609020204030204" pitchFamily="49" charset="0"/>
               </a:rPr>
               <a:t>beat’.replace</a:t>
             </a:r>
             <a:r>
               <a:rPr lang="en-US" sz="2400" dirty="0" smtClean="0">
-                <a:latin typeface="Consolas" panose="020B0609020204030204" pitchFamily="49" charset="0"/>
-                <a:cs typeface="Consolas" panose="020B0609020204030204" pitchFamily="49" charset="0"/>
+                <a:latin typeface="Liberation Mono" panose="020B0609020204030204" pitchFamily="49" charset="0"/>
+                <a:cs typeface="Liberation Mono" panose="020B0609020204030204" pitchFamily="49" charset="0"/>
               </a:rPr>
               <a:t>(‘b’, ‘n’)</a:t>
             </a:r>
             <a:endParaRPr lang="en-US" sz="2400" dirty="0">
-              <a:latin typeface="Consolas" panose="020B0609020204030204" pitchFamily="49" charset="0"/>
-              <a:cs typeface="Consolas" panose="020B0609020204030204" pitchFamily="49" charset="0"/>
+              <a:latin typeface="Liberation Mono" panose="020B0609020204030204" pitchFamily="49" charset="0"/>
+              <a:cs typeface="Liberation Mono" panose="020B0609020204030204" pitchFamily="49" charset="0"/>
             </a:endParaRPr>
           </a:p>
         </p:txBody>
@@ -5286,7 +5314,7 @@
           <a:p>
             <a:r>
               <a:rPr lang="ko-KR" altLang="en-US" dirty="0" smtClean="0"/>
-              <a:t>루프</a:t>
+              <a:t>Loop</a:t>
             </a:r>
             <a:endParaRPr lang="en-US" dirty="0"/>
           </a:p>
@@ -5375,43 +5403,43 @@
           <a:p>
             <a:r>
               <a:rPr lang="en-US" sz="2400" b="1" dirty="0" smtClean="0">
-                <a:latin typeface="Consolas" panose="020B0609020204030204" pitchFamily="49" charset="0"/>
-                <a:cs typeface="Consolas" panose="020B0609020204030204" pitchFamily="49" charset="0"/>
+                <a:latin typeface="Liberation Mono" panose="020B0609020204030204" pitchFamily="49" charset="0"/>
+                <a:cs typeface="Liberation Mono" panose="020B0609020204030204" pitchFamily="49" charset="0"/>
               </a:rPr>
               <a:t>for</a:t>
             </a:r>
             <a:r>
               <a:rPr lang="en-US" sz="2400" dirty="0" smtClean="0">
-                <a:latin typeface="Consolas" panose="020B0609020204030204" pitchFamily="49" charset="0"/>
-                <a:cs typeface="Consolas" panose="020B0609020204030204" pitchFamily="49" charset="0"/>
+                <a:latin typeface="Liberation Mono" panose="020B0609020204030204" pitchFamily="49" charset="0"/>
+                <a:cs typeface="Liberation Mono" panose="020B0609020204030204" pitchFamily="49" charset="0"/>
               </a:rPr>
               <a:t> </a:t>
             </a:r>
             <a:r>
               <a:rPr lang="en-US" sz="2400" dirty="0" err="1" smtClean="0">
-                <a:latin typeface="Consolas" panose="020B0609020204030204" pitchFamily="49" charset="0"/>
-                <a:cs typeface="Consolas" panose="020B0609020204030204" pitchFamily="49" charset="0"/>
+                <a:latin typeface="Liberation Mono" panose="020B0609020204030204" pitchFamily="49" charset="0"/>
+                <a:cs typeface="Liberation Mono" panose="020B0609020204030204" pitchFamily="49" charset="0"/>
               </a:rPr>
               <a:t>i</a:t>
             </a:r>
             <a:r>
               <a:rPr lang="en-US" sz="2400" dirty="0" smtClean="0">
-                <a:latin typeface="Consolas" panose="020B0609020204030204" pitchFamily="49" charset="0"/>
-                <a:cs typeface="Consolas" panose="020B0609020204030204" pitchFamily="49" charset="0"/>
+                <a:latin typeface="Liberation Mono" panose="020B0609020204030204" pitchFamily="49" charset="0"/>
+                <a:cs typeface="Liberation Mono" panose="020B0609020204030204" pitchFamily="49" charset="0"/>
               </a:rPr>
               <a:t> </a:t>
             </a:r>
             <a:r>
               <a:rPr lang="en-US" sz="2400" b="1" dirty="0" smtClean="0">
-                <a:latin typeface="Consolas" panose="020B0609020204030204" pitchFamily="49" charset="0"/>
-                <a:cs typeface="Consolas" panose="020B0609020204030204" pitchFamily="49" charset="0"/>
+                <a:latin typeface="Liberation Mono" panose="020B0609020204030204" pitchFamily="49" charset="0"/>
+                <a:cs typeface="Liberation Mono" panose="020B0609020204030204" pitchFamily="49" charset="0"/>
               </a:rPr>
               <a:t>in</a:t>
             </a:r>
             <a:r>
               <a:rPr lang="en-US" sz="2400" dirty="0" smtClean="0">
-                <a:latin typeface="Consolas" panose="020B0609020204030204" pitchFamily="49" charset="0"/>
-                <a:cs typeface="Consolas" panose="020B0609020204030204" pitchFamily="49" charset="0"/>
+                <a:latin typeface="Liberation Mono" panose="020B0609020204030204" pitchFamily="49" charset="0"/>
+                <a:cs typeface="Liberation Mono" panose="020B0609020204030204" pitchFamily="49" charset="0"/>
               </a:rPr>
               <a:t> range(1,5):</a:t>
             </a:r>
@@ -5419,28 +5447,28 @@
           <a:p>
             <a:r>
               <a:rPr lang="en-US" sz="2400" dirty="0" smtClean="0">
-                <a:latin typeface="Consolas" panose="020B0609020204030204" pitchFamily="49" charset="0"/>
-                <a:cs typeface="Consolas" panose="020B0609020204030204" pitchFamily="49" charset="0"/>
+                <a:latin typeface="Liberation Mono" panose="020B0609020204030204" pitchFamily="49" charset="0"/>
+                <a:cs typeface="Liberation Mono" panose="020B0609020204030204" pitchFamily="49" charset="0"/>
               </a:rPr>
               <a:t>    print(</a:t>
             </a:r>
             <a:r>
               <a:rPr lang="en-US" sz="2400" dirty="0" err="1" smtClean="0">
-                <a:latin typeface="Consolas" panose="020B0609020204030204" pitchFamily="49" charset="0"/>
-                <a:cs typeface="Consolas" panose="020B0609020204030204" pitchFamily="49" charset="0"/>
+                <a:latin typeface="Liberation Mono" panose="020B0609020204030204" pitchFamily="49" charset="0"/>
+                <a:cs typeface="Liberation Mono" panose="020B0609020204030204" pitchFamily="49" charset="0"/>
               </a:rPr>
               <a:t>i</a:t>
             </a:r>
             <a:r>
               <a:rPr lang="en-US" sz="2400" dirty="0" smtClean="0">
-                <a:latin typeface="Consolas" panose="020B0609020204030204" pitchFamily="49" charset="0"/>
-                <a:cs typeface="Consolas" panose="020B0609020204030204" pitchFamily="49" charset="0"/>
+                <a:latin typeface="Liberation Mono" panose="020B0609020204030204" pitchFamily="49" charset="0"/>
+                <a:cs typeface="Liberation Mono" panose="020B0609020204030204" pitchFamily="49" charset="0"/>
               </a:rPr>
               <a:t>)</a:t>
             </a:r>
             <a:endParaRPr lang="en-US" sz="2400" dirty="0">
-              <a:latin typeface="Consolas" panose="020B0609020204030204" pitchFamily="49" charset="0"/>
-              <a:cs typeface="Consolas" panose="020B0609020204030204" pitchFamily="49" charset="0"/>
+              <a:latin typeface="Liberation Mono" panose="020B0609020204030204" pitchFamily="49" charset="0"/>
+              <a:cs typeface="Liberation Mono" panose="020B0609020204030204" pitchFamily="49" charset="0"/>
             </a:endParaRPr>
           </a:p>
         </p:txBody>
@@ -5499,7 +5527,7 @@
           <a:p>
             <a:r>
               <a:rPr lang="ko-KR" altLang="en-US" dirty="0" smtClean="0"/>
-              <a:t>루프</a:t>
+              <a:t>Loop</a:t>
             </a:r>
             <a:endParaRPr lang="en-US" dirty="0"/>
           </a:p>
@@ -5588,8 +5616,8 @@
           <a:p>
             <a:r>
               <a:rPr lang="en-US" sz="2400" dirty="0" smtClean="0">
-                <a:latin typeface="Consolas" panose="020B0609020204030204" pitchFamily="49" charset="0"/>
-                <a:cs typeface="Consolas" panose="020B0609020204030204" pitchFamily="49" charset="0"/>
+                <a:latin typeface="Liberation Mono" panose="020B0609020204030204" pitchFamily="49" charset="0"/>
+                <a:cs typeface="Liberation Mono" panose="020B0609020204030204" pitchFamily="49" charset="0"/>
               </a:rPr>
               <a:t>a = range(1,4)</a:t>
             </a:r>
@@ -5597,51 +5625,51 @@
           <a:p>
             <a:r>
               <a:rPr lang="en-US" sz="2400" dirty="0" smtClean="0">
-                <a:latin typeface="Consolas" panose="020B0609020204030204" pitchFamily="49" charset="0"/>
-                <a:cs typeface="Consolas" panose="020B0609020204030204" pitchFamily="49" charset="0"/>
+                <a:latin typeface="Liberation Mono" panose="020B0609020204030204" pitchFamily="49" charset="0"/>
+                <a:cs typeface="Liberation Mono" panose="020B0609020204030204" pitchFamily="49" charset="0"/>
               </a:rPr>
               <a:t>s = [</a:t>
             </a:r>
             <a:r>
               <a:rPr lang="en-US" sz="2400" dirty="0" err="1" smtClean="0">
-                <a:latin typeface="Consolas" panose="020B0609020204030204" pitchFamily="49" charset="0"/>
-                <a:cs typeface="Consolas" panose="020B0609020204030204" pitchFamily="49" charset="0"/>
+                <a:latin typeface="Liberation Mono" panose="020B0609020204030204" pitchFamily="49" charset="0"/>
+                <a:cs typeface="Liberation Mono" panose="020B0609020204030204" pitchFamily="49" charset="0"/>
               </a:rPr>
               <a:t>i</a:t>
             </a:r>
             <a:r>
               <a:rPr lang="en-US" sz="2400" dirty="0" smtClean="0">
-                <a:latin typeface="Consolas" panose="020B0609020204030204" pitchFamily="49" charset="0"/>
-                <a:cs typeface="Consolas" panose="020B0609020204030204" pitchFamily="49" charset="0"/>
+                <a:latin typeface="Liberation Mono" panose="020B0609020204030204" pitchFamily="49" charset="0"/>
+                <a:cs typeface="Liberation Mono" panose="020B0609020204030204" pitchFamily="49" charset="0"/>
               </a:rPr>
               <a:t>**2 for </a:t>
             </a:r>
             <a:r>
               <a:rPr lang="en-US" sz="2400" dirty="0" err="1" smtClean="0">
-                <a:latin typeface="Consolas" panose="020B0609020204030204" pitchFamily="49" charset="0"/>
-                <a:cs typeface="Consolas" panose="020B0609020204030204" pitchFamily="49" charset="0"/>
+                <a:latin typeface="Liberation Mono" panose="020B0609020204030204" pitchFamily="49" charset="0"/>
+                <a:cs typeface="Liberation Mono" panose="020B0609020204030204" pitchFamily="49" charset="0"/>
               </a:rPr>
               <a:t>i</a:t>
             </a:r>
             <a:r>
               <a:rPr lang="en-US" sz="2400" dirty="0" smtClean="0">
-                <a:latin typeface="Consolas" panose="020B0609020204030204" pitchFamily="49" charset="0"/>
-                <a:cs typeface="Consolas" panose="020B0609020204030204" pitchFamily="49" charset="0"/>
+                <a:latin typeface="Liberation Mono" panose="020B0609020204030204" pitchFamily="49" charset="0"/>
+                <a:cs typeface="Liberation Mono" panose="020B0609020204030204" pitchFamily="49" charset="0"/>
               </a:rPr>
               <a:t> in a]</a:t>
             </a:r>
           </a:p>
           <a:p>
             <a:endParaRPr lang="en-US" sz="2400" dirty="0">
-              <a:latin typeface="Consolas" panose="020B0609020204030204" pitchFamily="49" charset="0"/>
-              <a:cs typeface="Consolas" panose="020B0609020204030204" pitchFamily="49" charset="0"/>
+              <a:latin typeface="Liberation Mono" panose="020B0609020204030204" pitchFamily="49" charset="0"/>
+              <a:cs typeface="Liberation Mono" panose="020B0609020204030204" pitchFamily="49" charset="0"/>
             </a:endParaRPr>
           </a:p>
           <a:p>
             <a:r>
               <a:rPr lang="en-US" sz="2400" dirty="0" smtClean="0">
-                <a:latin typeface="Consolas" panose="020B0609020204030204" pitchFamily="49" charset="0"/>
-                <a:cs typeface="Consolas" panose="020B0609020204030204" pitchFamily="49" charset="0"/>
+                <a:latin typeface="Liberation Mono" panose="020B0609020204030204" pitchFamily="49" charset="0"/>
+                <a:cs typeface="Liberation Mono" panose="020B0609020204030204" pitchFamily="49" charset="0"/>
               </a:rPr>
               <a:t>print(sum(s))</a:t>
             </a:r>
@@ -5702,11 +5730,11 @@
           <a:p>
             <a:r>
               <a:rPr lang="ko-KR" altLang="en-US" dirty="0" smtClean="0"/>
-              <a:t>함</a:t>
+              <a:t>Function</a:t>
             </a:r>
             <a:r>
               <a:rPr lang="ko-KR" altLang="en-US" dirty="0"/>
-              <a:t>수</a:t>
+              <a:t/>
             </a:r>
             <a:endParaRPr lang="en-US" dirty="0"/>
           </a:p>
@@ -5798,15 +5826,15 @@
           <a:p>
             <a:r>
               <a:rPr lang="en-US" sz="2400" b="1" dirty="0" err="1" smtClean="0">
-                <a:latin typeface="Consolas" panose="020B0609020204030204" pitchFamily="49" charset="0"/>
-                <a:cs typeface="Consolas" panose="020B0609020204030204" pitchFamily="49" charset="0"/>
+                <a:latin typeface="Liberation Mono" panose="020B0609020204030204" pitchFamily="49" charset="0"/>
+                <a:cs typeface="Liberation Mono" panose="020B0609020204030204" pitchFamily="49" charset="0"/>
               </a:rPr>
               <a:t>def</a:t>
             </a:r>
             <a:r>
               <a:rPr lang="en-US" sz="2400" dirty="0" smtClean="0">
-                <a:latin typeface="Consolas" panose="020B0609020204030204" pitchFamily="49" charset="0"/>
-                <a:cs typeface="Consolas" panose="020B0609020204030204" pitchFamily="49" charset="0"/>
+                <a:latin typeface="Liberation Mono" panose="020B0609020204030204" pitchFamily="49" charset="0"/>
+                <a:cs typeface="Liberation Mono" panose="020B0609020204030204" pitchFamily="49" charset="0"/>
               </a:rPr>
               <a:t> jiggle(x):</a:t>
             </a:r>
@@ -5814,28 +5842,28 @@
           <a:p>
             <a:r>
               <a:rPr lang="en-US" sz="2400" dirty="0" smtClean="0">
-                <a:latin typeface="Consolas" panose="020B0609020204030204" pitchFamily="49" charset="0"/>
-                <a:cs typeface="Consolas" panose="020B0609020204030204" pitchFamily="49" charset="0"/>
+                <a:latin typeface="Liberation Mono" panose="020B0609020204030204" pitchFamily="49" charset="0"/>
+                <a:cs typeface="Liberation Mono" panose="020B0609020204030204" pitchFamily="49" charset="0"/>
               </a:rPr>
               <a:t>    </a:t>
             </a:r>
             <a:r>
               <a:rPr lang="en-US" sz="2400" b="1" dirty="0" smtClean="0">
-                <a:latin typeface="Consolas" panose="020B0609020204030204" pitchFamily="49" charset="0"/>
-                <a:cs typeface="Consolas" panose="020B0609020204030204" pitchFamily="49" charset="0"/>
+                <a:latin typeface="Liberation Mono" panose="020B0609020204030204" pitchFamily="49" charset="0"/>
+                <a:cs typeface="Liberation Mono" panose="020B0609020204030204" pitchFamily="49" charset="0"/>
               </a:rPr>
               <a:t>return</a:t>
             </a:r>
             <a:r>
               <a:rPr lang="en-US" sz="2400" dirty="0" smtClean="0">
-                <a:latin typeface="Consolas" panose="020B0609020204030204" pitchFamily="49" charset="0"/>
-                <a:cs typeface="Consolas" panose="020B0609020204030204" pitchFamily="49" charset="0"/>
+                <a:latin typeface="Liberation Mono" panose="020B0609020204030204" pitchFamily="49" charset="0"/>
+                <a:cs typeface="Liberation Mono" panose="020B0609020204030204" pitchFamily="49" charset="0"/>
               </a:rPr>
               <a:t> x + 1</a:t>
             </a:r>
             <a:endParaRPr lang="en-US" sz="2400" dirty="0">
-              <a:latin typeface="Consolas" panose="020B0609020204030204" pitchFamily="49" charset="0"/>
-              <a:cs typeface="Consolas" panose="020B0609020204030204" pitchFamily="49" charset="0"/>
+              <a:latin typeface="Liberation Mono" panose="020B0609020204030204" pitchFamily="49" charset="0"/>
+              <a:cs typeface="Liberation Mono" panose="020B0609020204030204" pitchFamily="49" charset="0"/>
             </a:endParaRPr>
           </a:p>
         </p:txBody>
@@ -5894,7 +5922,7 @@
           <a:p>
             <a:r>
               <a:rPr lang="ko-KR" altLang="en-US" dirty="0" smtClean="0"/>
-              <a:t>파일 입력</a:t>
+              <a:t>File Input</a:t>
             </a:r>
             <a:endParaRPr lang="en-US" dirty="0"/>
           </a:p>
@@ -5980,69 +6008,69 @@
           <a:p>
             <a:r>
               <a:rPr lang="en-US" sz="2400" dirty="0" smtClean="0">
-                <a:latin typeface="Consolas" panose="020B0609020204030204" pitchFamily="49" charset="0"/>
-                <a:cs typeface="Consolas" panose="020B0609020204030204" pitchFamily="49" charset="0"/>
+                <a:latin typeface="Liberation Mono" panose="020B0609020204030204" pitchFamily="49" charset="0"/>
+                <a:cs typeface="Liberation Mono" panose="020B0609020204030204" pitchFamily="49" charset="0"/>
               </a:rPr>
               <a:t>import </a:t>
             </a:r>
             <a:r>
               <a:rPr lang="en-US" sz="2400" dirty="0" err="1" smtClean="0">
-                <a:latin typeface="Consolas" panose="020B0609020204030204" pitchFamily="49" charset="0"/>
-                <a:cs typeface="Consolas" panose="020B0609020204030204" pitchFamily="49" charset="0"/>
+                <a:latin typeface="Liberation Mono" panose="020B0609020204030204" pitchFamily="49" charset="0"/>
+                <a:cs typeface="Liberation Mono" panose="020B0609020204030204" pitchFamily="49" charset="0"/>
               </a:rPr>
               <a:t>io</a:t>
             </a:r>
             <a:endParaRPr lang="en-US" sz="2400" dirty="0" smtClean="0">
-              <a:latin typeface="Consolas" panose="020B0609020204030204" pitchFamily="49" charset="0"/>
-              <a:cs typeface="Consolas" panose="020B0609020204030204" pitchFamily="49" charset="0"/>
+              <a:latin typeface="Liberation Mono" panose="020B0609020204030204" pitchFamily="49" charset="0"/>
+              <a:cs typeface="Liberation Mono" panose="020B0609020204030204" pitchFamily="49" charset="0"/>
             </a:endParaRPr>
           </a:p>
           <a:p>
             <a:endParaRPr lang="en-US" sz="2400" dirty="0" smtClean="0">
-              <a:latin typeface="Consolas" panose="020B0609020204030204" pitchFamily="49" charset="0"/>
-              <a:cs typeface="Consolas" panose="020B0609020204030204" pitchFamily="49" charset="0"/>
+              <a:latin typeface="Liberation Mono" panose="020B0609020204030204" pitchFamily="49" charset="0"/>
+              <a:cs typeface="Liberation Mono" panose="020B0609020204030204" pitchFamily="49" charset="0"/>
             </a:endParaRPr>
           </a:p>
           <a:p>
             <a:r>
               <a:rPr lang="en-US" sz="2400" dirty="0" smtClean="0">
-                <a:latin typeface="Consolas" panose="020B0609020204030204" pitchFamily="49" charset="0"/>
-                <a:cs typeface="Consolas" panose="020B0609020204030204" pitchFamily="49" charset="0"/>
+                <a:latin typeface="Liberation Mono" panose="020B0609020204030204" pitchFamily="49" charset="0"/>
+                <a:cs typeface="Liberation Mono" panose="020B0609020204030204" pitchFamily="49" charset="0"/>
               </a:rPr>
               <a:t>f = </a:t>
             </a:r>
             <a:r>
               <a:rPr lang="en-US" sz="2400" dirty="0" err="1" smtClean="0">
-                <a:latin typeface="Consolas" panose="020B0609020204030204" pitchFamily="49" charset="0"/>
-                <a:cs typeface="Consolas" panose="020B0609020204030204" pitchFamily="49" charset="0"/>
+                <a:latin typeface="Liberation Mono" panose="020B0609020204030204" pitchFamily="49" charset="0"/>
+                <a:cs typeface="Liberation Mono" panose="020B0609020204030204" pitchFamily="49" charset="0"/>
               </a:rPr>
               <a:t>io.</a:t>
             </a:r>
             <a:r>
               <a:rPr lang="en-US" sz="2400" b="1" dirty="0" err="1" smtClean="0">
-                <a:latin typeface="Consolas" panose="020B0609020204030204" pitchFamily="49" charset="0"/>
-                <a:cs typeface="Consolas" panose="020B0609020204030204" pitchFamily="49" charset="0"/>
+                <a:latin typeface="Liberation Mono" panose="020B0609020204030204" pitchFamily="49" charset="0"/>
+                <a:cs typeface="Liberation Mono" panose="020B0609020204030204" pitchFamily="49" charset="0"/>
               </a:rPr>
               <a:t>open</a:t>
             </a:r>
             <a:r>
               <a:rPr lang="en-US" sz="2400" dirty="0" smtClean="0">
-                <a:latin typeface="Consolas" panose="020B0609020204030204" pitchFamily="49" charset="0"/>
-                <a:cs typeface="Consolas" panose="020B0609020204030204" pitchFamily="49" charset="0"/>
+                <a:latin typeface="Liberation Mono" panose="020B0609020204030204" pitchFamily="49" charset="0"/>
+                <a:cs typeface="Liberation Mono" panose="020B0609020204030204" pitchFamily="49" charset="0"/>
               </a:rPr>
               <a:t>(‘kaist.mp4’, ‘</a:t>
             </a:r>
             <a:r>
               <a:rPr lang="en-US" sz="2400" dirty="0" err="1" smtClean="0">
-                <a:latin typeface="Consolas" panose="020B0609020204030204" pitchFamily="49" charset="0"/>
-                <a:cs typeface="Consolas" panose="020B0609020204030204" pitchFamily="49" charset="0"/>
+                <a:latin typeface="Liberation Mono" panose="020B0609020204030204" pitchFamily="49" charset="0"/>
+                <a:cs typeface="Liberation Mono" panose="020B0609020204030204" pitchFamily="49" charset="0"/>
               </a:rPr>
               <a:t>rb</a:t>
             </a:r>
             <a:r>
               <a:rPr lang="en-US" sz="2400" dirty="0" smtClean="0">
-                <a:latin typeface="Consolas" panose="020B0609020204030204" pitchFamily="49" charset="0"/>
-                <a:cs typeface="Consolas" panose="020B0609020204030204" pitchFamily="49" charset="0"/>
+                <a:latin typeface="Liberation Mono" panose="020B0609020204030204" pitchFamily="49" charset="0"/>
+                <a:cs typeface="Liberation Mono" panose="020B0609020204030204" pitchFamily="49" charset="0"/>
               </a:rPr>
               <a:t>’)</a:t>
             </a:r>
@@ -6050,22 +6078,22 @@
           <a:p>
             <a:r>
               <a:rPr lang="en-US" sz="2400" dirty="0" smtClean="0">
-                <a:latin typeface="Consolas" panose="020B0609020204030204" pitchFamily="49" charset="0"/>
-                <a:cs typeface="Consolas" panose="020B0609020204030204" pitchFamily="49" charset="0"/>
+                <a:latin typeface="Liberation Mono" panose="020B0609020204030204" pitchFamily="49" charset="0"/>
+                <a:cs typeface="Liberation Mono" panose="020B0609020204030204" pitchFamily="49" charset="0"/>
               </a:rPr>
               <a:t>video = </a:t>
             </a:r>
             <a:r>
               <a:rPr lang="en-US" sz="2400" dirty="0" err="1" smtClean="0">
-                <a:latin typeface="Consolas" panose="020B0609020204030204" pitchFamily="49" charset="0"/>
-                <a:cs typeface="Consolas" panose="020B0609020204030204" pitchFamily="49" charset="0"/>
+                <a:latin typeface="Liberation Mono" panose="020B0609020204030204" pitchFamily="49" charset="0"/>
+                <a:cs typeface="Liberation Mono" panose="020B0609020204030204" pitchFamily="49" charset="0"/>
               </a:rPr>
               <a:t>f.read</a:t>
             </a:r>
             <a:r>
               <a:rPr lang="en-US" sz="2400" dirty="0" smtClean="0">
-                <a:latin typeface="Consolas" panose="020B0609020204030204" pitchFamily="49" charset="0"/>
-                <a:cs typeface="Consolas" panose="020B0609020204030204" pitchFamily="49" charset="0"/>
+                <a:latin typeface="Liberation Mono" panose="020B0609020204030204" pitchFamily="49" charset="0"/>
+                <a:cs typeface="Liberation Mono" panose="020B0609020204030204" pitchFamily="49" charset="0"/>
               </a:rPr>
               <a:t>()</a:t>
             </a:r>
@@ -6073,15 +6101,15 @@
           <a:p>
             <a:r>
               <a:rPr lang="en-US" sz="2400" dirty="0" err="1" smtClean="0">
-                <a:latin typeface="Consolas" panose="020B0609020204030204" pitchFamily="49" charset="0"/>
-                <a:cs typeface="Consolas" panose="020B0609020204030204" pitchFamily="49" charset="0"/>
+                <a:latin typeface="Liberation Mono" panose="020B0609020204030204" pitchFamily="49" charset="0"/>
+                <a:cs typeface="Liberation Mono" panose="020B0609020204030204" pitchFamily="49" charset="0"/>
               </a:rPr>
               <a:t>f.close</a:t>
             </a:r>
             <a:r>
               <a:rPr lang="en-US" sz="2400" dirty="0" smtClean="0">
-                <a:latin typeface="Consolas" panose="020B0609020204030204" pitchFamily="49" charset="0"/>
-                <a:cs typeface="Consolas" panose="020B0609020204030204" pitchFamily="49" charset="0"/>
+                <a:latin typeface="Liberation Mono" panose="020B0609020204030204" pitchFamily="49" charset="0"/>
+                <a:cs typeface="Liberation Mono" panose="020B0609020204030204" pitchFamily="49" charset="0"/>
               </a:rPr>
               <a:t>()</a:t>
             </a:r>
@@ -6142,15 +6170,15 @@
           <a:p>
             <a:r>
               <a:rPr lang="ko-KR" altLang="en-US" dirty="0" smtClean="0"/>
-              <a:t>딕셔너리 </a:t>
+              <a:t>Dictionary + List to Table</a:t>
             </a:r>
             <a:r>
               <a:rPr lang="en-US" altLang="ko-KR" dirty="0" smtClean="0"/>
-              <a:t>+</a:t>
+              <a:t/>
             </a:r>
             <a:r>
               <a:rPr lang="ko-KR" altLang="en-US" dirty="0" smtClean="0"/>
-              <a:t> 열을 테이블로</a:t>
+              <a:t/>
             </a:r>
             <a:endParaRPr lang="en-US" dirty="0"/>
           </a:p>
@@ -6236,69 +6264,69 @@
           <a:p>
             <a:r>
               <a:rPr lang="en-US" sz="2400" dirty="0" smtClean="0">
-                <a:latin typeface="Consolas" panose="020B0609020204030204" pitchFamily="49" charset="0"/>
-                <a:cs typeface="Consolas" panose="020B0609020204030204" pitchFamily="49" charset="0"/>
+                <a:latin typeface="Liberation Mono" panose="020B0609020204030204" pitchFamily="49" charset="0"/>
+                <a:cs typeface="Liberation Mono" panose="020B0609020204030204" pitchFamily="49" charset="0"/>
               </a:rPr>
               <a:t>import pandas as </a:t>
             </a:r>
             <a:r>
               <a:rPr lang="en-US" sz="2400" dirty="0" err="1" smtClean="0">
-                <a:latin typeface="Consolas" panose="020B0609020204030204" pitchFamily="49" charset="0"/>
-                <a:cs typeface="Consolas" panose="020B0609020204030204" pitchFamily="49" charset="0"/>
+                <a:latin typeface="Liberation Mono" panose="020B0609020204030204" pitchFamily="49" charset="0"/>
+                <a:cs typeface="Liberation Mono" panose="020B0609020204030204" pitchFamily="49" charset="0"/>
               </a:rPr>
               <a:t>pd</a:t>
             </a:r>
             <a:endParaRPr lang="en-US" sz="2400" dirty="0" smtClean="0">
-              <a:latin typeface="Consolas" panose="020B0609020204030204" pitchFamily="49" charset="0"/>
-              <a:cs typeface="Consolas" panose="020B0609020204030204" pitchFamily="49" charset="0"/>
+              <a:latin typeface="Liberation Mono" panose="020B0609020204030204" pitchFamily="49" charset="0"/>
+              <a:cs typeface="Liberation Mono" panose="020B0609020204030204" pitchFamily="49" charset="0"/>
             </a:endParaRPr>
           </a:p>
           <a:p>
             <a:endParaRPr lang="en-US" sz="2400" dirty="0" smtClean="0">
-              <a:latin typeface="Consolas" panose="020B0609020204030204" pitchFamily="49" charset="0"/>
-              <a:cs typeface="Consolas" panose="020B0609020204030204" pitchFamily="49" charset="0"/>
+              <a:latin typeface="Liberation Mono" panose="020B0609020204030204" pitchFamily="49" charset="0"/>
+              <a:cs typeface="Liberation Mono" panose="020B0609020204030204" pitchFamily="49" charset="0"/>
             </a:endParaRPr>
           </a:p>
           <a:p>
             <a:r>
               <a:rPr lang="en-US" sz="2400" dirty="0" err="1" smtClean="0">
-                <a:latin typeface="Consolas" panose="020B0609020204030204" pitchFamily="49" charset="0"/>
-                <a:cs typeface="Consolas" panose="020B0609020204030204" pitchFamily="49" charset="0"/>
+                <a:latin typeface="Liberation Mono" panose="020B0609020204030204" pitchFamily="49" charset="0"/>
+                <a:cs typeface="Liberation Mono" panose="020B0609020204030204" pitchFamily="49" charset="0"/>
               </a:rPr>
               <a:t>df</a:t>
             </a:r>
             <a:r>
               <a:rPr lang="en-US" sz="2400" dirty="0" smtClean="0">
-                <a:latin typeface="Consolas" panose="020B0609020204030204" pitchFamily="49" charset="0"/>
-                <a:cs typeface="Consolas" panose="020B0609020204030204" pitchFamily="49" charset="0"/>
+                <a:latin typeface="Liberation Mono" panose="020B0609020204030204" pitchFamily="49" charset="0"/>
+                <a:cs typeface="Liberation Mono" panose="020B0609020204030204" pitchFamily="49" charset="0"/>
               </a:rPr>
               <a:t> = </a:t>
             </a:r>
             <a:r>
               <a:rPr lang="en-US" sz="2400" dirty="0" err="1" smtClean="0">
-                <a:latin typeface="Consolas" panose="020B0609020204030204" pitchFamily="49" charset="0"/>
-                <a:cs typeface="Consolas" panose="020B0609020204030204" pitchFamily="49" charset="0"/>
+                <a:latin typeface="Liberation Mono" panose="020B0609020204030204" pitchFamily="49" charset="0"/>
+                <a:cs typeface="Liberation Mono" panose="020B0609020204030204" pitchFamily="49" charset="0"/>
               </a:rPr>
               <a:t>pd.DataFrame</a:t>
             </a:r>
             <a:r>
               <a:rPr lang="en-US" sz="2400" dirty="0" smtClean="0">
-                <a:latin typeface="Consolas" panose="020B0609020204030204" pitchFamily="49" charset="0"/>
-                <a:cs typeface="Consolas" panose="020B0609020204030204" pitchFamily="49" charset="0"/>
+                <a:latin typeface="Liberation Mono" panose="020B0609020204030204" pitchFamily="49" charset="0"/>
+                <a:cs typeface="Liberation Mono" panose="020B0609020204030204" pitchFamily="49" charset="0"/>
               </a:rPr>
               <a:t>([{‘</a:t>
             </a:r>
             <a:r>
               <a:rPr lang="en-US" sz="2400" dirty="0">
-                <a:latin typeface="Consolas" panose="020B0609020204030204" pitchFamily="49" charset="0"/>
-                <a:cs typeface="Consolas" panose="020B0609020204030204" pitchFamily="49" charset="0"/>
+                <a:latin typeface="Liberation Mono" panose="020B0609020204030204" pitchFamily="49" charset="0"/>
+                <a:cs typeface="Liberation Mono" panose="020B0609020204030204" pitchFamily="49" charset="0"/>
               </a:rPr>
               <a:t>a</a:t>
             </a:r>
             <a:r>
               <a:rPr lang="en-US" sz="2400" dirty="0" smtClean="0">
-                <a:latin typeface="Consolas" panose="020B0609020204030204" pitchFamily="49" charset="0"/>
-                <a:cs typeface="Consolas" panose="020B0609020204030204" pitchFamily="49" charset="0"/>
+                <a:latin typeface="Liberation Mono" panose="020B0609020204030204" pitchFamily="49" charset="0"/>
+                <a:cs typeface="Liberation Mono" panose="020B0609020204030204" pitchFamily="49" charset="0"/>
               </a:rPr>
               <a:t>’:1,’b’:2}, </a:t>
             </a:r>
@@ -6306,21 +6334,21 @@
           <a:p>
             <a:r>
               <a:rPr lang="en-US" sz="2400" dirty="0">
-                <a:latin typeface="Consolas" panose="020B0609020204030204" pitchFamily="49" charset="0"/>
-                <a:cs typeface="Consolas" panose="020B0609020204030204" pitchFamily="49" charset="0"/>
+                <a:latin typeface="Liberation Mono" panose="020B0609020204030204" pitchFamily="49" charset="0"/>
+                <a:cs typeface="Liberation Mono" panose="020B0609020204030204" pitchFamily="49" charset="0"/>
               </a:rPr>
               <a:t>	</a:t>
             </a:r>
             <a:r>
               <a:rPr lang="en-US" sz="2400" dirty="0" smtClean="0">
-                <a:latin typeface="Consolas" panose="020B0609020204030204" pitchFamily="49" charset="0"/>
-                <a:cs typeface="Consolas" panose="020B0609020204030204" pitchFamily="49" charset="0"/>
+                <a:latin typeface="Liberation Mono" panose="020B0609020204030204" pitchFamily="49" charset="0"/>
+                <a:cs typeface="Liberation Mono" panose="020B0609020204030204" pitchFamily="49" charset="0"/>
               </a:rPr>
               <a:t>		{‘a’:3, ‘b’:4}])</a:t>
             </a:r>
             <a:endParaRPr lang="en-US" sz="2400" dirty="0">
-              <a:latin typeface="Consolas" panose="020B0609020204030204" pitchFamily="49" charset="0"/>
-              <a:cs typeface="Consolas" panose="020B0609020204030204" pitchFamily="49" charset="0"/>
+              <a:latin typeface="Liberation Mono" panose="020B0609020204030204" pitchFamily="49" charset="0"/>
+              <a:cs typeface="Liberation Mono" panose="020B0609020204030204" pitchFamily="49" charset="0"/>
             </a:endParaRPr>
           </a:p>
         </p:txBody>
@@ -6403,19 +6431,19 @@
           <a:p>
             <a:r>
               <a:rPr lang="ko-KR" altLang="en-US" dirty="0" smtClean="0"/>
-              <a:t>테이블</a:t>
+              <a:t>Saving a Table as CSV</a:t>
             </a:r>
             <a:r>
               <a:rPr lang="ko-KR" altLang="en-US" dirty="0"/>
-              <a:t> </a:t>
+              <a:t/>
             </a:r>
             <a:r>
               <a:rPr lang="en-US" altLang="ko-KR" dirty="0" smtClean="0"/>
-              <a:t>CSV</a:t>
+              <a:t/>
             </a:r>
             <a:r>
               <a:rPr lang="ko-KR" altLang="en-US" dirty="0" smtClean="0"/>
-              <a:t>로 저장하기</a:t>
+              <a:t/>
             </a:r>
             <a:endParaRPr lang="en-US" dirty="0"/>
           </a:p>
@@ -6501,55 +6529,55 @@
           <a:p>
             <a:r>
               <a:rPr lang="en-US" sz="2400" dirty="0" smtClean="0">
-                <a:latin typeface="Consolas" panose="020B0609020204030204" pitchFamily="49" charset="0"/>
-                <a:cs typeface="Consolas" panose="020B0609020204030204" pitchFamily="49" charset="0"/>
+                <a:latin typeface="Liberation Mono" panose="020B0609020204030204" pitchFamily="49" charset="0"/>
+                <a:cs typeface="Liberation Mono" panose="020B0609020204030204" pitchFamily="49" charset="0"/>
               </a:rPr>
               <a:t>import pandas as </a:t>
             </a:r>
             <a:r>
               <a:rPr lang="en-US" sz="2400" dirty="0" err="1" smtClean="0">
-                <a:latin typeface="Consolas" panose="020B0609020204030204" pitchFamily="49" charset="0"/>
-                <a:cs typeface="Consolas" panose="020B0609020204030204" pitchFamily="49" charset="0"/>
+                <a:latin typeface="Liberation Mono" panose="020B0609020204030204" pitchFamily="49" charset="0"/>
+                <a:cs typeface="Liberation Mono" panose="020B0609020204030204" pitchFamily="49" charset="0"/>
               </a:rPr>
               <a:t>pd</a:t>
             </a:r>
             <a:endParaRPr lang="en-US" sz="2400" dirty="0" smtClean="0">
-              <a:latin typeface="Consolas" panose="020B0609020204030204" pitchFamily="49" charset="0"/>
-              <a:cs typeface="Consolas" panose="020B0609020204030204" pitchFamily="49" charset="0"/>
+              <a:latin typeface="Liberation Mono" panose="020B0609020204030204" pitchFamily="49" charset="0"/>
+              <a:cs typeface="Liberation Mono" panose="020B0609020204030204" pitchFamily="49" charset="0"/>
             </a:endParaRPr>
           </a:p>
           <a:p>
             <a:endParaRPr lang="en-US" sz="2400" dirty="0" smtClean="0">
-              <a:latin typeface="Consolas" panose="020B0609020204030204" pitchFamily="49" charset="0"/>
-              <a:cs typeface="Consolas" panose="020B0609020204030204" pitchFamily="49" charset="0"/>
+              <a:latin typeface="Liberation Mono" panose="020B0609020204030204" pitchFamily="49" charset="0"/>
+              <a:cs typeface="Liberation Mono" panose="020B0609020204030204" pitchFamily="49" charset="0"/>
             </a:endParaRPr>
           </a:p>
           <a:p>
             <a:r>
               <a:rPr lang="en-US" sz="2400" dirty="0" err="1" smtClean="0">
-                <a:latin typeface="Consolas" panose="020B0609020204030204" pitchFamily="49" charset="0"/>
-                <a:cs typeface="Consolas" panose="020B0609020204030204" pitchFamily="49" charset="0"/>
+                <a:latin typeface="Liberation Mono" panose="020B0609020204030204" pitchFamily="49" charset="0"/>
+                <a:cs typeface="Liberation Mono" panose="020B0609020204030204" pitchFamily="49" charset="0"/>
               </a:rPr>
               <a:t>df</a:t>
             </a:r>
             <a:r>
               <a:rPr lang="en-US" sz="2400" dirty="0" smtClean="0">
-                <a:latin typeface="Consolas" panose="020B0609020204030204" pitchFamily="49" charset="0"/>
-                <a:cs typeface="Consolas" panose="020B0609020204030204" pitchFamily="49" charset="0"/>
+                <a:latin typeface="Liberation Mono" panose="020B0609020204030204" pitchFamily="49" charset="0"/>
+                <a:cs typeface="Liberation Mono" panose="020B0609020204030204" pitchFamily="49" charset="0"/>
               </a:rPr>
               <a:t> = </a:t>
             </a:r>
             <a:r>
               <a:rPr lang="en-US" sz="2400" dirty="0" err="1" smtClean="0">
-                <a:latin typeface="Consolas" panose="020B0609020204030204" pitchFamily="49" charset="0"/>
-                <a:cs typeface="Consolas" panose="020B0609020204030204" pitchFamily="49" charset="0"/>
+                <a:latin typeface="Liberation Mono" panose="020B0609020204030204" pitchFamily="49" charset="0"/>
+                <a:cs typeface="Liberation Mono" panose="020B0609020204030204" pitchFamily="49" charset="0"/>
               </a:rPr>
               <a:t>pd.DataFrame</a:t>
             </a:r>
             <a:r>
               <a:rPr lang="en-US" sz="2400" dirty="0" smtClean="0">
-                <a:latin typeface="Consolas" panose="020B0609020204030204" pitchFamily="49" charset="0"/>
-                <a:cs typeface="Consolas" panose="020B0609020204030204" pitchFamily="49" charset="0"/>
+                <a:latin typeface="Liberation Mono" panose="020B0609020204030204" pitchFamily="49" charset="0"/>
+                <a:cs typeface="Liberation Mono" panose="020B0609020204030204" pitchFamily="49" charset="0"/>
               </a:rPr>
               <a:t>([{‘a’:1,’b’:2}, </a:t>
             </a:r>
@@ -6557,50 +6585,50 @@
           <a:p>
             <a:r>
               <a:rPr lang="en-US" sz="2400" dirty="0" smtClean="0">
-                <a:latin typeface="Consolas" panose="020B0609020204030204" pitchFamily="49" charset="0"/>
-                <a:cs typeface="Consolas" panose="020B0609020204030204" pitchFamily="49" charset="0"/>
+                <a:latin typeface="Liberation Mono" panose="020B0609020204030204" pitchFamily="49" charset="0"/>
+                <a:cs typeface="Liberation Mono" panose="020B0609020204030204" pitchFamily="49" charset="0"/>
               </a:rPr>
               <a:t>			{‘a’:3, ‘b’:4}])</a:t>
             </a:r>
           </a:p>
           <a:p>
             <a:endParaRPr lang="en-US" sz="2400" dirty="0">
-              <a:latin typeface="Consolas" panose="020B0609020204030204" pitchFamily="49" charset="0"/>
-              <a:cs typeface="Consolas" panose="020B0609020204030204" pitchFamily="49" charset="0"/>
+              <a:latin typeface="Liberation Mono" panose="020B0609020204030204" pitchFamily="49" charset="0"/>
+              <a:cs typeface="Liberation Mono" panose="020B0609020204030204" pitchFamily="49" charset="0"/>
             </a:endParaRPr>
           </a:p>
           <a:p>
             <a:r>
               <a:rPr lang="en-US" sz="2400" dirty="0" err="1" smtClean="0">
-                <a:latin typeface="Consolas" panose="020B0609020204030204" pitchFamily="49" charset="0"/>
-                <a:cs typeface="Consolas" panose="020B0609020204030204" pitchFamily="49" charset="0"/>
+                <a:latin typeface="Liberation Mono" panose="020B0609020204030204" pitchFamily="49" charset="0"/>
+                <a:cs typeface="Liberation Mono" panose="020B0609020204030204" pitchFamily="49" charset="0"/>
               </a:rPr>
               <a:t>df.to_csv</a:t>
             </a:r>
             <a:r>
               <a:rPr lang="en-US" sz="2400" dirty="0" smtClean="0">
-                <a:latin typeface="Consolas" panose="020B0609020204030204" pitchFamily="49" charset="0"/>
-                <a:cs typeface="Consolas" panose="020B0609020204030204" pitchFamily="49" charset="0"/>
+                <a:latin typeface="Liberation Mono" panose="020B0609020204030204" pitchFamily="49" charset="0"/>
+                <a:cs typeface="Liberation Mono" panose="020B0609020204030204" pitchFamily="49" charset="0"/>
               </a:rPr>
               <a:t>(‘</a:t>
             </a:r>
             <a:r>
               <a:rPr lang="en-US" sz="2400" dirty="0" err="1" smtClean="0">
-                <a:latin typeface="Consolas" panose="020B0609020204030204" pitchFamily="49" charset="0"/>
-                <a:cs typeface="Consolas" panose="020B0609020204030204" pitchFamily="49" charset="0"/>
+                <a:latin typeface="Liberation Mono" panose="020B0609020204030204" pitchFamily="49" charset="0"/>
+                <a:cs typeface="Liberation Mono" panose="020B0609020204030204" pitchFamily="49" charset="0"/>
               </a:rPr>
               <a:t>test.csv</a:t>
             </a:r>
             <a:r>
               <a:rPr lang="en-US" sz="2400" dirty="0" smtClean="0">
-                <a:latin typeface="Consolas" panose="020B0609020204030204" pitchFamily="49" charset="0"/>
-                <a:cs typeface="Consolas" panose="020B0609020204030204" pitchFamily="49" charset="0"/>
+                <a:latin typeface="Liberation Mono" panose="020B0609020204030204" pitchFamily="49" charset="0"/>
+                <a:cs typeface="Liberation Mono" panose="020B0609020204030204" pitchFamily="49" charset="0"/>
               </a:rPr>
               <a:t>’)</a:t>
             </a:r>
             <a:endParaRPr lang="en-US" sz="2400" dirty="0">
-              <a:latin typeface="Consolas" panose="020B0609020204030204" pitchFamily="49" charset="0"/>
-              <a:cs typeface="Consolas" panose="020B0609020204030204" pitchFamily="49" charset="0"/>
+              <a:latin typeface="Liberation Mono" panose="020B0609020204030204" pitchFamily="49" charset="0"/>
+              <a:cs typeface="Liberation Mono" panose="020B0609020204030204" pitchFamily="49" charset="0"/>
             </a:endParaRPr>
           </a:p>
         </p:txBody>
@@ -6773,8 +6801,8 @@
                 <a:solidFill>
                   <a:prstClr val="black"/>
                 </a:solidFill>
-                <a:latin typeface="Times New Roman" panose="02020603050405020304" pitchFamily="18" charset="0"/>
-                <a:cs typeface="Times New Roman" panose="02020603050405020304" pitchFamily="18" charset="0"/>
+                <a:latin typeface="Liberation Serif" panose="02020603050405020304" pitchFamily="18" charset="0"/>
+                <a:cs typeface="Liberation Serif" panose="02020603050405020304" pitchFamily="18" charset="0"/>
               </a:rPr>
               <a:t>Google Cloud API</a:t>
             </a:r>
@@ -6782,8 +6810,8 @@
               <a:solidFill>
                 <a:prstClr val="black"/>
               </a:solidFill>
-              <a:latin typeface="Times New Roman" panose="02020603050405020304" pitchFamily="18" charset="0"/>
-              <a:cs typeface="Times New Roman" panose="02020603050405020304" pitchFamily="18" charset="0"/>
+              <a:latin typeface="Liberation Serif" panose="02020603050405020304" pitchFamily="18" charset="0"/>
+              <a:cs typeface="Liberation Serif" panose="02020603050405020304" pitchFamily="18" charset="0"/>
             </a:endParaRPr>
           </a:p>
         </p:txBody>
@@ -6842,15 +6870,15 @@
           <a:p>
             <a:r>
               <a:rPr kumimoji="1" lang="en-US" altLang="ko-KR" dirty="0" smtClean="0"/>
-              <a:t>API</a:t>
+              <a:t>What is an API?</a:t>
             </a:r>
             <a:r>
               <a:rPr kumimoji="1" lang="ko-KR" altLang="en-US" dirty="0" smtClean="0"/>
-              <a:t>란</a:t>
+              <a:t/>
             </a:r>
             <a:r>
               <a:rPr kumimoji="1" lang="en-US" altLang="ko-KR" dirty="0" smtClean="0"/>
-              <a:t>?</a:t>
+              <a:t/>
             </a:r>
             <a:endParaRPr kumimoji="1" lang="ko-KR" altLang="en-US" dirty="0"/>
           </a:p>
@@ -6877,7 +6905,7 @@
               <a:rPr lang="en-US" altLang="ko-KR" sz="2000" b="1" dirty="0">
                 <a:latin typeface="+mn-ea"/>
               </a:rPr>
-              <a:t>API(Application Programing Interface)</a:t>
+              <a:t>API(Application Programming Interface)</a:t>
             </a:r>
           </a:p>
           <a:p>
@@ -6886,25 +6914,25 @@
               <a:rPr lang="en-US" altLang="ko-KR" sz="1800" dirty="0" smtClean="0">
                 <a:latin typeface="+mn-ea"/>
               </a:rPr>
-              <a:t>API</a:t>
+              <a:t>API stands for Application Programming Interface, which refers to an interface that allows application programs to control the functions provided by the operating system or programming language.</a:t>
             </a:r>
             <a:r>
               <a:rPr lang="ko-KR" altLang="en-US" sz="1800" dirty="0">
                 <a:latin typeface="+mn-ea"/>
               </a:rPr>
-              <a:t>는 응용 프로그램에서 사용할 수 있도록</a:t>
+              <a:t/>
             </a:r>
             <a:r>
               <a:rPr lang="en-US" altLang="ko-KR" sz="1800" dirty="0">
                 <a:latin typeface="+mn-ea"/>
               </a:rPr>
-              <a:t>, </a:t>
+              <a:t/>
             </a:r>
             <a:r>
               <a:rPr lang="ko-KR" altLang="en-US" sz="1800" dirty="0">
                 <a:latin typeface="+mn-ea"/>
               </a:rPr>
-              <a:t>운영 체제나 프로그래밍 언어가 제공하는 기능을 제어할 수 있게 만든 </a:t>
+              <a:t/>
             </a:r>
             <a:r>
               <a:rPr lang="ko-KR" altLang="en-US" sz="1800" dirty="0">
@@ -6914,19 +6942,19 @@
                 <a:latin typeface="+mn-ea"/>
                 <a:hlinkClick r:id="rId2" tooltip="This link will take you away from steemit.com"/>
               </a:rPr>
-              <a:t>인터페이스</a:t>
+              <a:t/>
             </a:r>
             <a:r>
               <a:rPr lang="ko-KR" altLang="en-US" sz="1800" dirty="0">
                 <a:latin typeface="+mn-ea"/>
               </a:rPr>
-              <a:t>를 뜻한다</a:t>
+              <a:t/>
             </a:r>
             <a:r>
               <a:rPr lang="en-US" altLang="ko-KR" sz="1800" dirty="0">
                 <a:latin typeface="+mn-ea"/>
               </a:rPr>
-              <a:t>.</a:t>
+              <a:t/>
             </a:r>
           </a:p>
           <a:p>
@@ -6939,13 +6967,13 @@
               <a:rPr lang="ko-KR" altLang="en-US" sz="2000" b="1" dirty="0" smtClean="0">
                 <a:latin typeface="+mn-ea"/>
               </a:rPr>
-              <a:t>인터페이스</a:t>
+              <a:t>Interface</a:t>
             </a:r>
             <a:r>
               <a:rPr lang="en-US" altLang="ko-KR" sz="2000" b="1" dirty="0">
                 <a:latin typeface="+mn-ea"/>
               </a:rPr>
-              <a:t>(Interface)</a:t>
+              <a:t/>
             </a:r>
           </a:p>
           <a:p>
@@ -6954,19 +6982,19 @@
               <a:rPr lang="ko-KR" altLang="en-US" sz="1800" dirty="0">
                 <a:latin typeface="+mn-ea"/>
               </a:rPr>
-              <a:t>인터페이스</a:t>
+              <a:t>An interface refers to a shared boundary through which computer systems exchange information. </a:t>
             </a:r>
             <a:r>
               <a:rPr lang="en-US" altLang="ko-KR" sz="1800" dirty="0">
                 <a:latin typeface="+mn-ea"/>
               </a:rPr>
-              <a:t>(interface)</a:t>
+              <a:t/>
             </a:r>
             <a:r>
               <a:rPr lang="ko-KR" altLang="en-US" sz="1800" dirty="0">
                 <a:latin typeface="+mn-ea"/>
               </a:rPr>
-              <a:t>는 컴퓨터 시스템끼리 </a:t>
+              <a:t/>
             </a:r>
             <a:r>
               <a:rPr lang="ko-KR" altLang="en-US" sz="1800" dirty="0">
@@ -6975,19 +7003,19 @@
                 </a:solidFill>
                 <a:latin typeface="+mn-ea"/>
               </a:rPr>
-              <a:t>정보를 교한하는 공유 경계</a:t>
+              <a:t/>
             </a:r>
             <a:r>
               <a:rPr lang="ko-KR" altLang="en-US" sz="1800" dirty="0">
                 <a:latin typeface="+mn-ea"/>
               </a:rPr>
-              <a:t>를 의미한다</a:t>
+              <a:t/>
             </a:r>
             <a:r>
               <a:rPr lang="en-US" altLang="ko-KR" sz="1800" dirty="0">
                 <a:latin typeface="+mn-ea"/>
               </a:rPr>
-              <a:t>, </a:t>
+              <a:t/>
             </a:r>
             <a:endParaRPr lang="en-US" altLang="ko-KR" sz="1800" dirty="0" smtClean="0">
               <a:latin typeface="+mn-ea"/>
@@ -7005,31 +7033,31 @@
               <a:rPr lang="ko-KR" altLang="en-US" sz="1800" dirty="0" smtClean="0">
                 <a:latin typeface="+mn-ea"/>
               </a:rPr>
-              <a:t>터치 </a:t>
+              <a:t>Some computer hardware devices, such as touch screens, can send and receive data through interfaces, while devices like mice and microphones provide interfaces that only transmit data to the system.</a:t>
             </a:r>
             <a:r>
               <a:rPr lang="ko-KR" altLang="en-US" sz="1800" dirty="0">
                 <a:latin typeface="+mn-ea"/>
               </a:rPr>
-              <a:t>스크린과 같은 일부 컴퓨터 하드웨어 장치들은 인터페이스를 통해 데이터를 송수신 할 수 있으며</a:t>
+              <a:t/>
             </a:r>
             <a:r>
               <a:rPr lang="en-US" altLang="ko-KR" sz="1800" dirty="0">
                 <a:latin typeface="+mn-ea"/>
               </a:rPr>
-              <a:t>, </a:t>
+              <a:t/>
             </a:r>
             <a:r>
               <a:rPr lang="ko-KR" altLang="en-US" sz="1800" dirty="0">
                 <a:latin typeface="+mn-ea"/>
               </a:rPr>
-              <a:t>마우스나 마이크론 폰가 같은 장치들은 오직 시스템에 데이터를 전송만 하는 인터페이스를 제공한다</a:t>
+              <a:t/>
             </a:r>
             <a:r>
               <a:rPr lang="en-US" altLang="ko-KR" sz="1800" dirty="0">
                 <a:latin typeface="+mn-ea"/>
               </a:rPr>
-              <a:t>.</a:t>
+              <a:t/>
             </a:r>
           </a:p>
           <a:p>
@@ -7230,8 +7258,8 @@
                 <a:solidFill>
                   <a:prstClr val="black"/>
                 </a:solidFill>
-                <a:latin typeface="Times New Roman" panose="02020603050405020304" pitchFamily="18" charset="0"/>
-                <a:cs typeface="Times New Roman" panose="02020603050405020304" pitchFamily="18" charset="0"/>
+                <a:latin typeface="Liberation Serif" panose="02020603050405020304" pitchFamily="18" charset="0"/>
+                <a:cs typeface="Liberation Serif" panose="02020603050405020304" pitchFamily="18" charset="0"/>
               </a:rPr>
               <a:t>Module3. </a:t>
             </a:r>
@@ -7240,8 +7268,8 @@
                 <a:solidFill>
                   <a:prstClr val="black"/>
                 </a:solidFill>
-                <a:latin typeface="Times New Roman" panose="02020603050405020304" pitchFamily="18" charset="0"/>
-                <a:cs typeface="Times New Roman" panose="02020603050405020304" pitchFamily="18" charset="0"/>
+                <a:latin typeface="Liberation Serif" panose="02020603050405020304" pitchFamily="18" charset="0"/>
+                <a:cs typeface="Liberation Serif" panose="02020603050405020304" pitchFamily="18" charset="0"/>
               </a:rPr>
               <a:t>Detecting Labels in Your Own Video Data</a:t>
             </a:r>
@@ -7377,19 +7405,19 @@
             <a:pPr algn="ctr"/>
             <a:r>
               <a:rPr lang="en-US" altLang="ko-KR" dirty="0" smtClean="0"/>
-              <a:t>1. </a:t>
+              <a:t>1. Request</a:t>
             </a:r>
             <a:r>
               <a:rPr lang="ko-KR" altLang="en-US" dirty="0" smtClean="0"/>
-              <a:t>요청</a:t>
+              <a:t/>
             </a:r>
             <a:r>
               <a:rPr lang="en-US" altLang="ko-KR" dirty="0"/>
-              <a:t> </a:t>
+              <a:t/>
             </a:r>
             <a:r>
               <a:rPr lang="en-US" altLang="ko-KR" dirty="0" smtClean="0"/>
-              <a:t>(Request)</a:t>
+              <a:t/>
             </a:r>
           </a:p>
         </p:txBody>
@@ -7416,15 +7444,15 @@
           <a:p>
             <a:r>
               <a:rPr kumimoji="1" lang="en-US" altLang="ko-KR" dirty="0" smtClean="0"/>
-              <a:t>REST API</a:t>
+              <a:t>REST What is an API?</a:t>
             </a:r>
             <a:r>
               <a:rPr kumimoji="1" lang="ko-KR" altLang="en-US" dirty="0" smtClean="0"/>
-              <a:t>란</a:t>
+              <a:t/>
             </a:r>
             <a:r>
               <a:rPr kumimoji="1" lang="en-US" altLang="ko-KR" dirty="0" smtClean="0"/>
-              <a:t>?</a:t>
+              <a:t/>
             </a:r>
             <a:endParaRPr kumimoji="1" lang="ko-KR" altLang="en-US" dirty="0"/>
           </a:p>
@@ -7479,25 +7507,25 @@
               <a:rPr lang="en-US" altLang="ko-KR" sz="1500" dirty="0" smtClean="0">
                 <a:latin typeface="+mn-ea"/>
               </a:rPr>
-              <a:t>URI</a:t>
+              <a:t>Resources are represented using URI format</a:t>
             </a:r>
             <a:r>
               <a:rPr lang="ko-KR" altLang="en-US" sz="1500" dirty="0">
                 <a:latin typeface="+mn-ea"/>
               </a:rPr>
-              <a:t> </a:t>
+              <a:t/>
             </a:r>
             <a:r>
               <a:rPr lang="ko-KR" altLang="en-US" sz="1500" dirty="0" smtClean="0">
                 <a:latin typeface="+mn-ea"/>
               </a:rPr>
-              <a:t>방식으로 </a:t>
+              <a:t/>
             </a:r>
             <a:r>
               <a:rPr lang="ko-KR" altLang="en-US" sz="1500" dirty="0">
                 <a:latin typeface="+mn-ea"/>
               </a:rPr>
-              <a:t>정보의 자원을 표현</a:t>
+              <a:t/>
             </a:r>
           </a:p>
         </p:txBody>
@@ -7527,19 +7555,19 @@
               <a:rPr lang="ko-KR" altLang="en-US" sz="1500" dirty="0">
                 <a:latin typeface="+mn-ea"/>
               </a:rPr>
-              <a:t>자원에 대한 행위는 </a:t>
+              <a:t>Actions on resources use HTTP Methods</a:t>
             </a:r>
             <a:r>
               <a:rPr lang="en-US" altLang="ko-KR" sz="1500" dirty="0">
                 <a:latin typeface="+mn-ea"/>
               </a:rPr>
-              <a:t>HTTP </a:t>
+              <a:t/>
             </a:r>
             <a:r>
               <a:rPr lang="en-US" altLang="ko-KR" sz="1500" dirty="0" smtClean="0">
                 <a:latin typeface="+mn-ea"/>
               </a:rPr>
-              <a:t>Method</a:t>
+              <a:t/>
             </a:r>
           </a:p>
         </p:txBody>
@@ -7569,13 +7597,13 @@
               <a:rPr lang="nl-NL" altLang="ko-KR" dirty="0">
                 <a:latin typeface="+mn-ea"/>
               </a:rPr>
-              <a:t>Client - Server </a:t>
+              <a:t>Client - Server Architecture</a:t>
             </a:r>
             <a:r>
               <a:rPr lang="ko-KR" altLang="nl-NL" dirty="0">
                 <a:latin typeface="+mn-ea"/>
               </a:rPr>
-              <a:t>구조</a:t>
+              <a:t/>
             </a:r>
             <a:endParaRPr lang="ko-KR" altLang="nl-NL" b="0" i="0" dirty="0">
               <a:effectLst/>
@@ -7610,7 +7638,7 @@
                 <a:solidFill>
                   <a:srgbClr val="111111"/>
                 </a:solidFill>
-                <a:latin typeface="Helvetica" charset="0"/>
+                <a:latin typeface="Liberation Sans" charset="0"/>
               </a:rPr>
               <a:t>Ex. </a:t>
             </a:r>
@@ -7619,7 +7647,7 @@
                 <a:solidFill>
                   <a:srgbClr val="111111"/>
                 </a:solidFill>
-                <a:latin typeface="Helvetica" charset="0"/>
+                <a:latin typeface="Liberation Sans" charset="0"/>
               </a:rPr>
               <a:t>https</a:t>
             </a:r>
@@ -7628,7 +7656,7 @@
                 <a:solidFill>
                   <a:srgbClr val="111111"/>
                 </a:solidFill>
-                <a:latin typeface="Helvetica" charset="0"/>
+                <a:latin typeface="Liberation Sans" charset="0"/>
               </a:rPr>
               <a:t>://</a:t>
             </a:r>
@@ -7637,7 +7665,7 @@
                 <a:solidFill>
                   <a:srgbClr val="111111"/>
                 </a:solidFill>
-                <a:latin typeface="Helvetica" charset="0"/>
+                <a:latin typeface="Liberation Sans" charset="0"/>
               </a:rPr>
               <a:t>www.google.co.kr</a:t>
             </a:r>
@@ -7646,7 +7674,7 @@
                 <a:solidFill>
                   <a:srgbClr val="111111"/>
                 </a:solidFill>
-                <a:latin typeface="Helvetica" charset="0"/>
+                <a:latin typeface="Liberation Sans" charset="0"/>
               </a:rPr>
               <a:t>/</a:t>
             </a:r>
@@ -7655,7 +7683,7 @@
                 <a:solidFill>
                   <a:srgbClr val="111111"/>
                 </a:solidFill>
-                <a:latin typeface="Helvetica" charset="0"/>
+                <a:latin typeface="Liberation Sans" charset="0"/>
               </a:rPr>
               <a:t>search?q</a:t>
             </a:r>
@@ -7664,7 +7692,7 @@
                 <a:solidFill>
                   <a:srgbClr val="111111"/>
                 </a:solidFill>
-                <a:latin typeface="Helvetica" charset="0"/>
+                <a:latin typeface="Liberation Sans" charset="0"/>
               </a:rPr>
               <a:t>=</a:t>
             </a:r>
@@ -7673,7 +7701,7 @@
                 <a:solidFill>
                   <a:srgbClr val="111111"/>
                 </a:solidFill>
-                <a:latin typeface="Helvetica" charset="0"/>
+                <a:latin typeface="Liberation Sans" charset="0"/>
               </a:rPr>
               <a:t>uri</a:t>
             </a:r>
@@ -7682,7 +7710,7 @@
                 <a:solidFill>
                   <a:srgbClr val="111111"/>
                 </a:solidFill>
-                <a:latin typeface="Helvetica" charset="0"/>
+                <a:latin typeface="Liberation Sans" charset="0"/>
               </a:rPr>
               <a:t> </a:t>
             </a:r>
@@ -7716,7 +7744,7 @@
                 <a:solidFill>
                   <a:srgbClr val="111111"/>
                 </a:solidFill>
-                <a:latin typeface="Helvetica" charset="0"/>
+                <a:latin typeface="Liberation Sans" charset="0"/>
               </a:rPr>
               <a:t>Ex. GET, POST</a:t>
             </a:r>
@@ -7853,22 +7881,22 @@
             <a:pPr algn="ctr"/>
             <a:r>
               <a:rPr lang="en-US" altLang="ko-KR" dirty="0" smtClean="0"/>
-              <a:t>2. </a:t>
+              <a:t>2. Response</a:t>
             </a:r>
             <a:r>
               <a:rPr lang="ko-KR" altLang="en-US" dirty="0" smtClean="0"/>
-              <a:t>응답 </a:t>
+              <a:t/>
             </a:r>
             <a:r>
               <a:rPr lang="en-US" altLang="ko-KR" dirty="0" smtClean="0"/>
-              <a:t>(Response)</a:t>
+              <a:t/>
             </a:r>
           </a:p>
           <a:p>
             <a:pPr algn="ctr"/>
             <a:r>
               <a:rPr lang="ko-KR" altLang="en-US" dirty="0" smtClean="0"/>
-              <a:t>결과</a:t>
+              <a:t>Result</a:t>
             </a:r>
             <a:endParaRPr lang="en-US" altLang="ko-KR" dirty="0" smtClean="0"/>
           </a:p>
@@ -7940,15 +7968,15 @@
             <a:pPr algn="ctr"/>
             <a:r>
               <a:rPr lang="en-US" altLang="ko-KR" dirty="0" smtClean="0"/>
-              <a:t>1. </a:t>
+              <a:t>1. Request</a:t>
             </a:r>
             <a:r>
               <a:rPr lang="ko-KR" altLang="en-US" dirty="0" smtClean="0"/>
-              <a:t>요청</a:t>
+              <a:t/>
             </a:r>
             <a:r>
               <a:rPr lang="en-US" altLang="ko-KR" dirty="0" smtClean="0"/>
-              <a:t> (Request)</a:t>
+              <a:t/>
             </a:r>
           </a:p>
         </p:txBody>
@@ -7975,15 +8003,15 @@
           <a:p>
             <a:r>
               <a:rPr kumimoji="1" lang="en-US" altLang="ko-KR" dirty="0" smtClean="0"/>
-              <a:t>REST API</a:t>
+              <a:t>REST What is an API?</a:t>
             </a:r>
             <a:r>
               <a:rPr kumimoji="1" lang="ko-KR" altLang="en-US" dirty="0" smtClean="0"/>
-              <a:t>란</a:t>
+              <a:t/>
             </a:r>
             <a:r>
               <a:rPr kumimoji="1" lang="en-US" altLang="ko-KR" dirty="0" smtClean="0"/>
-              <a:t>?</a:t>
+              <a:t/>
             </a:r>
             <a:endParaRPr kumimoji="1" lang="ko-KR" altLang="en-US" dirty="0"/>
           </a:p>
@@ -8038,13 +8066,13 @@
               <a:rPr lang="nl-NL" altLang="ko-KR" dirty="0">
                 <a:latin typeface="+mn-ea"/>
               </a:rPr>
-              <a:t>Client - Server </a:t>
+              <a:t>Client - Server Architecture</a:t>
             </a:r>
             <a:r>
               <a:rPr lang="ko-KR" altLang="nl-NL" dirty="0">
                 <a:latin typeface="+mn-ea"/>
               </a:rPr>
-              <a:t>구조</a:t>
+              <a:t/>
             </a:r>
             <a:endParaRPr lang="ko-KR" altLang="nl-NL" b="0" i="0" dirty="0">
               <a:effectLst/>
@@ -8179,8 +8207,8 @@
                 <a:solidFill>
                   <a:prstClr val="black"/>
                 </a:solidFill>
-                <a:latin typeface="Times New Roman" panose="02020603050405020304" pitchFamily="18" charset="0"/>
-                <a:cs typeface="Times New Roman" panose="02020603050405020304" pitchFamily="18" charset="0"/>
+                <a:latin typeface="Liberation Serif" panose="02020603050405020304" pitchFamily="18" charset="0"/>
+                <a:cs typeface="Liberation Serif" panose="02020603050405020304" pitchFamily="18" charset="0"/>
               </a:rPr>
               <a:t>Google Video Intelligence API</a:t>
             </a:r>
@@ -8188,8 +8216,8 @@
               <a:solidFill>
                 <a:prstClr val="black"/>
               </a:solidFill>
-              <a:latin typeface="Times New Roman" panose="02020603050405020304" pitchFamily="18" charset="0"/>
-              <a:cs typeface="Times New Roman" panose="02020603050405020304" pitchFamily="18" charset="0"/>
+              <a:latin typeface="Liberation Serif" panose="02020603050405020304" pitchFamily="18" charset="0"/>
+              <a:cs typeface="Liberation Serif" panose="02020603050405020304" pitchFamily="18" charset="0"/>
             </a:endParaRPr>
           </a:p>
         </p:txBody>
@@ -8217,17 +8245,17 @@
           <a:p>
             <a:r>
               <a:rPr lang="en-US" altLang="ko-KR" dirty="0" smtClean="0">
-                <a:latin typeface="Times New Roman" charset="0"/>
-                <a:ea typeface="Times New Roman" charset="0"/>
-                <a:cs typeface="Times New Roman" charset="0"/>
+                <a:latin typeface="Liberation Serif" charset="0"/>
+                <a:ea typeface="Liberation Serif" charset="0"/>
+                <a:cs typeface="Liberation Serif" charset="0"/>
                 <a:hlinkClick r:id="rId2"/>
               </a:rPr>
               <a:t>https://cloud.google.com/video-intelligence/</a:t>
             </a:r>
             <a:endParaRPr lang="ko-KR" altLang="en-US" dirty="0">
-              <a:latin typeface="Times New Roman" charset="0"/>
-              <a:ea typeface="Times New Roman" charset="0"/>
-              <a:cs typeface="Times New Roman" charset="0"/>
+              <a:latin typeface="Liberation Serif" charset="0"/>
+              <a:ea typeface="Liberation Serif" charset="0"/>
+              <a:cs typeface="Liberation Serif" charset="0"/>
             </a:endParaRPr>
           </a:p>
         </p:txBody>
@@ -8278,37 +8306,37 @@
           <a:lstStyle/>
           <a:p>
             <a:pPr marL="285750" indent="-285750">
-              <a:buFont typeface="Arial" charset="0"/>
+              <a:buFont typeface="Liberation Sans" charset="0"/>
               <a:buChar char="•"/>
             </a:pPr>
             <a:r>
               <a:rPr lang="en-US" altLang="ko-KR" dirty="0">
-                <a:latin typeface="Times New Roman" charset="0"/>
-                <a:ea typeface="Times New Roman" charset="0"/>
-                <a:cs typeface="Times New Roman" charset="0"/>
+                <a:latin typeface="Liberation Serif" charset="0"/>
+                <a:ea typeface="Liberation Serif" charset="0"/>
+                <a:cs typeface="Liberation Serif" charset="0"/>
               </a:rPr>
               <a:t>The API </a:t>
             </a:r>
             <a:r>
               <a:rPr lang="en-US" altLang="ko-KR" dirty="0" smtClean="0">
-                <a:latin typeface="Times New Roman" charset="0"/>
-                <a:ea typeface="Times New Roman" charset="0"/>
-                <a:cs typeface="Times New Roman" charset="0"/>
+                <a:latin typeface="Liberation Serif" charset="0"/>
+                <a:ea typeface="Liberation Serif" charset="0"/>
+                <a:cs typeface="Liberation Serif" charset="0"/>
               </a:rPr>
               <a:t>detects </a:t>
             </a:r>
             <a:r>
               <a:rPr lang="en-US" altLang="ko-KR" dirty="0">
-                <a:latin typeface="Times New Roman" charset="0"/>
-                <a:ea typeface="Times New Roman" charset="0"/>
-                <a:cs typeface="Times New Roman" charset="0"/>
+                <a:latin typeface="Liberation Serif" charset="0"/>
+                <a:ea typeface="Liberation Serif" charset="0"/>
+                <a:cs typeface="Liberation Serif" charset="0"/>
               </a:rPr>
               <a:t>the video labels (objects within the video) as well as shot labels (description of the video events over time)</a:t>
             </a:r>
             <a:endParaRPr lang="ko-KR" altLang="en-US" dirty="0">
-              <a:latin typeface="Times New Roman" charset="0"/>
-              <a:ea typeface="Times New Roman" charset="0"/>
-              <a:cs typeface="Times New Roman" charset="0"/>
+              <a:latin typeface="Liberation Serif" charset="0"/>
+              <a:ea typeface="Liberation Serif" charset="0"/>
+              <a:cs typeface="Liberation Serif" charset="0"/>
             </a:endParaRPr>
           </a:p>
         </p:txBody>
@@ -8474,8 +8502,8 @@
                 <a:solidFill>
                   <a:prstClr val="black"/>
                 </a:solidFill>
-                <a:latin typeface="Times New Roman" panose="02020603050405020304" pitchFamily="18" charset="0"/>
-                <a:cs typeface="Times New Roman" panose="02020603050405020304" pitchFamily="18" charset="0"/>
+                <a:latin typeface="Liberation Serif" panose="02020603050405020304" pitchFamily="18" charset="0"/>
+                <a:cs typeface="Liberation Serif" panose="02020603050405020304" pitchFamily="18" charset="0"/>
               </a:rPr>
               <a:t>Hands-on-Labs </a:t>
             </a:r>
@@ -8484,8 +8512,8 @@
                 <a:solidFill>
                   <a:prstClr val="black"/>
                 </a:solidFill>
-                <a:latin typeface="Times New Roman" panose="02020603050405020304" pitchFamily="18" charset="0"/>
-                <a:cs typeface="Times New Roman" panose="02020603050405020304" pitchFamily="18" charset="0"/>
+                <a:latin typeface="Liberation Serif" panose="02020603050405020304" pitchFamily="18" charset="0"/>
+                <a:cs typeface="Liberation Serif" panose="02020603050405020304" pitchFamily="18" charset="0"/>
               </a:rPr>
               <a:t>Google Video Intelligence</a:t>
             </a:r>
@@ -8494,8 +8522,8 @@
                 <a:solidFill>
                   <a:prstClr val="black"/>
                 </a:solidFill>
-                <a:latin typeface="Times New Roman" panose="02020603050405020304" pitchFamily="18" charset="0"/>
-                <a:cs typeface="Times New Roman" panose="02020603050405020304" pitchFamily="18" charset="0"/>
+                <a:latin typeface="Liberation Serif" panose="02020603050405020304" pitchFamily="18" charset="0"/>
+                <a:cs typeface="Liberation Serif" panose="02020603050405020304" pitchFamily="18" charset="0"/>
               </a:rPr>
               <a:t> API</a:t>
             </a:r>
@@ -8503,8 +8531,8 @@
               <a:solidFill>
                 <a:prstClr val="black"/>
               </a:solidFill>
-              <a:latin typeface="Times New Roman" panose="02020603050405020304" pitchFamily="18" charset="0"/>
-              <a:cs typeface="Times New Roman" panose="02020603050405020304" pitchFamily="18" charset="0"/>
+              <a:latin typeface="Liberation Serif" panose="02020603050405020304" pitchFamily="18" charset="0"/>
+              <a:cs typeface="Liberation Serif" panose="02020603050405020304" pitchFamily="18" charset="0"/>
             </a:endParaRPr>
           </a:p>
         </p:txBody>
@@ -8600,8 +8628,8 @@
                 <a:solidFill>
                   <a:prstClr val="black"/>
                 </a:solidFill>
-                <a:latin typeface="Times New Roman" panose="02020603050405020304" pitchFamily="18" charset="0"/>
-                <a:cs typeface="Times New Roman" panose="02020603050405020304" pitchFamily="18" charset="0"/>
+                <a:latin typeface="Liberation Serif" panose="02020603050405020304" pitchFamily="18" charset="0"/>
+                <a:cs typeface="Liberation Serif" panose="02020603050405020304" pitchFamily="18" charset="0"/>
               </a:rPr>
               <a:t>Google </a:t>
             </a:r>
@@ -8610,8 +8638,8 @@
                 <a:solidFill>
                   <a:prstClr val="black"/>
                 </a:solidFill>
-                <a:latin typeface="Times New Roman" panose="02020603050405020304" pitchFamily="18" charset="0"/>
-                <a:cs typeface="Times New Roman" panose="02020603050405020304" pitchFamily="18" charset="0"/>
+                <a:latin typeface="Liberation Serif" panose="02020603050405020304" pitchFamily="18" charset="0"/>
+                <a:cs typeface="Liberation Serif" panose="02020603050405020304" pitchFamily="18" charset="0"/>
               </a:rPr>
               <a:t>Video Intelligence</a:t>
             </a:r>
@@ -8620,8 +8648,8 @@
                 <a:solidFill>
                   <a:prstClr val="black"/>
                 </a:solidFill>
-                <a:latin typeface="Times New Roman" panose="02020603050405020304" pitchFamily="18" charset="0"/>
-                <a:cs typeface="Times New Roman" panose="02020603050405020304" pitchFamily="18" charset="0"/>
+                <a:latin typeface="Liberation Serif" panose="02020603050405020304" pitchFamily="18" charset="0"/>
+                <a:cs typeface="Liberation Serif" panose="02020603050405020304" pitchFamily="18" charset="0"/>
               </a:rPr>
               <a:t> API</a:t>
             </a:r>
@@ -8629,8 +8657,8 @@
               <a:solidFill>
                 <a:prstClr val="black"/>
               </a:solidFill>
-              <a:latin typeface="Times New Roman" panose="02020603050405020304" pitchFamily="18" charset="0"/>
-              <a:cs typeface="Times New Roman" panose="02020603050405020304" pitchFamily="18" charset="0"/>
+              <a:latin typeface="Liberation Serif" panose="02020603050405020304" pitchFamily="18" charset="0"/>
+              <a:cs typeface="Liberation Serif" panose="02020603050405020304" pitchFamily="18" charset="0"/>
             </a:endParaRPr>
           </a:p>
           <a:p>
@@ -8643,8 +8671,8 @@
               <a:solidFill>
                 <a:prstClr val="black"/>
               </a:solidFill>
-              <a:latin typeface="Times New Roman" panose="02020603050405020304" pitchFamily="18" charset="0"/>
-              <a:cs typeface="Times New Roman" panose="02020603050405020304" pitchFamily="18" charset="0"/>
+              <a:latin typeface="Liberation Serif" panose="02020603050405020304" pitchFamily="18" charset="0"/>
+              <a:cs typeface="Liberation Serif" panose="02020603050405020304" pitchFamily="18" charset="0"/>
             </a:endParaRPr>
           </a:p>
           <a:p>
@@ -8658,8 +8686,8 @@
                 <a:solidFill>
                   <a:prstClr val="black"/>
                 </a:solidFill>
-                <a:latin typeface="Times New Roman" panose="02020603050405020304" pitchFamily="18" charset="0"/>
-                <a:cs typeface="Times New Roman" panose="02020603050405020304" pitchFamily="18" charset="0"/>
+                <a:latin typeface="Liberation Serif" panose="02020603050405020304" pitchFamily="18" charset="0"/>
+                <a:cs typeface="Liberation Serif" panose="02020603050405020304" pitchFamily="18" charset="0"/>
               </a:rPr>
               <a:t>KAIST_Video_Analytics.ipynb</a:t>
             </a:r>
@@ -8667,8 +8695,8 @@
               <a:solidFill>
                 <a:prstClr val="black"/>
               </a:solidFill>
-              <a:latin typeface="Times New Roman" panose="02020603050405020304" pitchFamily="18" charset="0"/>
-              <a:cs typeface="Times New Roman" panose="02020603050405020304" pitchFamily="18" charset="0"/>
+              <a:latin typeface="Liberation Serif" panose="02020603050405020304" pitchFamily="18" charset="0"/>
+              <a:cs typeface="Liberation Serif" panose="02020603050405020304" pitchFamily="18" charset="0"/>
             </a:endParaRPr>
           </a:p>
           <a:p>
@@ -8681,8 +8709,8 @@
               <a:solidFill>
                 <a:prstClr val="black"/>
               </a:solidFill>
-              <a:latin typeface="Times New Roman" panose="02020603050405020304" pitchFamily="18" charset="0"/>
-              <a:cs typeface="Times New Roman" panose="02020603050405020304" pitchFamily="18" charset="0"/>
+              <a:latin typeface="Liberation Serif" panose="02020603050405020304" pitchFamily="18" charset="0"/>
+              <a:cs typeface="Liberation Serif" panose="02020603050405020304" pitchFamily="18" charset="0"/>
             </a:endParaRPr>
           </a:p>
         </p:txBody>
@@ -8797,35 +8825,35 @@
             </a:pPr>
             <a:r>
               <a:rPr lang="en-US" altLang="ko-KR" dirty="0">
-                <a:latin typeface="Times New Roman" charset="0"/>
-                <a:ea typeface="Times New Roman" charset="0"/>
-                <a:cs typeface="Times New Roman" charset="0"/>
+                <a:latin typeface="Liberation Serif" charset="0"/>
+                <a:ea typeface="Liberation Serif" charset="0"/>
+                <a:cs typeface="Liberation Serif" charset="0"/>
               </a:rPr>
               <a:t>URL: </a:t>
             </a:r>
             <a:r>
               <a:rPr lang="en-US" altLang="ko-KR" dirty="0">
-                <a:latin typeface="Times New Roman" charset="0"/>
-                <a:ea typeface="Times New Roman" charset="0"/>
-                <a:cs typeface="Times New Roman" charset="0"/>
+                <a:latin typeface="Liberation Serif" charset="0"/>
+                <a:ea typeface="Liberation Serif" charset="0"/>
+                <a:cs typeface="Liberation Serif" charset="0"/>
                 <a:hlinkClick r:id="rId4"/>
               </a:rPr>
               <a:t>https://</a:t>
             </a:r>
             <a:r>
               <a:rPr lang="en-US" altLang="ko-KR" dirty="0" smtClean="0">
-                <a:latin typeface="Times New Roman" charset="0"/>
-                <a:ea typeface="Times New Roman" charset="0"/>
-                <a:cs typeface="Times New Roman" charset="0"/>
+                <a:latin typeface="Liberation Serif" charset="0"/>
+                <a:ea typeface="Liberation Serif" charset="0"/>
+                <a:cs typeface="Liberation Serif" charset="0"/>
                 <a:hlinkClick r:id="rId4"/>
               </a:rPr>
               <a:t>bit.ly/2IOPeuI</a:t>
             </a:r>
             <a:r>
               <a:rPr lang="en-US" altLang="ko-KR" dirty="0" smtClean="0">
-                <a:latin typeface="Times New Roman" charset="0"/>
-                <a:ea typeface="Times New Roman" charset="0"/>
-                <a:cs typeface="Times New Roman" charset="0"/>
+                <a:latin typeface="Liberation Serif" charset="0"/>
+                <a:ea typeface="Liberation Serif" charset="0"/>
+                <a:cs typeface="Liberation Serif" charset="0"/>
               </a:rPr>
               <a:t> </a:t>
             </a:r>
@@ -8833,9 +8861,9 @@
               <a:solidFill>
                 <a:prstClr val="black"/>
               </a:solidFill>
-              <a:latin typeface="Times New Roman" charset="0"/>
-              <a:ea typeface="Times New Roman" charset="0"/>
-              <a:cs typeface="Times New Roman" charset="0"/>
+              <a:latin typeface="Liberation Serif" charset="0"/>
+              <a:ea typeface="Liberation Serif" charset="0"/>
+              <a:cs typeface="Liberation Serif" charset="0"/>
             </a:endParaRPr>
           </a:p>
         </p:txBody>
@@ -8983,8 +9011,8 @@
                 <a:solidFill>
                   <a:prstClr val="black"/>
                 </a:solidFill>
-                <a:latin typeface="Times New Roman" panose="02020603050405020304" pitchFamily="18" charset="0"/>
-                <a:cs typeface="Times New Roman" panose="02020603050405020304" pitchFamily="18" charset="0"/>
+                <a:latin typeface="Liberation Serif" panose="02020603050405020304" pitchFamily="18" charset="0"/>
+                <a:cs typeface="Liberation Serif" panose="02020603050405020304" pitchFamily="18" charset="0"/>
               </a:rPr>
               <a:t>Google </a:t>
             </a:r>
@@ -8993,8 +9021,8 @@
                 <a:solidFill>
                   <a:prstClr val="black"/>
                 </a:solidFill>
-                <a:latin typeface="Times New Roman" panose="02020603050405020304" pitchFamily="18" charset="0"/>
-                <a:cs typeface="Times New Roman" panose="02020603050405020304" pitchFamily="18" charset="0"/>
+                <a:latin typeface="Liberation Serif" panose="02020603050405020304" pitchFamily="18" charset="0"/>
+                <a:cs typeface="Liberation Serif" panose="02020603050405020304" pitchFamily="18" charset="0"/>
               </a:rPr>
               <a:t>Drive Access on </a:t>
             </a:r>
@@ -9003,8 +9031,8 @@
                 <a:solidFill>
                   <a:prstClr val="black"/>
                 </a:solidFill>
-                <a:latin typeface="Times New Roman" panose="02020603050405020304" pitchFamily="18" charset="0"/>
-                <a:cs typeface="Times New Roman" panose="02020603050405020304" pitchFamily="18" charset="0"/>
+                <a:latin typeface="Liberation Serif" panose="02020603050405020304" pitchFamily="18" charset="0"/>
+                <a:cs typeface="Liberation Serif" panose="02020603050405020304" pitchFamily="18" charset="0"/>
               </a:rPr>
               <a:t>Colab</a:t>
             </a:r>
@@ -9012,8 +9040,8 @@
               <a:solidFill>
                 <a:prstClr val="black"/>
               </a:solidFill>
-              <a:latin typeface="Times New Roman" panose="02020603050405020304" pitchFamily="18" charset="0"/>
-              <a:cs typeface="Times New Roman" panose="02020603050405020304" pitchFamily="18" charset="0"/>
+              <a:latin typeface="Liberation Serif" panose="02020603050405020304" pitchFamily="18" charset="0"/>
+              <a:cs typeface="Liberation Serif" panose="02020603050405020304" pitchFamily="18" charset="0"/>
             </a:endParaRPr>
           </a:p>
           <a:p>
@@ -9026,8 +9054,8 @@
               <a:solidFill>
                 <a:prstClr val="black"/>
               </a:solidFill>
-              <a:latin typeface="Times New Roman" panose="02020603050405020304" pitchFamily="18" charset="0"/>
-              <a:cs typeface="Times New Roman" panose="02020603050405020304" pitchFamily="18" charset="0"/>
+              <a:latin typeface="Liberation Serif" panose="02020603050405020304" pitchFamily="18" charset="0"/>
+              <a:cs typeface="Liberation Serif" panose="02020603050405020304" pitchFamily="18" charset="0"/>
             </a:endParaRPr>
           </a:p>
         </p:txBody>
@@ -9058,13 +9086,13 @@
               <a:lnSpc>
                 <a:spcPct val="150000"/>
               </a:lnSpc>
-              <a:buFont typeface="Arial" panose="020B0604020202020204" pitchFamily="34" charset="0"/>
+              <a:buFont typeface="Liberation Sans" panose="020B0604020202020204" pitchFamily="34" charset="0"/>
               <a:buChar char="•"/>
             </a:pPr>
             <a:r>
               <a:rPr lang="en-US" altLang="ko-KR" sz="2000" dirty="0" smtClean="0">
-                <a:latin typeface="Times New Roman" panose="02020603050405020304" pitchFamily="18" charset="0"/>
-                <a:cs typeface="Times New Roman" panose="02020603050405020304" pitchFamily="18" charset="0"/>
+                <a:latin typeface="Liberation Serif" panose="02020603050405020304" pitchFamily="18" charset="0"/>
+                <a:cs typeface="Liberation Serif" panose="02020603050405020304" pitchFamily="18" charset="0"/>
               </a:rPr>
               <a:t>First Step: Upload your data on Google Drive</a:t>
             </a:r>
@@ -9074,12 +9102,12 @@
               <a:lnSpc>
                 <a:spcPct val="150000"/>
               </a:lnSpc>
-              <a:buFont typeface="Arial" panose="020B0604020202020204" pitchFamily="34" charset="0"/>
+              <a:buFont typeface="Liberation Sans" panose="020B0604020202020204" pitchFamily="34" charset="0"/>
               <a:buChar char="•"/>
             </a:pPr>
             <a:endParaRPr lang="en-US" altLang="ko-KR" dirty="0">
-              <a:latin typeface="Times New Roman" panose="02020603050405020304" pitchFamily="18" charset="0"/>
-              <a:cs typeface="Times New Roman" panose="02020603050405020304" pitchFamily="18" charset="0"/>
+              <a:latin typeface="Liberation Serif" panose="02020603050405020304" pitchFamily="18" charset="0"/>
+              <a:cs typeface="Liberation Serif" panose="02020603050405020304" pitchFamily="18" charset="0"/>
             </a:endParaRPr>
           </a:p>
         </p:txBody>
@@ -9107,26 +9135,26 @@
           <a:p>
             <a:r>
               <a:rPr lang="ko-KR" altLang="en-US" dirty="0">
-                <a:latin typeface="Times New Roman" charset="0"/>
-                <a:ea typeface="Times New Roman" charset="0"/>
-                <a:cs typeface="Times New Roman" charset="0"/>
+                <a:latin typeface="Liberation Serif" charset="0"/>
+                <a:ea typeface="Liberation Serif" charset="0"/>
+                <a:cs typeface="Liberation Serif" charset="0"/>
                 <a:hlinkClick r:id="rId3"/>
               </a:rPr>
               <a:t>http://</a:t>
             </a:r>
             <a:r>
               <a:rPr lang="ko-KR" altLang="en-US" dirty="0" smtClean="0">
-                <a:latin typeface="Times New Roman" charset="0"/>
-                <a:ea typeface="Times New Roman" charset="0"/>
-                <a:cs typeface="Times New Roman" charset="0"/>
+                <a:latin typeface="Liberation Serif" charset="0"/>
+                <a:ea typeface="Liberation Serif" charset="0"/>
+                <a:cs typeface="Liberation Serif" charset="0"/>
                 <a:hlinkClick r:id="rId3"/>
               </a:rPr>
               <a:t>drive.google.com</a:t>
             </a:r>
             <a:endParaRPr lang="en-US" altLang="ko-KR" dirty="0" smtClean="0">
-              <a:latin typeface="Times New Roman" charset="0"/>
-              <a:ea typeface="Times New Roman" charset="0"/>
-              <a:cs typeface="Times New Roman" charset="0"/>
+              <a:latin typeface="Liberation Serif" charset="0"/>
+              <a:ea typeface="Liberation Serif" charset="0"/>
+              <a:cs typeface="Liberation Serif" charset="0"/>
             </a:endParaRPr>
           </a:p>
         </p:txBody>
@@ -9157,29 +9185,29 @@
               <a:lnSpc>
                 <a:spcPct val="150000"/>
               </a:lnSpc>
-              <a:buFont typeface="Arial" panose="020B0604020202020204" pitchFamily="34" charset="0"/>
+              <a:buFont typeface="Liberation Sans" panose="020B0604020202020204" pitchFamily="34" charset="0"/>
               <a:buChar char="•"/>
             </a:pPr>
             <a:r>
               <a:rPr lang="en-US" altLang="ko-KR" sz="2000" dirty="0" smtClean="0">
-                <a:latin typeface="Times New Roman" charset="0"/>
-                <a:ea typeface="Times New Roman" charset="0"/>
-                <a:cs typeface="Times New Roman" charset="0"/>
+                <a:latin typeface="Liberation Serif" charset="0"/>
+                <a:ea typeface="Liberation Serif" charset="0"/>
+                <a:cs typeface="Liberation Serif" charset="0"/>
               </a:rPr>
               <a:t>Second Step: Enter Authentication Code on Google </a:t>
             </a:r>
             <a:r>
               <a:rPr lang="en-US" altLang="ko-KR" sz="2000" dirty="0" err="1" smtClean="0">
-                <a:latin typeface="Times New Roman" charset="0"/>
-                <a:ea typeface="Times New Roman" charset="0"/>
-                <a:cs typeface="Times New Roman" charset="0"/>
+                <a:latin typeface="Liberation Serif" charset="0"/>
+                <a:ea typeface="Liberation Serif" charset="0"/>
+                <a:cs typeface="Liberation Serif" charset="0"/>
               </a:rPr>
               <a:t>Colab</a:t>
             </a:r>
             <a:endParaRPr lang="en-US" altLang="ko-KR" dirty="0">
-              <a:latin typeface="Times New Roman" charset="0"/>
-              <a:ea typeface="Times New Roman" charset="0"/>
-              <a:cs typeface="Times New Roman" charset="0"/>
+              <a:latin typeface="Liberation Serif" charset="0"/>
+              <a:ea typeface="Liberation Serif" charset="0"/>
+              <a:cs typeface="Liberation Serif" charset="0"/>
             </a:endParaRPr>
           </a:p>
         </p:txBody>
@@ -9255,26 +9283,26 @@
               <a:lnSpc>
                 <a:spcPct val="150000"/>
               </a:lnSpc>
-              <a:buFont typeface="Arial" panose="020B0604020202020204" pitchFamily="34" charset="0"/>
+              <a:buFont typeface="Liberation Sans" panose="020B0604020202020204" pitchFamily="34" charset="0"/>
               <a:buChar char="•"/>
             </a:pPr>
             <a:r>
               <a:rPr lang="en-US" altLang="ko-KR" dirty="0" smtClean="0">
-                <a:latin typeface="Times New Roman" panose="02020603050405020304" pitchFamily="18" charset="0"/>
-                <a:cs typeface="Times New Roman" panose="02020603050405020304" pitchFamily="18" charset="0"/>
+                <a:latin typeface="Liberation Serif" panose="02020603050405020304" pitchFamily="18" charset="0"/>
+                <a:cs typeface="Liberation Serif" panose="02020603050405020304" pitchFamily="18" charset="0"/>
               </a:rPr>
               <a:t>Go to </a:t>
             </a:r>
             <a:r>
               <a:rPr lang="en-US" altLang="ko-KR" dirty="0" err="1" smtClean="0">
-                <a:latin typeface="Times New Roman" panose="02020603050405020304" pitchFamily="18" charset="0"/>
-                <a:cs typeface="Times New Roman" panose="02020603050405020304" pitchFamily="18" charset="0"/>
+                <a:latin typeface="Liberation Serif" panose="02020603050405020304" pitchFamily="18" charset="0"/>
+                <a:cs typeface="Liberation Serif" panose="02020603050405020304" pitchFamily="18" charset="0"/>
               </a:rPr>
               <a:t>Url</a:t>
             </a:r>
             <a:endParaRPr lang="en-US" altLang="ko-KR" dirty="0">
-              <a:latin typeface="Times New Roman" panose="02020603050405020304" pitchFamily="18" charset="0"/>
-              <a:cs typeface="Times New Roman" panose="02020603050405020304" pitchFamily="18" charset="0"/>
+              <a:latin typeface="Liberation Serif" panose="02020603050405020304" pitchFamily="18" charset="0"/>
+              <a:cs typeface="Liberation Serif" panose="02020603050405020304" pitchFamily="18" charset="0"/>
             </a:endParaRPr>
           </a:p>
         </p:txBody>
@@ -9304,19 +9332,19 @@
               <a:lnSpc>
                 <a:spcPct val="150000"/>
               </a:lnSpc>
-              <a:buFont typeface="Arial" panose="020B0604020202020204" pitchFamily="34" charset="0"/>
+              <a:buFont typeface="Liberation Sans" panose="020B0604020202020204" pitchFamily="34" charset="0"/>
               <a:buChar char="•"/>
             </a:pPr>
             <a:r>
               <a:rPr lang="en-US" altLang="ko-KR" dirty="0" smtClean="0">
-                <a:latin typeface="Times New Roman" panose="02020603050405020304" pitchFamily="18" charset="0"/>
-                <a:cs typeface="Times New Roman" panose="02020603050405020304" pitchFamily="18" charset="0"/>
+                <a:latin typeface="Liberation Serif" panose="02020603050405020304" pitchFamily="18" charset="0"/>
+                <a:cs typeface="Liberation Serif" panose="02020603050405020304" pitchFamily="18" charset="0"/>
               </a:rPr>
               <a:t>Type Code</a:t>
             </a:r>
             <a:endParaRPr lang="en-US" altLang="ko-KR" dirty="0">
-              <a:latin typeface="Times New Roman" panose="02020603050405020304" pitchFamily="18" charset="0"/>
-              <a:cs typeface="Times New Roman" panose="02020603050405020304" pitchFamily="18" charset="0"/>
+              <a:latin typeface="Liberation Serif" panose="02020603050405020304" pitchFamily="18" charset="0"/>
+              <a:cs typeface="Liberation Serif" panose="02020603050405020304" pitchFamily="18" charset="0"/>
             </a:endParaRPr>
           </a:p>
         </p:txBody>
@@ -9486,8 +9514,8 @@
                 <a:solidFill>
                   <a:prstClr val="black"/>
                 </a:solidFill>
-                <a:latin typeface="Times New Roman" panose="02020603050405020304" pitchFamily="18" charset="0"/>
-                <a:cs typeface="Times New Roman" panose="02020603050405020304" pitchFamily="18" charset="0"/>
+                <a:latin typeface="Liberation Serif" panose="02020603050405020304" pitchFamily="18" charset="0"/>
+                <a:cs typeface="Liberation Serif" panose="02020603050405020304" pitchFamily="18" charset="0"/>
               </a:rPr>
               <a:t>Check </a:t>
             </a:r>
@@ -9496,8 +9524,8 @@
                 <a:solidFill>
                   <a:prstClr val="black"/>
                 </a:solidFill>
-                <a:latin typeface="Times New Roman" panose="02020603050405020304" pitchFamily="18" charset="0"/>
-                <a:cs typeface="Times New Roman" panose="02020603050405020304" pitchFamily="18" charset="0"/>
+                <a:latin typeface="Liberation Serif" panose="02020603050405020304" pitchFamily="18" charset="0"/>
+                <a:cs typeface="Liberation Serif" panose="02020603050405020304" pitchFamily="18" charset="0"/>
               </a:rPr>
               <a:t>Data Available on Google Drive</a:t>
             </a:r>
@@ -9512,8 +9540,8 @@
               <a:solidFill>
                 <a:prstClr val="black"/>
               </a:solidFill>
-              <a:latin typeface="Times New Roman" panose="02020603050405020304" pitchFamily="18" charset="0"/>
-              <a:cs typeface="Times New Roman" panose="02020603050405020304" pitchFamily="18" charset="0"/>
+              <a:latin typeface="Liberation Serif" panose="02020603050405020304" pitchFamily="18" charset="0"/>
+              <a:cs typeface="Liberation Serif" panose="02020603050405020304" pitchFamily="18" charset="0"/>
             </a:endParaRPr>
           </a:p>
         </p:txBody>
@@ -9544,41 +9572,41 @@
               <a:lnSpc>
                 <a:spcPct val="150000"/>
               </a:lnSpc>
-              <a:buFont typeface="Arial" panose="020B0604020202020204" pitchFamily="34" charset="0"/>
+              <a:buFont typeface="Liberation Sans" panose="020B0604020202020204" pitchFamily="34" charset="0"/>
               <a:buChar char="•"/>
             </a:pPr>
             <a:r>
               <a:rPr lang="en-US" altLang="ko-KR" sz="2000" dirty="0" smtClean="0">
-                <a:latin typeface="Times New Roman" panose="02020603050405020304" pitchFamily="18" charset="0"/>
-                <a:cs typeface="Times New Roman" panose="02020603050405020304" pitchFamily="18" charset="0"/>
+                <a:latin typeface="Liberation Serif" panose="02020603050405020304" pitchFamily="18" charset="0"/>
+                <a:cs typeface="Liberation Serif" panose="02020603050405020304" pitchFamily="18" charset="0"/>
               </a:rPr>
               <a:t>Type: !ls </a:t>
             </a:r>
             <a:r>
               <a:rPr lang="en-US" altLang="ko-KR" sz="2000" dirty="0">
-                <a:latin typeface="Times New Roman" panose="02020603050405020304" pitchFamily="18" charset="0"/>
-                <a:cs typeface="Times New Roman" panose="02020603050405020304" pitchFamily="18" charset="0"/>
+                <a:latin typeface="Liberation Serif" panose="02020603050405020304" pitchFamily="18" charset="0"/>
+                <a:cs typeface="Liberation Serif" panose="02020603050405020304" pitchFamily="18" charset="0"/>
               </a:rPr>
               <a:t>"/content/</a:t>
             </a:r>
             <a:r>
               <a:rPr lang="en-US" altLang="ko-KR" sz="2000" dirty="0" err="1">
-                <a:latin typeface="Times New Roman" panose="02020603050405020304" pitchFamily="18" charset="0"/>
-                <a:cs typeface="Times New Roman" panose="02020603050405020304" pitchFamily="18" charset="0"/>
+                <a:latin typeface="Liberation Serif" panose="02020603050405020304" pitchFamily="18" charset="0"/>
+                <a:cs typeface="Liberation Serif" panose="02020603050405020304" pitchFamily="18" charset="0"/>
               </a:rPr>
               <a:t>gdrive</a:t>
             </a:r>
             <a:r>
               <a:rPr lang="en-US" altLang="ko-KR" sz="2000" dirty="0">
-                <a:latin typeface="Times New Roman" panose="02020603050405020304" pitchFamily="18" charset="0"/>
-                <a:cs typeface="Times New Roman" panose="02020603050405020304" pitchFamily="18" charset="0"/>
+                <a:latin typeface="Liberation Serif" panose="02020603050405020304" pitchFamily="18" charset="0"/>
+                <a:cs typeface="Liberation Serif" panose="02020603050405020304" pitchFamily="18" charset="0"/>
               </a:rPr>
               <a:t>/My Drive</a:t>
             </a:r>
             <a:r>
               <a:rPr lang="en-US" altLang="ko-KR" sz="2000" dirty="0" smtClean="0">
-                <a:latin typeface="Times New Roman" panose="02020603050405020304" pitchFamily="18" charset="0"/>
-                <a:cs typeface="Times New Roman" panose="02020603050405020304" pitchFamily="18" charset="0"/>
+                <a:latin typeface="Liberation Serif" panose="02020603050405020304" pitchFamily="18" charset="0"/>
+                <a:cs typeface="Liberation Serif" panose="02020603050405020304" pitchFamily="18" charset="0"/>
               </a:rPr>
               <a:t>/”</a:t>
             </a:r>
@@ -9588,13 +9616,13 @@
               <a:lnSpc>
                 <a:spcPct val="150000"/>
               </a:lnSpc>
-              <a:buFont typeface="Arial" panose="020B0604020202020204" pitchFamily="34" charset="0"/>
+              <a:buFont typeface="Liberation Sans" panose="020B0604020202020204" pitchFamily="34" charset="0"/>
               <a:buChar char="•"/>
             </a:pPr>
             <a:r>
               <a:rPr lang="en-US" altLang="ko-KR" sz="2000" dirty="0" smtClean="0">
-                <a:latin typeface="Times New Roman" panose="02020603050405020304" pitchFamily="18" charset="0"/>
-                <a:cs typeface="Times New Roman" panose="02020603050405020304" pitchFamily="18" charset="0"/>
+                <a:latin typeface="Liberation Serif" panose="02020603050405020304" pitchFamily="18" charset="0"/>
+                <a:cs typeface="Liberation Serif" panose="02020603050405020304" pitchFamily="18" charset="0"/>
               </a:rPr>
               <a:t>This is root directory for Google Drive</a:t>
             </a:r>
@@ -9604,12 +9632,12 @@
               <a:lnSpc>
                 <a:spcPct val="150000"/>
               </a:lnSpc>
-              <a:buFont typeface="Arial" panose="020B0604020202020204" pitchFamily="34" charset="0"/>
+              <a:buFont typeface="Liberation Sans" panose="020B0604020202020204" pitchFamily="34" charset="0"/>
               <a:buChar char="•"/>
             </a:pPr>
             <a:endParaRPr lang="en-US" altLang="ko-KR" sz="2000" dirty="0" smtClean="0">
-              <a:latin typeface="Times New Roman" panose="02020603050405020304" pitchFamily="18" charset="0"/>
-              <a:cs typeface="Times New Roman" panose="02020603050405020304" pitchFamily="18" charset="0"/>
+              <a:latin typeface="Liberation Serif" panose="02020603050405020304" pitchFamily="18" charset="0"/>
+              <a:cs typeface="Liberation Serif" panose="02020603050405020304" pitchFamily="18" charset="0"/>
             </a:endParaRPr>
           </a:p>
           <a:p>
@@ -9617,47 +9645,47 @@
               <a:lnSpc>
                 <a:spcPct val="150000"/>
               </a:lnSpc>
-              <a:buFont typeface="Arial" panose="020B0604020202020204" pitchFamily="34" charset="0"/>
+              <a:buFont typeface="Liberation Sans" panose="020B0604020202020204" pitchFamily="34" charset="0"/>
               <a:buChar char="•"/>
             </a:pPr>
             <a:r>
               <a:rPr lang="en-US" altLang="ko-KR" sz="2000" dirty="0" smtClean="0">
-                <a:latin typeface="Times New Roman" panose="02020603050405020304" pitchFamily="18" charset="0"/>
-                <a:cs typeface="Times New Roman" panose="02020603050405020304" pitchFamily="18" charset="0"/>
+                <a:latin typeface="Liberation Serif" panose="02020603050405020304" pitchFamily="18" charset="0"/>
+                <a:cs typeface="Liberation Serif" panose="02020603050405020304" pitchFamily="18" charset="0"/>
               </a:rPr>
               <a:t>For a specific folder, !</a:t>
             </a:r>
             <a:r>
               <a:rPr lang="en-US" altLang="ko-KR" sz="2000" dirty="0">
-                <a:latin typeface="Times New Roman" panose="02020603050405020304" pitchFamily="18" charset="0"/>
-                <a:cs typeface="Times New Roman" panose="02020603050405020304" pitchFamily="18" charset="0"/>
+                <a:latin typeface="Liberation Serif" panose="02020603050405020304" pitchFamily="18" charset="0"/>
+                <a:cs typeface="Liberation Serif" panose="02020603050405020304" pitchFamily="18" charset="0"/>
               </a:rPr>
               <a:t>ls "/content/</a:t>
             </a:r>
             <a:r>
               <a:rPr lang="en-US" altLang="ko-KR" sz="2000" dirty="0" err="1">
-                <a:latin typeface="Times New Roman" panose="02020603050405020304" pitchFamily="18" charset="0"/>
-                <a:cs typeface="Times New Roman" panose="02020603050405020304" pitchFamily="18" charset="0"/>
+                <a:latin typeface="Liberation Serif" panose="02020603050405020304" pitchFamily="18" charset="0"/>
+                <a:cs typeface="Liberation Serif" panose="02020603050405020304" pitchFamily="18" charset="0"/>
               </a:rPr>
               <a:t>gdrive</a:t>
             </a:r>
             <a:r>
               <a:rPr lang="en-US" altLang="ko-KR" sz="2000" dirty="0">
-                <a:latin typeface="Times New Roman" panose="02020603050405020304" pitchFamily="18" charset="0"/>
-                <a:cs typeface="Times New Roman" panose="02020603050405020304" pitchFamily="18" charset="0"/>
+                <a:latin typeface="Liberation Serif" panose="02020603050405020304" pitchFamily="18" charset="0"/>
+                <a:cs typeface="Liberation Serif" panose="02020603050405020304" pitchFamily="18" charset="0"/>
               </a:rPr>
               <a:t>/My Drive</a:t>
             </a:r>
             <a:r>
               <a:rPr lang="en-US" altLang="ko-KR" sz="2000" dirty="0" smtClean="0">
-                <a:latin typeface="Times New Roman" panose="02020603050405020304" pitchFamily="18" charset="0"/>
-                <a:cs typeface="Times New Roman" panose="02020603050405020304" pitchFamily="18" charset="0"/>
+                <a:latin typeface="Liberation Serif" panose="02020603050405020304" pitchFamily="18" charset="0"/>
+                <a:cs typeface="Liberation Serif" panose="02020603050405020304" pitchFamily="18" charset="0"/>
               </a:rPr>
               <a:t>/{Your Folder Name}”</a:t>
             </a:r>
             <a:endParaRPr lang="en-US" altLang="ko-KR" sz="2000" dirty="0">
-              <a:latin typeface="Times New Roman" panose="02020603050405020304" pitchFamily="18" charset="0"/>
-              <a:cs typeface="Times New Roman" panose="02020603050405020304" pitchFamily="18" charset="0"/>
+              <a:latin typeface="Liberation Serif" panose="02020603050405020304" pitchFamily="18" charset="0"/>
+              <a:cs typeface="Liberation Serif" panose="02020603050405020304" pitchFamily="18" charset="0"/>
             </a:endParaRPr>
           </a:p>
         </p:txBody>
@@ -9847,8 +9875,8 @@
                 <a:solidFill>
                   <a:prstClr val="black"/>
                 </a:solidFill>
-                <a:latin typeface="Times New Roman" panose="02020603050405020304" pitchFamily="18" charset="0"/>
-                <a:cs typeface="Times New Roman" panose="02020603050405020304" pitchFamily="18" charset="0"/>
+                <a:latin typeface="Liberation Serif" panose="02020603050405020304" pitchFamily="18" charset="0"/>
+                <a:cs typeface="Liberation Serif" panose="02020603050405020304" pitchFamily="18" charset="0"/>
               </a:rPr>
               <a:t>Conclusion</a:t>
             </a:r>
@@ -9856,8 +9884,8 @@
               <a:solidFill>
                 <a:prstClr val="black"/>
               </a:solidFill>
-              <a:latin typeface="Times New Roman" panose="02020603050405020304" pitchFamily="18" charset="0"/>
-              <a:cs typeface="Times New Roman" panose="02020603050405020304" pitchFamily="18" charset="0"/>
+              <a:latin typeface="Liberation Serif" panose="02020603050405020304" pitchFamily="18" charset="0"/>
+              <a:cs typeface="Liberation Serif" panose="02020603050405020304" pitchFamily="18" charset="0"/>
             </a:endParaRPr>
           </a:p>
         </p:txBody>
@@ -9988,8 +10016,8 @@
                 <a:solidFill>
                   <a:prstClr val="black"/>
                 </a:solidFill>
-                <a:latin typeface="Times New Roman" panose="02020603050405020304" pitchFamily="18" charset="0"/>
-                <a:cs typeface="Times New Roman" panose="02020603050405020304" pitchFamily="18" charset="0"/>
+                <a:latin typeface="Liberation Serif" panose="02020603050405020304" pitchFamily="18" charset="0"/>
+                <a:cs typeface="Liberation Serif" panose="02020603050405020304" pitchFamily="18" charset="0"/>
               </a:rPr>
               <a:t>Let’s Cooperate with Deep Learning</a:t>
             </a:r>
@@ -9997,8 +10025,8 @@
               <a:solidFill>
                 <a:prstClr val="black"/>
               </a:solidFill>
-              <a:latin typeface="Times New Roman" panose="02020603050405020304" pitchFamily="18" charset="0"/>
-              <a:cs typeface="Times New Roman" panose="02020603050405020304" pitchFamily="18" charset="0"/>
+              <a:latin typeface="Liberation Serif" panose="02020603050405020304" pitchFamily="18" charset="0"/>
+              <a:cs typeface="Liberation Serif" panose="02020603050405020304" pitchFamily="18" charset="0"/>
             </a:endParaRPr>
           </a:p>
         </p:txBody>
@@ -10029,19 +10057,19 @@
               <a:lnSpc>
                 <a:spcPct val="150000"/>
               </a:lnSpc>
-              <a:buFont typeface="Arial" panose="020B0604020202020204" pitchFamily="34" charset="0"/>
+              <a:buFont typeface="Liberation Sans" panose="020B0604020202020204" pitchFamily="34" charset="0"/>
               <a:buChar char="•"/>
             </a:pPr>
             <a:r>
               <a:rPr lang="en-US" altLang="ko-KR" sz="2000" dirty="0" smtClean="0">
-                <a:latin typeface="Times New Roman" panose="02020603050405020304" pitchFamily="18" charset="0"/>
-                <a:cs typeface="Times New Roman" panose="02020603050405020304" pitchFamily="18" charset="0"/>
+                <a:latin typeface="Liberation Serif" panose="02020603050405020304" pitchFamily="18" charset="0"/>
+                <a:cs typeface="Liberation Serif" panose="02020603050405020304" pitchFamily="18" charset="0"/>
               </a:rPr>
               <a:t>Analytic capability consists of human, computer, and human-computer cooperation.</a:t>
             </a:r>
             <a:endParaRPr lang="en-US" altLang="ko-KR" sz="2000" dirty="0">
-              <a:latin typeface="Times New Roman" panose="02020603050405020304" pitchFamily="18" charset="0"/>
-              <a:cs typeface="Times New Roman" panose="02020603050405020304" pitchFamily="18" charset="0"/>
+              <a:latin typeface="Liberation Serif" panose="02020603050405020304" pitchFamily="18" charset="0"/>
+              <a:cs typeface="Liberation Serif" panose="02020603050405020304" pitchFamily="18" charset="0"/>
             </a:endParaRPr>
           </a:p>
         </p:txBody>
@@ -10074,15 +10102,15 @@
             </a:pPr>
             <a:r>
               <a:rPr lang="en-US" altLang="ko-KR" sz="1600" dirty="0">
-                <a:latin typeface="Times New Roman" panose="02020603050405020304" pitchFamily="18" charset="0"/>
-                <a:cs typeface="Times New Roman" panose="02020603050405020304" pitchFamily="18" charset="0"/>
+                <a:latin typeface="Liberation Serif" panose="02020603050405020304" pitchFamily="18" charset="0"/>
+                <a:cs typeface="Liberation Serif" panose="02020603050405020304" pitchFamily="18" charset="0"/>
               </a:rPr>
               <a:t>“In a freestyle chess tournament in 2005… The surprise came at the end. Who won? Not a grandmaster with a supercomputer, but actually two American amateurs using three relatively weak </a:t>
             </a:r>
             <a:r>
               <a:rPr lang="en-US" altLang="ko-KR" sz="1600" dirty="0" smtClean="0">
-                <a:latin typeface="Times New Roman" panose="02020603050405020304" pitchFamily="18" charset="0"/>
-                <a:cs typeface="Times New Roman" panose="02020603050405020304" pitchFamily="18" charset="0"/>
+                <a:latin typeface="Liberation Serif" panose="02020603050405020304" pitchFamily="18" charset="0"/>
+                <a:cs typeface="Liberation Serif" panose="02020603050405020304" pitchFamily="18" charset="0"/>
               </a:rPr>
               <a:t>laptops … </a:t>
             </a:r>
@@ -10094,8 +10122,8 @@
               </a:lnSpc>
             </a:pPr>
             <a:endParaRPr lang="en-US" altLang="ko-KR" sz="1200" dirty="0" smtClean="0">
-              <a:latin typeface="Times New Roman" panose="02020603050405020304" pitchFamily="18" charset="0"/>
-              <a:cs typeface="Times New Roman" panose="02020603050405020304" pitchFamily="18" charset="0"/>
+              <a:latin typeface="Liberation Serif" panose="02020603050405020304" pitchFamily="18" charset="0"/>
+              <a:cs typeface="Liberation Serif" panose="02020603050405020304" pitchFamily="18" charset="0"/>
             </a:endParaRPr>
           </a:p>
           <a:p>
@@ -10106,29 +10134,29 @@
             </a:pPr>
             <a:r>
               <a:rPr lang="en-US" altLang="ko-KR" sz="1600" dirty="0" smtClean="0">
-                <a:latin typeface="Times New Roman" panose="02020603050405020304" pitchFamily="18" charset="0"/>
-                <a:cs typeface="Times New Roman" panose="02020603050405020304" pitchFamily="18" charset="0"/>
+                <a:latin typeface="Liberation Serif" panose="02020603050405020304" pitchFamily="18" charset="0"/>
+                <a:cs typeface="Liberation Serif" panose="02020603050405020304" pitchFamily="18" charset="0"/>
               </a:rPr>
               <a:t>This </a:t>
             </a:r>
             <a:r>
               <a:rPr lang="en-US" altLang="ko-KR" sz="1600" dirty="0">
-                <a:latin typeface="Times New Roman" panose="02020603050405020304" pitchFamily="18" charset="0"/>
-                <a:cs typeface="Times New Roman" panose="02020603050405020304" pitchFamily="18" charset="0"/>
+                <a:latin typeface="Liberation Serif" panose="02020603050405020304" pitchFamily="18" charset="0"/>
+                <a:cs typeface="Liberation Serif" panose="02020603050405020304" pitchFamily="18" charset="0"/>
               </a:rPr>
               <a:t>is an astonishing result: average men, average machines beating the best man, the best machine. And anyways, isn't it supposed to be man versus machine? </a:t>
             </a:r>
             <a:r>
               <a:rPr lang="en-US" altLang="ko-KR" sz="1600" b="1" dirty="0">
-                <a:latin typeface="Times New Roman" panose="02020603050405020304" pitchFamily="18" charset="0"/>
-                <a:cs typeface="Times New Roman" panose="02020603050405020304" pitchFamily="18" charset="0"/>
+                <a:latin typeface="Liberation Serif" panose="02020603050405020304" pitchFamily="18" charset="0"/>
+                <a:cs typeface="Liberation Serif" panose="02020603050405020304" pitchFamily="18" charset="0"/>
               </a:rPr>
               <a:t>Instead, it's about cooperation, and the right type of cooperation.</a:t>
             </a:r>
             <a:r>
               <a:rPr lang="en-US" altLang="ko-KR" sz="1600" dirty="0">
-                <a:latin typeface="Times New Roman" panose="02020603050405020304" pitchFamily="18" charset="0"/>
-                <a:cs typeface="Times New Roman" panose="02020603050405020304" pitchFamily="18" charset="0"/>
+                <a:latin typeface="Liberation Serif" panose="02020603050405020304" pitchFamily="18" charset="0"/>
+                <a:cs typeface="Liberation Serif" panose="02020603050405020304" pitchFamily="18" charset="0"/>
               </a:rPr>
               <a:t>”</a:t>
             </a:r>
@@ -10187,7 +10215,7 @@
                 <a:solidFill>
                   <a:srgbClr val="222222"/>
                 </a:solidFill>
-                <a:latin typeface="Arial" panose="020B0604020202020204" pitchFamily="34" charset="0"/>
+                <a:latin typeface="Liberation Sans" panose="020B0604020202020204" pitchFamily="34" charset="0"/>
                 <a:hlinkClick r:id="rId3"/>
               </a:rPr>
               <a:t>https://</a:t>
@@ -10197,7 +10225,7 @@
                 <a:solidFill>
                   <a:srgbClr val="222222"/>
                 </a:solidFill>
-                <a:latin typeface="Arial" panose="020B0604020202020204" pitchFamily="34" charset="0"/>
+                <a:latin typeface="Liberation Sans" panose="020B0604020202020204" pitchFamily="34" charset="0"/>
                 <a:hlinkClick r:id="rId3"/>
               </a:rPr>
               <a:t>www.ted.com/talks/shyam_sankar_the_rise_of_human_computer_cooperation</a:t>
@@ -10207,7 +10235,7 @@
                 <a:solidFill>
                   <a:srgbClr val="222222"/>
                 </a:solidFill>
-                <a:latin typeface="Arial" panose="020B0604020202020204" pitchFamily="34" charset="0"/>
+                <a:latin typeface="Liberation Sans" panose="020B0604020202020204" pitchFamily="34" charset="0"/>
               </a:rPr>
               <a:t> </a:t>
             </a:r>
@@ -10215,7 +10243,7 @@
               <a:solidFill>
                 <a:srgbClr val="222222"/>
               </a:solidFill>
-              <a:latin typeface="Arial" panose="020B0604020202020204" pitchFamily="34" charset="0"/>
+              <a:latin typeface="Liberation Sans" panose="020B0604020202020204" pitchFamily="34" charset="0"/>
             </a:endParaRPr>
           </a:p>
         </p:txBody>
@@ -10246,8 +10274,8 @@
                 <a:solidFill>
                   <a:srgbClr val="111111"/>
                 </a:solidFill>
-                <a:latin typeface="Times New Roman" panose="02020603050405020304" pitchFamily="18" charset="0"/>
-                <a:cs typeface="Times New Roman" panose="02020603050405020304" pitchFamily="18" charset="0"/>
+                <a:latin typeface="Liberation Serif" panose="02020603050405020304" pitchFamily="18" charset="0"/>
+                <a:cs typeface="Liberation Serif" panose="02020603050405020304" pitchFamily="18" charset="0"/>
               </a:rPr>
               <a:t>- </a:t>
             </a:r>
@@ -10256,8 +10284,8 @@
                 <a:solidFill>
                   <a:srgbClr val="111111"/>
                 </a:solidFill>
-                <a:latin typeface="Times New Roman" panose="02020603050405020304" pitchFamily="18" charset="0"/>
-                <a:cs typeface="Times New Roman" panose="02020603050405020304" pitchFamily="18" charset="0"/>
+                <a:latin typeface="Liberation Serif" panose="02020603050405020304" pitchFamily="18" charset="0"/>
+                <a:cs typeface="Liberation Serif" panose="02020603050405020304" pitchFamily="18" charset="0"/>
               </a:rPr>
               <a:t>Shyam</a:t>
             </a:r>
@@ -10266,8 +10294,8 @@
                 <a:solidFill>
                   <a:srgbClr val="111111"/>
                 </a:solidFill>
-                <a:latin typeface="Times New Roman" panose="02020603050405020304" pitchFamily="18" charset="0"/>
-                <a:cs typeface="Times New Roman" panose="02020603050405020304" pitchFamily="18" charset="0"/>
+                <a:latin typeface="Liberation Serif" panose="02020603050405020304" pitchFamily="18" charset="0"/>
+                <a:cs typeface="Liberation Serif" panose="02020603050405020304" pitchFamily="18" charset="0"/>
               </a:rPr>
               <a:t> </a:t>
             </a:r>
@@ -10276,8 +10304,8 @@
                 <a:solidFill>
                   <a:srgbClr val="111111"/>
                 </a:solidFill>
-                <a:latin typeface="Times New Roman" panose="02020603050405020304" pitchFamily="18" charset="0"/>
-                <a:cs typeface="Times New Roman" panose="02020603050405020304" pitchFamily="18" charset="0"/>
+                <a:latin typeface="Liberation Serif" panose="02020603050405020304" pitchFamily="18" charset="0"/>
+                <a:cs typeface="Liberation Serif" panose="02020603050405020304" pitchFamily="18" charset="0"/>
               </a:rPr>
               <a:t>Sankar</a:t>
             </a:r>
@@ -10286,8 +10314,8 @@
                 <a:solidFill>
                   <a:srgbClr val="111111"/>
                 </a:solidFill>
-                <a:latin typeface="Times New Roman" panose="02020603050405020304" pitchFamily="18" charset="0"/>
-                <a:cs typeface="Times New Roman" panose="02020603050405020304" pitchFamily="18" charset="0"/>
+                <a:latin typeface="Liberation Serif" panose="02020603050405020304" pitchFamily="18" charset="0"/>
+                <a:cs typeface="Liberation Serif" panose="02020603050405020304" pitchFamily="18" charset="0"/>
               </a:rPr>
               <a:t> </a:t>
             </a:r>
@@ -10296,8 +10324,8 @@
                 <a:solidFill>
                   <a:srgbClr val="111111"/>
                 </a:solidFill>
-                <a:latin typeface="Times New Roman" panose="02020603050405020304" pitchFamily="18" charset="0"/>
-                <a:cs typeface="Times New Roman" panose="02020603050405020304" pitchFamily="18" charset="0"/>
+                <a:latin typeface="Liberation Serif" panose="02020603050405020304" pitchFamily="18" charset="0"/>
+                <a:cs typeface="Liberation Serif" panose="02020603050405020304" pitchFamily="18" charset="0"/>
               </a:rPr>
               <a:t>at </a:t>
             </a:r>
@@ -10306,8 +10334,8 @@
                 <a:solidFill>
                   <a:srgbClr val="111111"/>
                 </a:solidFill>
-                <a:latin typeface="Times New Roman" panose="02020603050405020304" pitchFamily="18" charset="0"/>
-                <a:cs typeface="Times New Roman" panose="02020603050405020304" pitchFamily="18" charset="0"/>
+                <a:latin typeface="Liberation Serif" panose="02020603050405020304" pitchFamily="18" charset="0"/>
+                <a:cs typeface="Liberation Serif" panose="02020603050405020304" pitchFamily="18" charset="0"/>
               </a:rPr>
               <a:t>TEDGlobal</a:t>
             </a:r>
@@ -10316,8 +10344,8 @@
                 <a:solidFill>
                   <a:srgbClr val="111111"/>
                 </a:solidFill>
-                <a:latin typeface="Times New Roman" panose="02020603050405020304" pitchFamily="18" charset="0"/>
-                <a:cs typeface="Times New Roman" panose="02020603050405020304" pitchFamily="18" charset="0"/>
+                <a:latin typeface="Liberation Serif" panose="02020603050405020304" pitchFamily="18" charset="0"/>
+                <a:cs typeface="Liberation Serif" panose="02020603050405020304" pitchFamily="18" charset="0"/>
               </a:rPr>
               <a:t> </a:t>
             </a:r>
@@ -10326,8 +10354,8 @@
                 <a:solidFill>
                   <a:srgbClr val="111111"/>
                 </a:solidFill>
-                <a:latin typeface="Times New Roman" panose="02020603050405020304" pitchFamily="18" charset="0"/>
-                <a:cs typeface="Times New Roman" panose="02020603050405020304" pitchFamily="18" charset="0"/>
+                <a:latin typeface="Liberation Serif" panose="02020603050405020304" pitchFamily="18" charset="0"/>
+                <a:cs typeface="Liberation Serif" panose="02020603050405020304" pitchFamily="18" charset="0"/>
               </a:rPr>
               <a:t>2012</a:t>
             </a:r>
@@ -10336,8 +10364,8 @@
                 <a:srgbClr val="111111"/>
               </a:solidFill>
               <a:effectLst/>
-              <a:latin typeface="Times New Roman" panose="02020603050405020304" pitchFamily="18" charset="0"/>
-              <a:cs typeface="Times New Roman" panose="02020603050405020304" pitchFamily="18" charset="0"/>
+              <a:latin typeface="Liberation Serif" panose="02020603050405020304" pitchFamily="18" charset="0"/>
+              <a:cs typeface="Liberation Serif" panose="02020603050405020304" pitchFamily="18" charset="0"/>
             </a:endParaRPr>
           </a:p>
         </p:txBody>
@@ -10402,20 +10430,20 @@
                 <a:solidFill>
                   <a:schemeClr val="bg1"/>
                 </a:solidFill>
-                <a:latin typeface="나눔명조" pitchFamily="18" charset="-127"/>
-                <a:ea typeface="나눔명조" pitchFamily="18" charset="-127"/>
-              </a:rPr>
-              <a:t>감사합니다</a:t>
+                <a:latin typeface="Liberation Sans" pitchFamily="18" charset="-127"/>
+                <a:ea typeface="Liberation Sans" pitchFamily="18" charset="-127"/>
+              </a:rPr>
+              <a:t>Thank you.</a:t>
             </a:r>
             <a:r>
               <a:rPr lang="en-US" altLang="ko-KR" sz="4000" spc="-150" dirty="0" smtClean="0">
                 <a:solidFill>
                   <a:schemeClr val="bg1"/>
                 </a:solidFill>
-                <a:latin typeface="나눔명조" pitchFamily="18" charset="-127"/>
-                <a:ea typeface="나눔명조" pitchFamily="18" charset="-127"/>
-              </a:rPr>
-              <a:t>.</a:t>
+                <a:latin typeface="Liberation Sans" pitchFamily="18" charset="-127"/>
+                <a:ea typeface="Liberation Sans" pitchFamily="18" charset="-127"/>
+              </a:rPr>
+              <a:t/>
             </a:r>
           </a:p>
         </p:txBody>
@@ -10502,9 +10530,9 @@
               <a:solidFill>
                 <a:schemeClr val="bg1"/>
               </a:solidFill>
-              <a:latin typeface="Times New Roman" panose="02020603050405020304" pitchFamily="18" charset="0"/>
+              <a:latin typeface="Liberation Serif" panose="02020603050405020304" pitchFamily="18" charset="0"/>
               <a:ea typeface="나눔고딕" panose="020D0604000000000000" pitchFamily="50" charset="-127"/>
-              <a:cs typeface="Times New Roman" panose="02020603050405020304" pitchFamily="18" charset="0"/>
+              <a:cs typeface="Liberation Serif" panose="02020603050405020304" pitchFamily="18" charset="0"/>
             </a:endParaRPr>
           </a:p>
           <a:p>
@@ -10513,9 +10541,9 @@
               <a:solidFill>
                 <a:schemeClr val="bg1"/>
               </a:solidFill>
-              <a:latin typeface="Times New Roman" panose="02020603050405020304" pitchFamily="18" charset="0"/>
+              <a:latin typeface="Liberation Serif" panose="02020603050405020304" pitchFamily="18" charset="0"/>
               <a:ea typeface="나눔고딕" panose="020D0604000000000000" pitchFamily="50" charset="-127"/>
-              <a:cs typeface="Times New Roman" panose="02020603050405020304" pitchFamily="18" charset="0"/>
+              <a:cs typeface="Liberation Serif" panose="02020603050405020304" pitchFamily="18" charset="0"/>
             </a:endParaRPr>
           </a:p>
           <a:p>
@@ -10525,9 +10553,9 @@
                 <a:solidFill>
                   <a:schemeClr val="bg1"/>
                 </a:solidFill>
-                <a:latin typeface="Times New Roman" panose="02020603050405020304" pitchFamily="18" charset="0"/>
+                <a:latin typeface="Liberation Serif" panose="02020603050405020304" pitchFamily="18" charset="0"/>
                 <a:ea typeface="나눔고딕" panose="020D0604000000000000" pitchFamily="50" charset="-127"/>
-                <a:cs typeface="Times New Roman" panose="02020603050405020304" pitchFamily="18" charset="0"/>
+                <a:cs typeface="Liberation Serif" panose="02020603050405020304" pitchFamily="18" charset="0"/>
               </a:rPr>
               <a:t>Thank you </a:t>
             </a:r>
@@ -10536,9 +10564,9 @@
                 <a:solidFill>
                   <a:schemeClr val="bg1"/>
                 </a:solidFill>
-                <a:latin typeface="Times New Roman" panose="02020603050405020304" pitchFamily="18" charset="0"/>
+                <a:latin typeface="Liberation Serif" panose="02020603050405020304" pitchFamily="18" charset="0"/>
                 <a:ea typeface="나눔고딕" panose="020D0604000000000000" pitchFamily="50" charset="-127"/>
-                <a:cs typeface="Times New Roman" panose="02020603050405020304" pitchFamily="18" charset="0"/>
+                <a:cs typeface="Liberation Serif" panose="02020603050405020304" pitchFamily="18" charset="0"/>
                 <a:sym typeface="Wingdings"/>
               </a:rPr>
               <a:t></a:t>
@@ -10547,9 +10575,9 @@
               <a:solidFill>
                 <a:schemeClr val="bg1"/>
               </a:solidFill>
-              <a:latin typeface="Times New Roman" panose="02020603050405020304" pitchFamily="18" charset="0"/>
+              <a:latin typeface="Liberation Serif" panose="02020603050405020304" pitchFamily="18" charset="0"/>
               <a:ea typeface="나눔고딕" panose="020D0604000000000000" pitchFamily="50" charset="-127"/>
-              <a:cs typeface="Times New Roman" panose="02020603050405020304" pitchFamily="18" charset="0"/>
+              <a:cs typeface="Liberation Serif" panose="02020603050405020304" pitchFamily="18" charset="0"/>
             </a:endParaRPr>
           </a:p>
           <a:p>
@@ -10558,9 +10586,9 @@
               <a:solidFill>
                 <a:schemeClr val="bg1"/>
               </a:solidFill>
-              <a:latin typeface="Times New Roman" panose="02020603050405020304" pitchFamily="18" charset="0"/>
+              <a:latin typeface="Liberation Serif" panose="02020603050405020304" pitchFamily="18" charset="0"/>
               <a:ea typeface="나눔고딕" panose="020D0604000000000000" pitchFamily="50" charset="-127"/>
-              <a:cs typeface="Times New Roman" panose="02020603050405020304" pitchFamily="18" charset="0"/>
+              <a:cs typeface="Liberation Serif" panose="02020603050405020304" pitchFamily="18" charset="0"/>
             </a:endParaRPr>
           </a:p>
           <a:p>
@@ -10570,9 +10598,9 @@
                 <a:solidFill>
                   <a:schemeClr val="bg1"/>
                 </a:solidFill>
-                <a:latin typeface="Times New Roman" panose="02020603050405020304" pitchFamily="18" charset="0"/>
+                <a:latin typeface="Liberation Serif" panose="02020603050405020304" pitchFamily="18" charset="0"/>
                 <a:ea typeface="나눔고딕" panose="020D0604000000000000" pitchFamily="50" charset="-127"/>
-                <a:cs typeface="Times New Roman" panose="02020603050405020304" pitchFamily="18" charset="0"/>
+                <a:cs typeface="Liberation Serif" panose="02020603050405020304" pitchFamily="18" charset="0"/>
               </a:rPr>
               <a:t>Contact Info: </a:t>
             </a:r>
@@ -10581,9 +10609,9 @@
                 <a:solidFill>
                   <a:schemeClr val="bg1"/>
                 </a:solidFill>
-                <a:latin typeface="Times New Roman" panose="02020603050405020304" pitchFamily="18" charset="0"/>
+                <a:latin typeface="Liberation Serif" panose="02020603050405020304" pitchFamily="18" charset="0"/>
                 <a:ea typeface="나눔고딕" panose="020D0604000000000000" pitchFamily="50" charset="-127"/>
-                <a:cs typeface="Times New Roman" panose="02020603050405020304" pitchFamily="18" charset="0"/>
+                <a:cs typeface="Liberation Serif" panose="02020603050405020304" pitchFamily="18" charset="0"/>
               </a:rPr>
               <a:t>quantic.jh@gmail.com</a:t>
             </a:r>
@@ -10591,9 +10619,9 @@
               <a:solidFill>
                 <a:schemeClr val="bg1"/>
               </a:solidFill>
-              <a:latin typeface="Times New Roman" panose="02020603050405020304" pitchFamily="18" charset="0"/>
+              <a:latin typeface="Liberation Serif" panose="02020603050405020304" pitchFamily="18" charset="0"/>
               <a:ea typeface="나눔고딕" panose="020D0604000000000000" pitchFamily="50" charset="-127"/>
-              <a:cs typeface="Times New Roman" panose="02020603050405020304" pitchFamily="18" charset="0"/>
+              <a:cs typeface="Liberation Serif" panose="02020603050405020304" pitchFamily="18" charset="0"/>
             </a:endParaRPr>
           </a:p>
         </p:txBody>
@@ -10790,8 +10818,8 @@
                 <a:solidFill>
                   <a:prstClr val="black"/>
                 </a:solidFill>
-                <a:latin typeface="Times New Roman" panose="02020603050405020304" pitchFamily="18" charset="0"/>
-                <a:cs typeface="Times New Roman" panose="02020603050405020304" pitchFamily="18" charset="0"/>
+                <a:latin typeface="Liberation Serif" panose="02020603050405020304" pitchFamily="18" charset="0"/>
+                <a:cs typeface="Liberation Serif" panose="02020603050405020304" pitchFamily="18" charset="0"/>
               </a:rPr>
               <a:t>Learn Python in 5 Minutes</a:t>
             </a:r>
@@ -10799,8 +10827,8 @@
               <a:solidFill>
                 <a:prstClr val="black"/>
               </a:solidFill>
-              <a:latin typeface="Times New Roman" panose="02020603050405020304" pitchFamily="18" charset="0"/>
-              <a:cs typeface="Times New Roman" panose="02020603050405020304" pitchFamily="18" charset="0"/>
+              <a:latin typeface="Liberation Serif" panose="02020603050405020304" pitchFamily="18" charset="0"/>
+              <a:cs typeface="Liberation Serif" panose="02020603050405020304" pitchFamily="18" charset="0"/>
             </a:endParaRPr>
           </a:p>
         </p:txBody>
@@ -10828,17 +10856,17 @@
           <a:p>
             <a:r>
               <a:rPr lang="en-US" altLang="ko-KR" dirty="0">
-                <a:latin typeface="Arial" charset="0"/>
-                <a:ea typeface="Arial" charset="0"/>
-                <a:cs typeface="Arial" charset="0"/>
+                <a:latin typeface="Liberation Sans" charset="0"/>
+                <a:ea typeface="Liberation Sans" charset="0"/>
+                <a:cs typeface="Liberation Sans" charset="0"/>
                 <a:hlinkClick r:id="rId3"/>
               </a:rPr>
               <a:t>https://www.stavros.io/tutorials/python/</a:t>
             </a:r>
             <a:endParaRPr lang="ko-KR" altLang="en-US" dirty="0">
-              <a:latin typeface="Arial" charset="0"/>
-              <a:ea typeface="Arial" charset="0"/>
-              <a:cs typeface="Arial" charset="0"/>
+              <a:latin typeface="Liberation Sans" charset="0"/>
+              <a:ea typeface="Liberation Sans" charset="0"/>
+              <a:cs typeface="Liberation Sans" charset="0"/>
             </a:endParaRPr>
           </a:p>
         </p:txBody>
@@ -10897,7 +10925,7 @@
           <a:p>
             <a:r>
               <a:rPr lang="ko-KR" altLang="en-US" dirty="0" smtClean="0"/>
-              <a:t>참고자료</a:t>
+              <a:t>References</a:t>
             </a:r>
             <a:endParaRPr lang="en-US" dirty="0"/>
           </a:p>
@@ -10922,9 +10950,9 @@
           <a:p>
             <a:r>
               <a:rPr lang="en-US" altLang="ko-KR" sz="2000" dirty="0" smtClean="0">
-                <a:latin typeface="Times New Roman" charset="0"/>
-                <a:ea typeface="Times New Roman" charset="0"/>
-                <a:cs typeface="Times New Roman" charset="0"/>
+                <a:latin typeface="Liberation Serif" charset="0"/>
+                <a:ea typeface="Liberation Serif" charset="0"/>
+                <a:cs typeface="Liberation Serif" charset="0"/>
               </a:rPr>
               <a:t>Python</a:t>
             </a:r>
@@ -10933,92 +10961,92 @@
             <a:pPr lvl="1"/>
             <a:r>
               <a:rPr lang="ko-KR" altLang="en-US" sz="1600" dirty="0">
-                <a:latin typeface="Times New Roman" charset="0"/>
-                <a:ea typeface="Times New Roman" charset="0"/>
-                <a:cs typeface="Times New Roman" charset="0"/>
-              </a:rPr>
-              <a:t>박은정</a:t>
+                <a:latin typeface="Liberation Serif" charset="0"/>
+                <a:ea typeface="Liberation Serif" charset="0"/>
+                <a:cs typeface="Liberation Serif" charset="0"/>
+              </a:rPr>
+              <a:t>Eunjung Park, Introduction to Python (on Windows)</a:t>
             </a:r>
             <a:r>
               <a:rPr lang="en-US" altLang="ko-KR" sz="1600" dirty="0">
-                <a:latin typeface="Times New Roman" charset="0"/>
-                <a:ea typeface="Times New Roman" charset="0"/>
-                <a:cs typeface="Times New Roman" charset="0"/>
-              </a:rPr>
-              <a:t>, </a:t>
+                <a:latin typeface="Liberation Serif" charset="0"/>
+                <a:ea typeface="Liberation Serif" charset="0"/>
+                <a:cs typeface="Liberation Serif" charset="0"/>
+              </a:rPr>
+              <a:t/>
             </a:r>
             <a:r>
               <a:rPr lang="en-US" altLang="ko-KR" sz="1600" dirty="0">
-                <a:latin typeface="Times New Roman" charset="0"/>
-                <a:ea typeface="Times New Roman" charset="0"/>
-                <a:cs typeface="Times New Roman" charset="0"/>
+                <a:latin typeface="Liberation Serif" charset="0"/>
+                <a:ea typeface="Liberation Serif" charset="0"/>
+                <a:cs typeface="Liberation Serif" charset="0"/>
                 <a:hlinkClick r:id="rId2"/>
               </a:rPr>
-              <a:t>Introduction to Python (on Windows</a:t>
+              <a:t/>
             </a:r>
             <a:r>
               <a:rPr lang="en-US" altLang="ko-KR" sz="1600" dirty="0" smtClean="0">
-                <a:latin typeface="Times New Roman" charset="0"/>
-                <a:ea typeface="Times New Roman" charset="0"/>
-                <a:cs typeface="Times New Roman" charset="0"/>
+                <a:latin typeface="Liberation Serif" charset="0"/>
+                <a:ea typeface="Liberation Serif" charset="0"/>
+                <a:cs typeface="Liberation Serif" charset="0"/>
                 <a:hlinkClick r:id="rId2"/>
               </a:rPr>
-              <a:t>)</a:t>
+              <a:t/>
             </a:r>
             <a:endParaRPr lang="en-US" altLang="ko-KR" sz="1600" dirty="0" smtClean="0">
-              <a:latin typeface="Times New Roman" charset="0"/>
-              <a:ea typeface="Times New Roman" charset="0"/>
-              <a:cs typeface="Times New Roman" charset="0"/>
+              <a:latin typeface="Liberation Serif" charset="0"/>
+              <a:ea typeface="Liberation Serif" charset="0"/>
+              <a:cs typeface="Liberation Serif" charset="0"/>
             </a:endParaRPr>
           </a:p>
           <a:p>
             <a:pPr lvl="1"/>
             <a:r>
               <a:rPr lang="ko-KR" altLang="en-US" sz="1600" dirty="0" smtClean="0">
-                <a:latin typeface="Times New Roman" charset="0"/>
-                <a:ea typeface="Times New Roman" charset="0"/>
-                <a:cs typeface="Times New Roman" charset="0"/>
-              </a:rPr>
-              <a:t>김태훈</a:t>
+                <a:latin typeface="Liberation Serif" charset="0"/>
+                <a:ea typeface="Liberation Serif" charset="0"/>
+                <a:cs typeface="Liberation Serif" charset="0"/>
+              </a:rPr>
+              <a:t>Taehoon Kim, Python in 140 Minutes</a:t>
             </a:r>
             <a:r>
               <a:rPr lang="en-US" altLang="ko-KR" sz="1600" dirty="0" smtClean="0">
-                <a:latin typeface="Times New Roman" charset="0"/>
-                <a:ea typeface="Times New Roman" charset="0"/>
-                <a:cs typeface="Times New Roman" charset="0"/>
-              </a:rPr>
-              <a:t>,</a:t>
+                <a:latin typeface="Liberation Serif" charset="0"/>
+                <a:ea typeface="Liberation Serif" charset="0"/>
+                <a:cs typeface="Liberation Serif" charset="0"/>
+              </a:rPr>
+              <a:t/>
             </a:r>
             <a:r>
               <a:rPr lang="ko-KR" altLang="en-US" sz="1600" dirty="0" smtClean="0">
-                <a:latin typeface="Times New Roman" charset="0"/>
-                <a:ea typeface="Times New Roman" charset="0"/>
-                <a:cs typeface="Times New Roman" charset="0"/>
-              </a:rPr>
-              <a:t> </a:t>
+                <a:latin typeface="Liberation Serif" charset="0"/>
+                <a:ea typeface="Liberation Serif" charset="0"/>
+                <a:cs typeface="Liberation Serif" charset="0"/>
+              </a:rPr>
+              <a:t/>
             </a:r>
             <a:r>
               <a:rPr lang="en-US" altLang="ko-KR" sz="1600" dirty="0" smtClean="0">
-                <a:latin typeface="Times New Roman" charset="0"/>
-                <a:ea typeface="Times New Roman" charset="0"/>
-                <a:cs typeface="Times New Roman" charset="0"/>
+                <a:latin typeface="Liberation Serif" charset="0"/>
+                <a:ea typeface="Liberation Serif" charset="0"/>
+                <a:cs typeface="Liberation Serif" charset="0"/>
                 <a:hlinkClick r:id="rId3"/>
               </a:rPr>
-              <a:t>140</a:t>
+              <a:t/>
             </a:r>
             <a:r>
               <a:rPr lang="ko-KR" altLang="en-US" sz="1600" dirty="0" smtClean="0">
-                <a:latin typeface="Times New Roman" charset="0"/>
-                <a:ea typeface="Times New Roman" charset="0"/>
-                <a:cs typeface="Times New Roman" charset="0"/>
+                <a:latin typeface="Liberation Serif" charset="0"/>
+                <a:ea typeface="Liberation Serif" charset="0"/>
+                <a:cs typeface="Liberation Serif" charset="0"/>
                 <a:hlinkClick r:id="rId3"/>
               </a:rPr>
-              <a:t>분의 파이썬</a:t>
+              <a:t/>
             </a:r>
             <a:endParaRPr lang="en-US" altLang="ko-KR" sz="1600" dirty="0">
-              <a:latin typeface="Times New Roman" charset="0"/>
-              <a:ea typeface="Times New Roman" charset="0"/>
-              <a:cs typeface="Times New Roman" charset="0"/>
+              <a:latin typeface="Liberation Serif" charset="0"/>
+              <a:ea typeface="Liberation Serif" charset="0"/>
+              <a:cs typeface="Liberation Serif" charset="0"/>
             </a:endParaRPr>
           </a:p>
         </p:txBody>
@@ -11172,17 +11200,17 @@
                 <a:solidFill>
                   <a:prstClr val="black"/>
                 </a:solidFill>
-                <a:latin typeface="Times New Roman" panose="02020603050405020304" pitchFamily="18" charset="0"/>
-                <a:cs typeface="Times New Roman" panose="02020603050405020304" pitchFamily="18" charset="0"/>
-              </a:rPr>
-              <a:t>파이썬의 특징</a:t>
+                <a:latin typeface="Liberation Serif" panose="02020603050405020304" pitchFamily="18" charset="0"/>
+                <a:cs typeface="Liberation Serif" panose="02020603050405020304" pitchFamily="18" charset="0"/>
+              </a:rPr>
+              <a:t>Features of Python</a:t>
             </a:r>
             <a:endParaRPr lang="en-US" altLang="ko-KR" sz="3000" b="1" dirty="0">
               <a:solidFill>
                 <a:prstClr val="black"/>
               </a:solidFill>
-              <a:latin typeface="Times New Roman" panose="02020603050405020304" pitchFamily="18" charset="0"/>
-              <a:cs typeface="Times New Roman" panose="02020603050405020304" pitchFamily="18" charset="0"/>
+              <a:latin typeface="Liberation Serif" panose="02020603050405020304" pitchFamily="18" charset="0"/>
+              <a:cs typeface="Liberation Serif" panose="02020603050405020304" pitchFamily="18" charset="0"/>
             </a:endParaRPr>
           </a:p>
         </p:txBody>
@@ -11211,44 +11239,44 @@
           <a:p>
             <a:r>
               <a:rPr kumimoji="1" lang="ko-KR" altLang="en-US" sz="2000" dirty="0" smtClean="0"/>
-              <a:t>코드가 읽기 쉽다</a:t>
+              <a:t>Code is easy to read</a:t>
             </a:r>
             <a:endParaRPr kumimoji="1" lang="en-US" altLang="ko-KR" sz="2000" dirty="0" smtClean="0"/>
           </a:p>
           <a:p>
             <a:r>
               <a:rPr kumimoji="1" lang="ko-KR" altLang="en-US" sz="2000" dirty="0" smtClean="0"/>
-              <a:t>문법이 </a:t>
+              <a:t>Syntax is concise</a:t>
             </a:r>
             <a:r>
               <a:rPr kumimoji="1" lang="ko-KR" altLang="en-US" sz="2000" b="1" dirty="0" smtClean="0"/>
-              <a:t>간결</a:t>
+              <a:t/>
             </a:r>
             <a:r>
               <a:rPr kumimoji="1" lang="ko-KR" altLang="en-US" sz="2000" dirty="0" smtClean="0"/>
-              <a:t>하다</a:t>
+              <a:t/>
             </a:r>
             <a:endParaRPr kumimoji="1" lang="en-US" altLang="ko-KR" sz="2000" dirty="0" smtClean="0"/>
           </a:p>
           <a:p>
             <a:r>
               <a:rPr kumimoji="1" lang="ko-KR" altLang="en-US" sz="2000" dirty="0" smtClean="0"/>
-              <a:t>개발속도가 </a:t>
+              <a:t>Development speed is fast</a:t>
             </a:r>
             <a:r>
               <a:rPr kumimoji="1" lang="ko-KR" altLang="en-US" sz="2000" b="1" dirty="0" smtClean="0"/>
-              <a:t>빠르다</a:t>
+              <a:t/>
             </a:r>
             <a:endParaRPr kumimoji="1" lang="en-US" altLang="ko-KR" sz="2000" b="1" dirty="0" smtClean="0"/>
           </a:p>
           <a:p>
             <a:r>
               <a:rPr kumimoji="1" lang="ko-KR" altLang="en-US" sz="2000" dirty="0" smtClean="0"/>
-              <a:t>프로그래밍이 </a:t>
+              <a:t>Programming is fun</a:t>
             </a:r>
             <a:r>
               <a:rPr kumimoji="1" lang="ko-KR" altLang="en-US" sz="2000" b="1" dirty="0" smtClean="0"/>
-              <a:t>재밌다</a:t>
+              <a:t/>
             </a:r>
             <a:endParaRPr kumimoji="1" lang="ko-KR" altLang="en-US" sz="2000" b="1" dirty="0"/>
           </a:p>
@@ -11349,7 +11377,7 @@
           <a:p>
             <a:r>
               <a:rPr lang="ko-KR" altLang="en-US" dirty="0" smtClean="0"/>
-              <a:t>패키지 설치</a:t>
+              <a:t>Package Installation</a:t>
             </a:r>
             <a:endParaRPr lang="en-US" dirty="0"/>
           </a:p>
@@ -11439,21 +11467,21 @@
           <a:p>
             <a:r>
               <a:rPr lang="en-US" sz="2400" b="1" dirty="0">
-                <a:latin typeface="Consolas" panose="020B0609020204030204" pitchFamily="49" charset="0"/>
-                <a:cs typeface="Consolas" panose="020B0609020204030204" pitchFamily="49" charset="0"/>
+                <a:latin typeface="Liberation Mono" panose="020B0609020204030204" pitchFamily="49" charset="0"/>
+                <a:cs typeface="Liberation Mono" panose="020B0609020204030204" pitchFamily="49" charset="0"/>
               </a:rPr>
               <a:t>pip install </a:t>
             </a:r>
             <a:r>
               <a:rPr lang="en-US" sz="2400" dirty="0" err="1">
-                <a:latin typeface="Consolas" panose="020B0609020204030204" pitchFamily="49" charset="0"/>
-                <a:cs typeface="Consolas" panose="020B0609020204030204" pitchFamily="49" charset="0"/>
+                <a:latin typeface="Liberation Mono" panose="020B0609020204030204" pitchFamily="49" charset="0"/>
+                <a:cs typeface="Liberation Mono" panose="020B0609020204030204" pitchFamily="49" charset="0"/>
               </a:rPr>
               <a:t>package_name</a:t>
             </a:r>
             <a:endParaRPr lang="en-US" sz="2400" dirty="0">
-              <a:latin typeface="Consolas" panose="020B0609020204030204" pitchFamily="49" charset="0"/>
-              <a:cs typeface="Consolas" panose="020B0609020204030204" pitchFamily="49" charset="0"/>
+              <a:latin typeface="Liberation Mono" panose="020B0609020204030204" pitchFamily="49" charset="0"/>
+              <a:cs typeface="Liberation Mono" panose="020B0609020204030204" pitchFamily="49" charset="0"/>
             </a:endParaRPr>
           </a:p>
         </p:txBody>
@@ -11482,19 +11510,19 @@
           <a:p>
             <a:r>
               <a:rPr lang="en-US" sz="1200" dirty="0" smtClean="0"/>
-              <a:t>* </a:t>
+              <a:t>* Run outside the Python shell</a:t>
             </a:r>
             <a:r>
               <a:rPr lang="ko-KR" altLang="en-US" sz="1200" dirty="0" smtClean="0"/>
-              <a:t>단</a:t>
+              <a:t/>
             </a:r>
             <a:r>
               <a:rPr lang="en-US" altLang="ko-KR" sz="1200" dirty="0" smtClean="0"/>
-              <a:t>, </a:t>
+              <a:t/>
             </a:r>
             <a:r>
               <a:rPr lang="ko-KR" altLang="en-US" sz="1200" dirty="0" smtClean="0"/>
-              <a:t>파이썬 쉘 밖에서 실행</a:t>
+              <a:t/>
             </a:r>
             <a:endParaRPr lang="en-US" sz="1200" dirty="0"/>
           </a:p>
@@ -11554,7 +11582,7 @@
           <a:p>
             <a:r>
               <a:rPr lang="ko-KR" altLang="en-US" dirty="0" smtClean="0"/>
-              <a:t>패키지 사용</a:t>
+              <a:t>Using Packages</a:t>
             </a:r>
             <a:endParaRPr lang="en-US" dirty="0"/>
           </a:p>
@@ -11644,28 +11672,28 @@
           <a:p>
             <a:r>
               <a:rPr lang="en-US" altLang="ko-KR" sz="2400" b="1" dirty="0" smtClean="0">
-                <a:latin typeface="Consolas" panose="020B0609020204030204" pitchFamily="49" charset="0"/>
-                <a:cs typeface="Consolas" panose="020B0609020204030204" pitchFamily="49" charset="0"/>
+                <a:latin typeface="Liberation Mono" panose="020B0609020204030204" pitchFamily="49" charset="0"/>
+                <a:cs typeface="Liberation Mono" panose="020B0609020204030204" pitchFamily="49" charset="0"/>
               </a:rPr>
               <a:t>import</a:t>
             </a:r>
             <a:r>
               <a:rPr lang="en-US" altLang="ko-KR" sz="2400" dirty="0" smtClean="0">
-                <a:latin typeface="Consolas" panose="020B0609020204030204" pitchFamily="49" charset="0"/>
-                <a:cs typeface="Consolas" panose="020B0609020204030204" pitchFamily="49" charset="0"/>
+                <a:latin typeface="Liberation Mono" panose="020B0609020204030204" pitchFamily="49" charset="0"/>
+                <a:cs typeface="Liberation Mono" panose="020B0609020204030204" pitchFamily="49" charset="0"/>
               </a:rPr>
               <a:t> </a:t>
             </a:r>
             <a:r>
               <a:rPr lang="en-US" altLang="ko-KR" sz="2400" dirty="0" err="1" smtClean="0">
-                <a:latin typeface="Consolas" panose="020B0609020204030204" pitchFamily="49" charset="0"/>
-                <a:cs typeface="Consolas" panose="020B0609020204030204" pitchFamily="49" charset="0"/>
+                <a:latin typeface="Liberation Mono" panose="020B0609020204030204" pitchFamily="49" charset="0"/>
+                <a:cs typeface="Liberation Mono" panose="020B0609020204030204" pitchFamily="49" charset="0"/>
               </a:rPr>
               <a:t>package_name</a:t>
             </a:r>
             <a:endParaRPr lang="en-US" sz="2400" dirty="0">
-              <a:latin typeface="Consolas" panose="020B0609020204030204" pitchFamily="49" charset="0"/>
-              <a:cs typeface="Consolas" panose="020B0609020204030204" pitchFamily="49" charset="0"/>
+              <a:latin typeface="Liberation Mono" panose="020B0609020204030204" pitchFamily="49" charset="0"/>
+              <a:cs typeface="Liberation Mono" panose="020B0609020204030204" pitchFamily="49" charset="0"/>
             </a:endParaRPr>
           </a:p>
         </p:txBody>
@@ -11724,7 +11752,7 @@
           <a:p>
             <a:r>
               <a:rPr lang="ko-KR" altLang="en-US" dirty="0" smtClean="0"/>
-              <a:t>열</a:t>
+              <a:t>List</a:t>
             </a:r>
             <a:endParaRPr lang="en-US" dirty="0"/>
           </a:p>
@@ -11811,15 +11839,15 @@
           <a:p>
             <a:r>
               <a:rPr lang="en-US" sz="2400" dirty="0" err="1" smtClean="0">
-                <a:latin typeface="Consolas" panose="020B0609020204030204" pitchFamily="49" charset="0"/>
-                <a:cs typeface="Consolas" panose="020B0609020204030204" pitchFamily="49" charset="0"/>
+                <a:latin typeface="Liberation Mono" panose="020B0609020204030204" pitchFamily="49" charset="0"/>
+                <a:cs typeface="Liberation Mono" panose="020B0609020204030204" pitchFamily="49" charset="0"/>
               </a:rPr>
               <a:t>abc</a:t>
             </a:r>
             <a:r>
               <a:rPr lang="en-US" sz="2400" dirty="0" smtClean="0">
-                <a:latin typeface="Consolas" panose="020B0609020204030204" pitchFamily="49" charset="0"/>
-                <a:cs typeface="Consolas" panose="020B0609020204030204" pitchFamily="49" charset="0"/>
+                <a:latin typeface="Liberation Mono" panose="020B0609020204030204" pitchFamily="49" charset="0"/>
+                <a:cs typeface="Liberation Mono" panose="020B0609020204030204" pitchFamily="49" charset="0"/>
               </a:rPr>
               <a:t> = [‘a’, ‘b’, ‘c’]</a:t>
             </a:r>
@@ -11827,44 +11855,44 @@
           <a:p>
             <a:r>
               <a:rPr lang="en-US" sz="2400" dirty="0" err="1" smtClean="0">
-                <a:latin typeface="Consolas" panose="020B0609020204030204" pitchFamily="49" charset="0"/>
-                <a:cs typeface="Consolas" panose="020B0609020204030204" pitchFamily="49" charset="0"/>
+                <a:latin typeface="Liberation Mono" panose="020B0609020204030204" pitchFamily="49" charset="0"/>
+                <a:cs typeface="Liberation Mono" panose="020B0609020204030204" pitchFamily="49" charset="0"/>
               </a:rPr>
               <a:t>abc.append</a:t>
             </a:r>
             <a:r>
               <a:rPr lang="en-US" sz="2400" dirty="0" smtClean="0">
-                <a:latin typeface="Consolas" panose="020B0609020204030204" pitchFamily="49" charset="0"/>
-                <a:cs typeface="Consolas" panose="020B0609020204030204" pitchFamily="49" charset="0"/>
+                <a:latin typeface="Liberation Mono" panose="020B0609020204030204" pitchFamily="49" charset="0"/>
+                <a:cs typeface="Liberation Mono" panose="020B0609020204030204" pitchFamily="49" charset="0"/>
               </a:rPr>
               <a:t>(‘d’)</a:t>
             </a:r>
           </a:p>
           <a:p>
             <a:endParaRPr lang="en-US" sz="2400" dirty="0">
-              <a:latin typeface="Consolas" panose="020B0609020204030204" pitchFamily="49" charset="0"/>
-              <a:cs typeface="Consolas" panose="020B0609020204030204" pitchFamily="49" charset="0"/>
+              <a:latin typeface="Liberation Mono" panose="020B0609020204030204" pitchFamily="49" charset="0"/>
+              <a:cs typeface="Liberation Mono" panose="020B0609020204030204" pitchFamily="49" charset="0"/>
             </a:endParaRPr>
           </a:p>
           <a:p>
             <a:r>
               <a:rPr lang="en-US" sz="2400" dirty="0" smtClean="0">
-                <a:latin typeface="Consolas" panose="020B0609020204030204" pitchFamily="49" charset="0"/>
-                <a:cs typeface="Consolas" panose="020B0609020204030204" pitchFamily="49" charset="0"/>
+                <a:latin typeface="Liberation Mono" panose="020B0609020204030204" pitchFamily="49" charset="0"/>
+                <a:cs typeface="Liberation Mono" panose="020B0609020204030204" pitchFamily="49" charset="0"/>
               </a:rPr>
               <a:t>print(</a:t>
             </a:r>
             <a:r>
               <a:rPr lang="en-US" sz="2400" dirty="0" err="1" smtClean="0">
-                <a:latin typeface="Consolas" panose="020B0609020204030204" pitchFamily="49" charset="0"/>
-                <a:cs typeface="Consolas" panose="020B0609020204030204" pitchFamily="49" charset="0"/>
+                <a:latin typeface="Liberation Mono" panose="020B0609020204030204" pitchFamily="49" charset="0"/>
+                <a:cs typeface="Liberation Mono" panose="020B0609020204030204" pitchFamily="49" charset="0"/>
               </a:rPr>
               <a:t>abc</a:t>
             </a:r>
             <a:r>
               <a:rPr lang="en-US" sz="2400" dirty="0" smtClean="0">
-                <a:latin typeface="Consolas" panose="020B0609020204030204" pitchFamily="49" charset="0"/>
-                <a:cs typeface="Consolas" panose="020B0609020204030204" pitchFamily="49" charset="0"/>
+                <a:latin typeface="Liberation Mono" panose="020B0609020204030204" pitchFamily="49" charset="0"/>
+                <a:cs typeface="Liberation Mono" panose="020B0609020204030204" pitchFamily="49" charset="0"/>
               </a:rPr>
               <a:t>[0]) </a:t>
             </a:r>
@@ -11872,28 +11900,28 @@
           <a:p>
             <a:r>
               <a:rPr lang="en-US" altLang="ko-KR" sz="2400" dirty="0" smtClean="0">
-                <a:latin typeface="Consolas" panose="020B0609020204030204" pitchFamily="49" charset="0"/>
-                <a:cs typeface="Consolas" panose="020B0609020204030204" pitchFamily="49" charset="0"/>
+                <a:latin typeface="Liberation Mono" panose="020B0609020204030204" pitchFamily="49" charset="0"/>
+                <a:cs typeface="Liberation Mono" panose="020B0609020204030204" pitchFamily="49" charset="0"/>
               </a:rPr>
               <a:t>print(</a:t>
             </a:r>
             <a:r>
               <a:rPr lang="en-US" altLang="ko-KR" sz="2400" dirty="0" err="1" smtClean="0">
-                <a:latin typeface="Consolas" panose="020B0609020204030204" pitchFamily="49" charset="0"/>
-                <a:cs typeface="Consolas" panose="020B0609020204030204" pitchFamily="49" charset="0"/>
+                <a:latin typeface="Liberation Mono" panose="020B0609020204030204" pitchFamily="49" charset="0"/>
+                <a:cs typeface="Liberation Mono" panose="020B0609020204030204" pitchFamily="49" charset="0"/>
               </a:rPr>
               <a:t>abc</a:t>
             </a:r>
             <a:r>
               <a:rPr lang="en-US" altLang="ko-KR" sz="2400" dirty="0" smtClean="0">
-                <a:latin typeface="Consolas" panose="020B0609020204030204" pitchFamily="49" charset="0"/>
-                <a:cs typeface="Consolas" panose="020B0609020204030204" pitchFamily="49" charset="0"/>
+                <a:latin typeface="Liberation Mono" panose="020B0609020204030204" pitchFamily="49" charset="0"/>
+                <a:cs typeface="Liberation Mono" panose="020B0609020204030204" pitchFamily="49" charset="0"/>
               </a:rPr>
               <a:t>[1]) </a:t>
             </a:r>
             <a:endParaRPr lang="en-US" altLang="ko-KR" sz="2400" dirty="0">
-              <a:latin typeface="Consolas" panose="020B0609020204030204" pitchFamily="49" charset="0"/>
-              <a:cs typeface="Consolas" panose="020B0609020204030204" pitchFamily="49" charset="0"/>
+              <a:latin typeface="Liberation Mono" panose="020B0609020204030204" pitchFamily="49" charset="0"/>
+              <a:cs typeface="Liberation Mono" panose="020B0609020204030204" pitchFamily="49" charset="0"/>
             </a:endParaRPr>
           </a:p>
         </p:txBody>
@@ -11922,11 +11950,11 @@
           <a:p>
             <a:r>
               <a:rPr lang="en-US" sz="1200" dirty="0" smtClean="0"/>
-              <a:t>** “list”</a:t>
+              <a:t>** Also known as "list"</a:t>
             </a:r>
             <a:r>
               <a:rPr lang="ko-KR" altLang="en-US" sz="1200" dirty="0" smtClean="0"/>
-              <a:t>라 부름</a:t>
+              <a:t/>
             </a:r>
             <a:endParaRPr lang="en-US" sz="1200" dirty="0"/>
           </a:p>
@@ -11986,7 +12014,7 @@
           <a:p>
             <a:r>
               <a:rPr lang="ko-KR" altLang="en-US" dirty="0" smtClean="0"/>
-              <a:t>딕셔너리</a:t>
+              <a:t>Dictionary</a:t>
             </a:r>
             <a:endParaRPr lang="en-US" dirty="0"/>
           </a:p>
@@ -12073,22 +12101,22 @@
           <a:p>
             <a:r>
               <a:rPr lang="en-US" sz="2400" dirty="0" err="1" smtClean="0">
-                <a:latin typeface="Consolas" panose="020B0609020204030204" pitchFamily="49" charset="0"/>
-                <a:cs typeface="Consolas" panose="020B0609020204030204" pitchFamily="49" charset="0"/>
+                <a:latin typeface="Liberation Mono" panose="020B0609020204030204" pitchFamily="49" charset="0"/>
+                <a:cs typeface="Liberation Mono" panose="020B0609020204030204" pitchFamily="49" charset="0"/>
               </a:rPr>
               <a:t>abc</a:t>
             </a:r>
             <a:r>
               <a:rPr lang="en-US" sz="2400" dirty="0" smtClean="0">
-                <a:latin typeface="Consolas" panose="020B0609020204030204" pitchFamily="49" charset="0"/>
-                <a:cs typeface="Consolas" panose="020B0609020204030204" pitchFamily="49" charset="0"/>
+                <a:latin typeface="Liberation Mono" panose="020B0609020204030204" pitchFamily="49" charset="0"/>
+                <a:cs typeface="Liberation Mono" panose="020B0609020204030204" pitchFamily="49" charset="0"/>
               </a:rPr>
               <a:t> = </a:t>
             </a:r>
             <a:r>
               <a:rPr lang="en-US" altLang="ko-KR" sz="2400" dirty="0" smtClean="0">
-                <a:latin typeface="Consolas" panose="020B0609020204030204" pitchFamily="49" charset="0"/>
-                <a:cs typeface="Consolas" panose="020B0609020204030204" pitchFamily="49" charset="0"/>
+                <a:latin typeface="Liberation Mono" panose="020B0609020204030204" pitchFamily="49" charset="0"/>
+                <a:cs typeface="Liberation Mono" panose="020B0609020204030204" pitchFamily="49" charset="0"/>
               </a:rPr>
               <a:t>{}</a:t>
             </a:r>
@@ -12096,15 +12124,15 @@
           <a:p>
             <a:r>
               <a:rPr lang="en-US" altLang="ko-KR" sz="2400" dirty="0" err="1">
-                <a:latin typeface="Consolas" panose="020B0609020204030204" pitchFamily="49" charset="0"/>
-                <a:cs typeface="Consolas" panose="020B0609020204030204" pitchFamily="49" charset="0"/>
+                <a:latin typeface="Liberation Mono" panose="020B0609020204030204" pitchFamily="49" charset="0"/>
+                <a:cs typeface="Liberation Mono" panose="020B0609020204030204" pitchFamily="49" charset="0"/>
               </a:rPr>
               <a:t>abc</a:t>
             </a:r>
             <a:r>
               <a:rPr lang="en-US" sz="2400" dirty="0" smtClean="0">
-                <a:latin typeface="Consolas" panose="020B0609020204030204" pitchFamily="49" charset="0"/>
-                <a:cs typeface="Consolas" panose="020B0609020204030204" pitchFamily="49" charset="0"/>
+                <a:latin typeface="Liberation Mono" panose="020B0609020204030204" pitchFamily="49" charset="0"/>
+                <a:cs typeface="Liberation Mono" panose="020B0609020204030204" pitchFamily="49" charset="0"/>
               </a:rPr>
               <a:t>[‘a’] = 1</a:t>
             </a:r>
@@ -12112,64 +12140,64 @@
           <a:p>
             <a:r>
               <a:rPr lang="en-US" altLang="ko-KR" sz="2400" dirty="0" err="1">
-                <a:latin typeface="Consolas" panose="020B0609020204030204" pitchFamily="49" charset="0"/>
-                <a:cs typeface="Consolas" panose="020B0609020204030204" pitchFamily="49" charset="0"/>
+                <a:latin typeface="Liberation Mono" panose="020B0609020204030204" pitchFamily="49" charset="0"/>
+                <a:cs typeface="Liberation Mono" panose="020B0609020204030204" pitchFamily="49" charset="0"/>
               </a:rPr>
               <a:t>abc</a:t>
             </a:r>
             <a:r>
               <a:rPr lang="en-US" altLang="ko-KR" sz="2400" dirty="0" smtClean="0">
-                <a:latin typeface="Consolas" panose="020B0609020204030204" pitchFamily="49" charset="0"/>
-                <a:cs typeface="Consolas" panose="020B0609020204030204" pitchFamily="49" charset="0"/>
+                <a:latin typeface="Liberation Mono" panose="020B0609020204030204" pitchFamily="49" charset="0"/>
+                <a:cs typeface="Liberation Mono" panose="020B0609020204030204" pitchFamily="49" charset="0"/>
               </a:rPr>
               <a:t>[‘b’] </a:t>
             </a:r>
             <a:r>
               <a:rPr lang="en-US" altLang="ko-KR" sz="2400" dirty="0">
-                <a:latin typeface="Consolas" panose="020B0609020204030204" pitchFamily="49" charset="0"/>
-                <a:cs typeface="Consolas" panose="020B0609020204030204" pitchFamily="49" charset="0"/>
+                <a:latin typeface="Liberation Mono" panose="020B0609020204030204" pitchFamily="49" charset="0"/>
+                <a:cs typeface="Liberation Mono" panose="020B0609020204030204" pitchFamily="49" charset="0"/>
               </a:rPr>
               <a:t>= </a:t>
             </a:r>
             <a:r>
               <a:rPr lang="en-US" altLang="ko-KR" sz="2400" dirty="0" smtClean="0">
-                <a:latin typeface="Consolas" panose="020B0609020204030204" pitchFamily="49" charset="0"/>
-                <a:cs typeface="Consolas" panose="020B0609020204030204" pitchFamily="49" charset="0"/>
+                <a:latin typeface="Liberation Mono" panose="020B0609020204030204" pitchFamily="49" charset="0"/>
+                <a:cs typeface="Liberation Mono" panose="020B0609020204030204" pitchFamily="49" charset="0"/>
               </a:rPr>
               <a:t>2</a:t>
             </a:r>
           </a:p>
           <a:p>
             <a:endParaRPr lang="en-US" altLang="ko-KR" sz="2400" dirty="0" smtClean="0">
-              <a:latin typeface="Consolas" panose="020B0609020204030204" pitchFamily="49" charset="0"/>
-              <a:cs typeface="Consolas" panose="020B0609020204030204" pitchFamily="49" charset="0"/>
+              <a:latin typeface="Liberation Mono" panose="020B0609020204030204" pitchFamily="49" charset="0"/>
+              <a:cs typeface="Liberation Mono" panose="020B0609020204030204" pitchFamily="49" charset="0"/>
             </a:endParaRPr>
           </a:p>
           <a:p>
             <a:r>
               <a:rPr lang="en-US" altLang="ko-KR" sz="2400" dirty="0" smtClean="0">
-                <a:latin typeface="Consolas" panose="020B0609020204030204" pitchFamily="49" charset="0"/>
-                <a:cs typeface="Consolas" panose="020B0609020204030204" pitchFamily="49" charset="0"/>
+                <a:latin typeface="Liberation Mono" panose="020B0609020204030204" pitchFamily="49" charset="0"/>
+                <a:cs typeface="Liberation Mono" panose="020B0609020204030204" pitchFamily="49" charset="0"/>
               </a:rPr>
               <a:t>print(</a:t>
             </a:r>
             <a:r>
               <a:rPr lang="en-US" altLang="ko-KR" sz="2400" dirty="0" err="1" smtClean="0">
-                <a:latin typeface="Consolas" panose="020B0609020204030204" pitchFamily="49" charset="0"/>
-                <a:cs typeface="Consolas" panose="020B0609020204030204" pitchFamily="49" charset="0"/>
+                <a:latin typeface="Liberation Mono" panose="020B0609020204030204" pitchFamily="49" charset="0"/>
+                <a:cs typeface="Liberation Mono" panose="020B0609020204030204" pitchFamily="49" charset="0"/>
               </a:rPr>
               <a:t>abc</a:t>
             </a:r>
             <a:r>
               <a:rPr lang="en-US" altLang="ko-KR" sz="2400" dirty="0" smtClean="0">
-                <a:latin typeface="Consolas" panose="020B0609020204030204" pitchFamily="49" charset="0"/>
-                <a:cs typeface="Consolas" panose="020B0609020204030204" pitchFamily="49" charset="0"/>
+                <a:latin typeface="Liberation Mono" panose="020B0609020204030204" pitchFamily="49" charset="0"/>
+                <a:cs typeface="Liberation Mono" panose="020B0609020204030204" pitchFamily="49" charset="0"/>
               </a:rPr>
               <a:t>[‘a’])</a:t>
             </a:r>
             <a:endParaRPr lang="en-US" altLang="ko-KR" sz="2400" dirty="0">
-              <a:latin typeface="Consolas" panose="020B0609020204030204" pitchFamily="49" charset="0"/>
-              <a:cs typeface="Consolas" panose="020B0609020204030204" pitchFamily="49" charset="0"/>
+              <a:latin typeface="Liberation Mono" panose="020B0609020204030204" pitchFamily="49" charset="0"/>
+              <a:cs typeface="Liberation Mono" panose="020B0609020204030204" pitchFamily="49" charset="0"/>
             </a:endParaRPr>
           </a:p>
         </p:txBody>
@@ -12228,15 +12256,15 @@
           <a:p>
             <a:r>
               <a:rPr lang="ko-KR" altLang="en-US" dirty="0" smtClean="0"/>
-              <a:t>열 </a:t>
+              <a:t>List + Dictionary</a:t>
             </a:r>
             <a:r>
               <a:rPr lang="en-US" altLang="ko-KR" dirty="0" smtClean="0"/>
-              <a:t>+</a:t>
+              <a:t/>
             </a:r>
             <a:r>
               <a:rPr lang="ko-KR" altLang="en-US" dirty="0" smtClean="0"/>
-              <a:t> 딕셔너리</a:t>
+              <a:t/>
             </a:r>
             <a:endParaRPr lang="en-US" dirty="0"/>
           </a:p>
@@ -12323,15 +12351,15 @@
           <a:p>
             <a:r>
               <a:rPr lang="en-US" sz="2400" dirty="0" smtClean="0">
-                <a:latin typeface="Consolas" panose="020B0609020204030204" pitchFamily="49" charset="0"/>
-                <a:cs typeface="Consolas" panose="020B0609020204030204" pitchFamily="49" charset="0"/>
+                <a:latin typeface="Liberation Mono" panose="020B0609020204030204" pitchFamily="49" charset="0"/>
+                <a:cs typeface="Liberation Mono" panose="020B0609020204030204" pitchFamily="49" charset="0"/>
               </a:rPr>
               <a:t>li = </a:t>
             </a:r>
             <a:r>
               <a:rPr lang="en-US" altLang="ko-KR" sz="2400" dirty="0" smtClean="0">
-                <a:latin typeface="Consolas" panose="020B0609020204030204" pitchFamily="49" charset="0"/>
-                <a:cs typeface="Consolas" panose="020B0609020204030204" pitchFamily="49" charset="0"/>
+                <a:latin typeface="Liberation Mono" panose="020B0609020204030204" pitchFamily="49" charset="0"/>
+                <a:cs typeface="Liberation Mono" panose="020B0609020204030204" pitchFamily="49" charset="0"/>
               </a:rPr>
               <a:t>[]</a:t>
             </a:r>
@@ -12339,36 +12367,36 @@
           <a:p>
             <a:r>
               <a:rPr lang="en-US" altLang="ko-KR" sz="2400" dirty="0" err="1" smtClean="0">
-                <a:latin typeface="Consolas" panose="020B0609020204030204" pitchFamily="49" charset="0"/>
-                <a:cs typeface="Consolas" panose="020B0609020204030204" pitchFamily="49" charset="0"/>
+                <a:latin typeface="Liberation Mono" panose="020B0609020204030204" pitchFamily="49" charset="0"/>
+                <a:cs typeface="Liberation Mono" panose="020B0609020204030204" pitchFamily="49" charset="0"/>
               </a:rPr>
               <a:t>li.append</a:t>
             </a:r>
             <a:r>
               <a:rPr lang="en-US" altLang="ko-KR" sz="2400" dirty="0" smtClean="0">
-                <a:latin typeface="Consolas" panose="020B0609020204030204" pitchFamily="49" charset="0"/>
-                <a:cs typeface="Consolas" panose="020B0609020204030204" pitchFamily="49" charset="0"/>
+                <a:latin typeface="Liberation Mono" panose="020B0609020204030204" pitchFamily="49" charset="0"/>
+                <a:cs typeface="Liberation Mono" panose="020B0609020204030204" pitchFamily="49" charset="0"/>
               </a:rPr>
               <a:t>({‘a’:1})</a:t>
             </a:r>
           </a:p>
           <a:p>
             <a:endParaRPr lang="en-US" altLang="ko-KR" sz="2400" dirty="0" smtClean="0">
-              <a:latin typeface="Consolas" panose="020B0609020204030204" pitchFamily="49" charset="0"/>
-              <a:cs typeface="Consolas" panose="020B0609020204030204" pitchFamily="49" charset="0"/>
+              <a:latin typeface="Liberation Mono" panose="020B0609020204030204" pitchFamily="49" charset="0"/>
+              <a:cs typeface="Liberation Mono" panose="020B0609020204030204" pitchFamily="49" charset="0"/>
             </a:endParaRPr>
           </a:p>
           <a:p>
             <a:r>
               <a:rPr lang="en-US" altLang="ko-KR" sz="2400" dirty="0" smtClean="0">
-                <a:latin typeface="Consolas" panose="020B0609020204030204" pitchFamily="49" charset="0"/>
-                <a:cs typeface="Consolas" panose="020B0609020204030204" pitchFamily="49" charset="0"/>
+                <a:latin typeface="Liberation Mono" panose="020B0609020204030204" pitchFamily="49" charset="0"/>
+                <a:cs typeface="Liberation Mono" panose="020B0609020204030204" pitchFamily="49" charset="0"/>
               </a:rPr>
               <a:t>print(li[0][‘a’])</a:t>
             </a:r>
             <a:endParaRPr lang="en-US" altLang="ko-KR" sz="2400" dirty="0">
-              <a:latin typeface="Consolas" panose="020B0609020204030204" pitchFamily="49" charset="0"/>
-              <a:cs typeface="Consolas" panose="020B0609020204030204" pitchFamily="49" charset="0"/>
+              <a:latin typeface="Liberation Mono" panose="020B0609020204030204" pitchFamily="49" charset="0"/>
+              <a:cs typeface="Liberation Mono" panose="020B0609020204030204" pitchFamily="49" charset="0"/>
             </a:endParaRPr>
           </a:p>
         </p:txBody>
@@ -12436,74 +12464,74 @@
     </a:clrScheme>
     <a:fontScheme name="Office 테마">
       <a:majorFont>
-        <a:latin typeface="Calibri Light" panose="020F0302020204030204"/>
+        <a:latin typeface="Carlito" panose="020F0302020204030204"/>
         <a:ea typeface=""/>
         <a:cs typeface=""/>
-        <a:font script="Jpan" typeface="ＭＳ Ｐゴシック"/>
-        <a:font script="Hang" typeface="맑은 고딕"/>
-        <a:font script="Hans" typeface="宋体"/>
-        <a:font script="Hant" typeface="新細明體"/>
-        <a:font script="Arab" typeface="Times New Roman"/>
-        <a:font script="Hebr" typeface="Times New Roman"/>
-        <a:font script="Thai" typeface="Angsana New"/>
-        <a:font script="Ethi" typeface="Nyala"/>
-        <a:font script="Beng" typeface="Vrinda"/>
-        <a:font script="Gujr" typeface="Shruti"/>
-        <a:font script="Khmr" typeface="MoolBoran"/>
-        <a:font script="Knda" typeface="Tunga"/>
-        <a:font script="Guru" typeface="Raavi"/>
-        <a:font script="Cans" typeface="Euphemia"/>
-        <a:font script="Cher" typeface="Plantagenet Cherokee"/>
-        <a:font script="Yiii" typeface="Microsoft Yi Baiti"/>
-        <a:font script="Tibt" typeface="Microsoft Himalaya"/>
-        <a:font script="Thaa" typeface="MV Boli"/>
-        <a:font script="Deva" typeface="Mangal"/>
-        <a:font script="Telu" typeface="Gautami"/>
-        <a:font script="Taml" typeface="Latha"/>
-        <a:font script="Syrc" typeface="Estrangelo Edessa"/>
-        <a:font script="Orya" typeface="Kalinga"/>
-        <a:font script="Mlym" typeface="Kartika"/>
-        <a:font script="Laoo" typeface="DokChampa"/>
-        <a:font script="Sinh" typeface="Iskoola Pota"/>
-        <a:font script="Mong" typeface="Mongolian Baiti"/>
-        <a:font script="Viet" typeface="Times New Roman"/>
-        <a:font script="Uigh" typeface="Microsoft Uighur"/>
-        <a:font script="Geor" typeface="Sylfaen"/>
+        <a:font script="Jpan" typeface="Liberation Sans"/>
+        <a:font script="Hang" typeface="Liberation Sans"/>
+        <a:font script="Hans" typeface="Liberation Sans"/>
+        <a:font script="Hant" typeface="Liberation Sans"/>
+        <a:font script="Arab" typeface="Liberation Serif"/>
+        <a:font script="Hebr" typeface="Liberation Serif"/>
+        <a:font script="Thai" typeface="Liberation Serif"/>
+        <a:font script="Ethi" typeface="Liberation Sans"/>
+        <a:font script="Beng" typeface="Liberation Sans"/>
+        <a:font script="Gujr" typeface="Liberation Sans"/>
+        <a:font script="Khmr" typeface="Liberation Sans"/>
+        <a:font script="Knda" typeface="Liberation Sans"/>
+        <a:font script="Guru" typeface="Liberation Sans"/>
+        <a:font script="Cans" typeface="Liberation Sans"/>
+        <a:font script="Cher" typeface="Liberation Serif"/>
+        <a:font script="Yiii" typeface="Liberation Sans"/>
+        <a:font script="Tibt" typeface="Liberation Sans"/>
+        <a:font script="Thaa" typeface="Liberation Sans"/>
+        <a:font script="Deva" typeface="Liberation Sans"/>
+        <a:font script="Telu" typeface="Liberation Sans"/>
+        <a:font script="Taml" typeface="Liberation Sans"/>
+        <a:font script="Syrc" typeface="Liberation Sans"/>
+        <a:font script="Orya" typeface="Liberation Sans"/>
+        <a:font script="Mlym" typeface="Liberation Sans"/>
+        <a:font script="Laoo" typeface="Liberation Sans"/>
+        <a:font script="Sinh" typeface="Liberation Sans"/>
+        <a:font script="Mong" typeface="Liberation Sans"/>
+        <a:font script="Viet" typeface="Liberation Serif"/>
+        <a:font script="Uigh" typeface="Liberation Sans"/>
+        <a:font script="Geor" typeface="Liberation Serif"/>
       </a:majorFont>
       <a:minorFont>
-        <a:latin typeface="Calibri" panose="020F0502020204030204"/>
+        <a:latin typeface="Carlito" panose="020F0502020204030204"/>
         <a:ea typeface=""/>
         <a:cs typeface=""/>
-        <a:font script="Jpan" typeface="ＭＳ Ｐゴシック"/>
-        <a:font script="Hang" typeface="맑은 고딕"/>
-        <a:font script="Hans" typeface="宋体"/>
-        <a:font script="Hant" typeface="新細明體"/>
-        <a:font script="Arab" typeface="Arial"/>
-        <a:font script="Hebr" typeface="Arial"/>
-        <a:font script="Thai" typeface="Cordia New"/>
-        <a:font script="Ethi" typeface="Nyala"/>
-        <a:font script="Beng" typeface="Vrinda"/>
-        <a:font script="Gujr" typeface="Shruti"/>
-        <a:font script="Khmr" typeface="DaunPenh"/>
-        <a:font script="Knda" typeface="Tunga"/>
-        <a:font script="Guru" typeface="Raavi"/>
-        <a:font script="Cans" typeface="Euphemia"/>
-        <a:font script="Cher" typeface="Plantagenet Cherokee"/>
-        <a:font script="Yiii" typeface="Microsoft Yi Baiti"/>
-        <a:font script="Tibt" typeface="Microsoft Himalaya"/>
-        <a:font script="Thaa" typeface="MV Boli"/>
-        <a:font script="Deva" typeface="Mangal"/>
-        <a:font script="Telu" typeface="Gautami"/>
-        <a:font script="Taml" typeface="Latha"/>
-        <a:font script="Syrc" typeface="Estrangelo Edessa"/>
-        <a:font script="Orya" typeface="Kalinga"/>
-        <a:font script="Mlym" typeface="Kartika"/>
-        <a:font script="Laoo" typeface="DokChampa"/>
-        <a:font script="Sinh" typeface="Iskoola Pota"/>
-        <a:font script="Mong" typeface="Mongolian Baiti"/>
-        <a:font script="Viet" typeface="Arial"/>
-        <a:font script="Uigh" typeface="Microsoft Uighur"/>
-        <a:font script="Geor" typeface="Sylfaen"/>
+        <a:font script="Jpan" typeface="Liberation Sans"/>
+        <a:font script="Hang" typeface="Liberation Sans"/>
+        <a:font script="Hans" typeface="Liberation Sans"/>
+        <a:font script="Hant" typeface="Liberation Sans"/>
+        <a:font script="Arab" typeface="Liberation Sans"/>
+        <a:font script="Hebr" typeface="Liberation Sans"/>
+        <a:font script="Thai" typeface="Liberation Sans"/>
+        <a:font script="Ethi" typeface="Liberation Sans"/>
+        <a:font script="Beng" typeface="Liberation Sans"/>
+        <a:font script="Gujr" typeface="Liberation Sans"/>
+        <a:font script="Khmr" typeface="Liberation Sans"/>
+        <a:font script="Knda" typeface="Liberation Sans"/>
+        <a:font script="Guru" typeface="Liberation Sans"/>
+        <a:font script="Cans" typeface="Liberation Sans"/>
+        <a:font script="Cher" typeface="Liberation Serif"/>
+        <a:font script="Yiii" typeface="Liberation Sans"/>
+        <a:font script="Tibt" typeface="Liberation Sans"/>
+        <a:font script="Thaa" typeface="Liberation Sans"/>
+        <a:font script="Deva" typeface="Liberation Sans"/>
+        <a:font script="Telu" typeface="Liberation Sans"/>
+        <a:font script="Taml" typeface="Liberation Sans"/>
+        <a:font script="Syrc" typeface="Liberation Sans"/>
+        <a:font script="Orya" typeface="Liberation Sans"/>
+        <a:font script="Mlym" typeface="Liberation Sans"/>
+        <a:font script="Laoo" typeface="Liberation Sans"/>
+        <a:font script="Sinh" typeface="Liberation Sans"/>
+        <a:font script="Mong" typeface="Liberation Sans"/>
+        <a:font script="Viet" typeface="Liberation Sans"/>
+        <a:font script="Uigh" typeface="Liberation Sans"/>
+        <a:font script="Geor" typeface="Liberation Serif"/>
       </a:minorFont>
     </a:fontScheme>
     <a:fmtScheme name="Office 테마">
@@ -12697,74 +12725,74 @@
     </a:clrScheme>
     <a:fontScheme name="Office">
       <a:majorFont>
-        <a:latin typeface="맑은 고딕" panose="020F0302020204030204"/>
+        <a:latin typeface="Liberation Sans" panose="020F0302020204030204"/>
         <a:ea typeface=""/>
         <a:cs typeface=""/>
-        <a:font script="Jpan" typeface="ＭＳ Ｐゴシック"/>
-        <a:font script="Hang" typeface="맑은 고딕"/>
-        <a:font script="Hans" typeface="宋体"/>
-        <a:font script="Hant" typeface="新細明體"/>
-        <a:font script="Arab" typeface="Times New Roman"/>
-        <a:font script="Hebr" typeface="Times New Roman"/>
-        <a:font script="Thai" typeface="Angsana New"/>
-        <a:font script="Ethi" typeface="Nyala"/>
-        <a:font script="Beng" typeface="Vrinda"/>
-        <a:font script="Gujr" typeface="Shruti"/>
-        <a:font script="Khmr" typeface="MoolBoran"/>
-        <a:font script="Knda" typeface="Tunga"/>
-        <a:font script="Guru" typeface="Raavi"/>
-        <a:font script="Cans" typeface="Euphemia"/>
-        <a:font script="Cher" typeface="Plantagenet Cherokee"/>
-        <a:font script="Yiii" typeface="Microsoft Yi Baiti"/>
-        <a:font script="Tibt" typeface="Microsoft Himalaya"/>
-        <a:font script="Thaa" typeface="MV Boli"/>
-        <a:font script="Deva" typeface="Mangal"/>
-        <a:font script="Telu" typeface="Gautami"/>
-        <a:font script="Taml" typeface="Latha"/>
-        <a:font script="Syrc" typeface="Estrangelo Edessa"/>
-        <a:font script="Orya" typeface="Kalinga"/>
-        <a:font script="Mlym" typeface="Kartika"/>
-        <a:font script="Laoo" typeface="DokChampa"/>
-        <a:font script="Sinh" typeface="Iskoola Pota"/>
-        <a:font script="Mong" typeface="Mongolian Baiti"/>
-        <a:font script="Viet" typeface="Times New Roman"/>
-        <a:font script="Uigh" typeface="Microsoft Uighur"/>
-        <a:font script="Geor" typeface="Sylfaen"/>
+        <a:font script="Jpan" typeface="Liberation Sans"/>
+        <a:font script="Hang" typeface="Liberation Sans"/>
+        <a:font script="Hans" typeface="Liberation Sans"/>
+        <a:font script="Hant" typeface="Liberation Sans"/>
+        <a:font script="Arab" typeface="Liberation Serif"/>
+        <a:font script="Hebr" typeface="Liberation Serif"/>
+        <a:font script="Thai" typeface="Liberation Serif"/>
+        <a:font script="Ethi" typeface="Liberation Sans"/>
+        <a:font script="Beng" typeface="Liberation Sans"/>
+        <a:font script="Gujr" typeface="Liberation Sans"/>
+        <a:font script="Khmr" typeface="Liberation Sans"/>
+        <a:font script="Knda" typeface="Liberation Sans"/>
+        <a:font script="Guru" typeface="Liberation Sans"/>
+        <a:font script="Cans" typeface="Liberation Sans"/>
+        <a:font script="Cher" typeface="Liberation Serif"/>
+        <a:font script="Yiii" typeface="Liberation Sans"/>
+        <a:font script="Tibt" typeface="Liberation Sans"/>
+        <a:font script="Thaa" typeface="Liberation Sans"/>
+        <a:font script="Deva" typeface="Liberation Sans"/>
+        <a:font script="Telu" typeface="Liberation Sans"/>
+        <a:font script="Taml" typeface="Liberation Sans"/>
+        <a:font script="Syrc" typeface="Liberation Sans"/>
+        <a:font script="Orya" typeface="Liberation Sans"/>
+        <a:font script="Mlym" typeface="Liberation Sans"/>
+        <a:font script="Laoo" typeface="Liberation Sans"/>
+        <a:font script="Sinh" typeface="Liberation Sans"/>
+        <a:font script="Mong" typeface="Liberation Sans"/>
+        <a:font script="Viet" typeface="Liberation Serif"/>
+        <a:font script="Uigh" typeface="Liberation Sans"/>
+        <a:font script="Geor" typeface="Liberation Serif"/>
       </a:majorFont>
       <a:minorFont>
-        <a:latin typeface="맑은 고딕" panose="020F0502020204030204"/>
+        <a:latin typeface="Liberation Sans" panose="020F0502020204030204"/>
         <a:ea typeface=""/>
         <a:cs typeface=""/>
-        <a:font script="Jpan" typeface="ＭＳ Ｐゴシック"/>
-        <a:font script="Hang" typeface="맑은 고딕"/>
-        <a:font script="Hans" typeface="宋体"/>
-        <a:font script="Hant" typeface="新細明體"/>
-        <a:font script="Arab" typeface="Arial"/>
-        <a:font script="Hebr" typeface="Arial"/>
-        <a:font script="Thai" typeface="Cordia New"/>
-        <a:font script="Ethi" typeface="Nyala"/>
-        <a:font script="Beng" typeface="Vrinda"/>
-        <a:font script="Gujr" typeface="Shruti"/>
-        <a:font script="Khmr" typeface="DaunPenh"/>
-        <a:font script="Knda" typeface="Tunga"/>
-        <a:font script="Guru" typeface="Raavi"/>
-        <a:font script="Cans" typeface="Euphemia"/>
-        <a:font script="Cher" typeface="Plantagenet Cherokee"/>
-        <a:font script="Yiii" typeface="Microsoft Yi Baiti"/>
-        <a:font script="Tibt" typeface="Microsoft Himalaya"/>
-        <a:font script="Thaa" typeface="MV Boli"/>
-        <a:font script="Deva" typeface="Mangal"/>
-        <a:font script="Telu" typeface="Gautami"/>
-        <a:font script="Taml" typeface="Latha"/>
-        <a:font script="Syrc" typeface="Estrangelo Edessa"/>
-        <a:font script="Orya" typeface="Kalinga"/>
-        <a:font script="Mlym" typeface="Kartika"/>
-        <a:font script="Laoo" typeface="DokChampa"/>
-        <a:font script="Sinh" typeface="Iskoola Pota"/>
-        <a:font script="Mong" typeface="Mongolian Baiti"/>
-        <a:font script="Viet" typeface="Arial"/>
-        <a:font script="Uigh" typeface="Microsoft Uighur"/>
-        <a:font script="Geor" typeface="Sylfaen"/>
+        <a:font script="Jpan" typeface="Liberation Sans"/>
+        <a:font script="Hang" typeface="Liberation Sans"/>
+        <a:font script="Hans" typeface="Liberation Sans"/>
+        <a:font script="Hant" typeface="Liberation Sans"/>
+        <a:font script="Arab" typeface="Liberation Sans"/>
+        <a:font script="Hebr" typeface="Liberation Sans"/>
+        <a:font script="Thai" typeface="Liberation Sans"/>
+        <a:font script="Ethi" typeface="Liberation Sans"/>
+        <a:font script="Beng" typeface="Liberation Sans"/>
+        <a:font script="Gujr" typeface="Liberation Sans"/>
+        <a:font script="Khmr" typeface="Liberation Sans"/>
+        <a:font script="Knda" typeface="Liberation Sans"/>
+        <a:font script="Guru" typeface="Liberation Sans"/>
+        <a:font script="Cans" typeface="Liberation Sans"/>
+        <a:font script="Cher" typeface="Liberation Serif"/>
+        <a:font script="Yiii" typeface="Liberation Sans"/>
+        <a:font script="Tibt" typeface="Liberation Sans"/>
+        <a:font script="Thaa" typeface="Liberation Sans"/>
+        <a:font script="Deva" typeface="Liberation Sans"/>
+        <a:font script="Telu" typeface="Liberation Sans"/>
+        <a:font script="Taml" typeface="Liberation Sans"/>
+        <a:font script="Syrc" typeface="Liberation Sans"/>
+        <a:font script="Orya" typeface="Liberation Sans"/>
+        <a:font script="Mlym" typeface="Liberation Sans"/>
+        <a:font script="Laoo" typeface="Liberation Sans"/>
+        <a:font script="Sinh" typeface="Liberation Sans"/>
+        <a:font script="Mong" typeface="Liberation Sans"/>
+        <a:font script="Viet" typeface="Liberation Sans"/>
+        <a:font script="Uigh" typeface="Liberation Sans"/>
+        <a:font script="Geor" typeface="Liberation Serif"/>
       </a:minorFont>
     </a:fontScheme>
     <a:fmtScheme name="Office">
